--- a/docs/week-8/cen429-week-8-sunum.en.pptx
+++ b/docs/week-8/cen429-week-8-sunum.en.pptx
@@ -539,7 +539,7 @@
           <a:lstStyle/>
           <a:p>
             <a:r>
-              <a:t>Quiz-1 haftası: 1-6. haftaların kavramlarını tekrar ediyoruz; bu sunum çalışma rehberidir.</a:t>
+              <a:t>Speaker note: Quiz-1 week: we review the concepts of weeks 1-6; this deck is a study guide.</a:t>
             </a:r>
           </a:p>
         </p:txBody>
@@ -609,7 +609,7 @@
           <a:lstStyle/>
           <a:p>
             <a:r>
-              <a:t>1) sprintf taşması (STR31-C, snprintf) + syslog biçim dizisi (FIO30-C, "%s"). 2) memset derleyici tarafından kaldırılabilir (MSC06-C) → explicit_bzero/SecureZeroMemory.</a:t>
+              <a:t>Speaker note: 1) sprintf overflow (STR31-C, use snprintf) + syslog format string (FIO30-C, use "%s"). 2) memset can be removed by the compiler (MSC06-C) → use explicit_bzero/SecureZeroMemory.</a:t>
             </a:r>
           </a:p>
         </p:txBody>
@@ -679,7 +679,7 @@
           <a:lstStyle/>
           <a:p>
             <a:r>
-              <a:t>1) SQL enjeksiyonu → PreparedStatement. 2) Etiket doğrulanmadan açık metin kullanılıyor, Final dönüşü denetlenmiyor. 3) Fail-open: hata yutuluyor, bağlantı kabul ediliyor.</a:t>
+              <a:t>Speaker note: 1) SQL injection → use a PreparedStatement. 2) The plaintext is used before the tag is verified, and the return value of Final is never checked. 3) Fail-open: the error is swallowed and the connection is accepted.</a:t>
             </a:r>
           </a:p>
         </p:txBody>
@@ -749,7 +749,7 @@
           <a:lstStyle/>
           <a:p>
             <a:r>
-              <a:t>Cevaplar 8. hafta sayfasında, açılır kutularda.</a:t>
+              <a:t>Speaker note: Answers are on the Week 8 page, in collapsible boxes.</a:t>
             </a:r>
           </a:p>
         </p:txBody>
@@ -819,7 +819,7 @@
           <a:lstStyle/>
           <a:p>
             <a:r>
-              <a:t>Quiz-1 kapsamı 1-6. hafta. Her haftanın anahtar noktalarını ve çok sorulan ayrımları tekrar ediyoruz.</a:t>
+              <a:t>Speaker note: Quiz-1 covers weeks 1-6. We review each week's key points and the most commonly confused distinctions.</a:t>
             </a:r>
           </a:p>
         </p:txBody>
@@ -3877,7 +3877,7 @@
                   <a:srgbClr val="5B6770"/>
                 </a:solidFill>
               </a:rPr>
-              <a:t>CEN429 Güvenli Programlama · Hafta 8</a:t>
+              <a:t>CEN429 Secure Programming · Week 8</a:t>
             </a:r>
           </a:p>
         </p:txBody>
@@ -3910,7 +3910,7 @@
                   <a:srgbClr val="5B6770"/>
                 </a:solidFill>
               </a:rPr>
-              <a:t>RTEÜ Bilgisayar Mühendisliği · 2026-2027 Güz</a:t>
+              <a:t>RTEU Computer Engineering · 2026-2027 Fall</a:t>
             </a:r>
           </a:p>
         </p:txBody>
@@ -3944,7 +3944,7 @@
                   <a:srgbClr val="006D77"/>
                 </a:solidFill>
               </a:rPr>
-              <a:t>Ara Sınav Haftası: Quiz-1</a:t>
+              <a:t>Midterm Exam Week: Quiz-1</a:t>
             </a:r>
           </a:p>
         </p:txBody>
@@ -3978,7 +3978,7 @@
                   <a:srgbClr val="1F2D3A"/>
                 </a:solidFill>
               </a:rPr>
-              <a:t>CEN429 Güvenli Programlama — Hafta 8</a:t>
+              <a:t>CEN429 Secure Programming — Week 8</a:t>
             </a:r>
           </a:p>
         </p:txBody>
@@ -4012,7 +4012,7 @@
                   <a:srgbClr val="1F2D3A"/>
                 </a:solidFill>
               </a:rPr>
-              <a:t>Dr. Öğr. Üyesi Uğur CORUH · 31.10–08.11.2026</a:t>
+              <a:t>Asst. Prof. Dr. Uğur CORUH · 31.10–08.11.2026</a:t>
             </a:r>
           </a:p>
         </p:txBody>
@@ -4087,7 +4087,7 @@
                   <a:srgbClr val="5B6770"/>
                 </a:solidFill>
               </a:rPr>
-              <a:t>CEN429 Güvenli Programlama · Hafta 8</a:t>
+              <a:t>CEN429 Secure Programming · Week 8</a:t>
             </a:r>
           </a:p>
         </p:txBody>
@@ -4120,7 +4120,7 @@
                   <a:srgbClr val="5B6770"/>
                 </a:solidFill>
               </a:rPr>
-              <a:t>RTEÜ Bilgisayar Mühendisliği · 2026-2027 Güz</a:t>
+              <a:t>RTEU Computer Engineering · 2026-2027 Fall</a:t>
             </a:r>
           </a:p>
         </p:txBody>
@@ -4187,7 +4187,7 @@
                   <a:srgbClr val="006D77"/>
                 </a:solidFill>
               </a:rPr>
-              <a:t>Bir haftalık plan</a:t>
+              <a:t>A One-Week Plan</a:t>
             </a:r>
           </a:p>
         </p:txBody>
@@ -4202,7 +4202,7 @@
         </p:nvGraphicFramePr>
         <p:xfrm>
           <a:off x="640080" y="1325880"/>
-          <a:ext cx="10911534" cy="3368649"/>
+          <a:ext cx="10911534" cy="2940710"/>
         </p:xfrm>
         <a:graphic>
           <a:graphicData uri="http://schemas.openxmlformats.org/drawingml/2006/table">
@@ -4211,10 +4211,10 @@
                 <a:tableStyleId>{5C22544A-7EE6-4342-B048-85BDC9FD1C3A}</a:tableStyleId>
               </a:tblPr>
               <a:tblGrid>
-                <a:gridCol w="966844"/>
-                <a:gridCol w="9944690"/>
+                <a:gridCol w="1018409"/>
+                <a:gridCol w="9893125"/>
               </a:tblGrid>
-              <a:tr h="421081">
+              <a:tr h="367588">
                 <a:tc>
                   <a:txBody>
                     <a:bodyPr wrap="square"/>
@@ -4226,7 +4226,7 @@
                             <a:srgbClr val="FFFFFF"/>
                           </a:solidFill>
                         </a:rPr>
-                        <a:t>Gün</a:t>
+                        <a:t>Day</a:t>
                       </a:r>
                     </a:p>
                   </a:txBody>
@@ -4247,7 +4247,7 @@
                             <a:srgbClr val="FFFFFF"/>
                           </a:solidFill>
                         </a:rPr>
-                        <a:t>Ne yapılacak?</a:t>
+                        <a:t>What to do</a:t>
                       </a:r>
                     </a:p>
                   </a:txBody>
@@ -4258,7 +4258,7 @@
                   </a:tcPr>
                 </a:tc>
               </a:tr>
-              <a:tr h="421081">
+              <a:tr h="367588">
                 <a:tc>
                   <a:txBody>
                     <a:bodyPr wrap="square"/>
@@ -4291,7 +4291,7 @@
                             <a:srgbClr val="1F2D3A"/>
                           </a:solidFill>
                         </a:rPr>
-                        <a:t>1. hafta: STRIDE, saldırı ağacı, koruma planı · Demo 1–4</a:t>
+                        <a:t>Week 1: STRIDE, attack tree, protection plan · Demo 1–4</a:t>
                       </a:r>
                     </a:p>
                   </a:txBody>
@@ -4302,7 +4302,7 @@
                   </a:tcPr>
                 </a:tc>
               </a:tr>
-              <a:tr h="421081">
+              <a:tr h="367588">
                 <a:tc>
                   <a:txBody>
                     <a:bodyPr wrap="square"/>
@@ -4335,7 +4335,7 @@
                             <a:srgbClr val="1F2D3A"/>
                           </a:solidFill>
                         </a:rPr>
-                        <a:t>2. hafta: BLP, Biba, Clark–Wilson · bir CVSS vektörünü kendin puanla</a:t>
+                        <a:t>Week 2: BLP, Biba, Clark–Wilson · score a CVSS vector yourself</a:t>
                       </a:r>
                     </a:p>
                   </a:txBody>
@@ -4346,7 +4346,7 @@
                   </a:tcPr>
                 </a:tc>
               </a:tr>
-              <a:tr h="421081">
+              <a:tr h="367588">
                 <a:tc>
                   <a:txBody>
                     <a:bodyPr wrap="square"/>
@@ -4379,7 +4379,7 @@
                             <a:srgbClr val="1F2D3A"/>
                           </a:solidFill>
                         </a:rPr>
-                        <a:t>3. hafta (1): AEAD, nonce, KDF, rastgele sayı · Demo 1–5</a:t>
+                        <a:t>Week 3 (1): AEAD, nonce, KDF, random numbers · Demo 1–5</a:t>
                       </a:r>
                     </a:p>
                   </a:txBody>
@@ -4390,7 +4390,7 @@
                   </a:tcPr>
                 </a:tc>
               </a:tr>
-              <a:tr h="421081">
+              <a:tr h="367588">
                 <a:tc>
                   <a:txBody>
                     <a:bodyPr wrap="square"/>
@@ -4423,7 +4423,7 @@
                             <a:srgbClr val="1F2D3A"/>
                           </a:solidFill>
                         </a:rPr>
-                        <a:t>3. hafta (2): anahtar yönetimi, TLS, sabitleme, kabuklar · Demo 6–9</a:t>
+                        <a:t>Week 3 (2): key management, TLS, pinning, shells · Demo 6–9</a:t>
                       </a:r>
                     </a:p>
                   </a:txBody>
@@ -4434,7 +4434,7 @@
                   </a:tcPr>
                 </a:tc>
               </a:tr>
-              <a:tr h="421081">
+              <a:tr h="367588">
                 <a:tc>
                   <a:txBody>
                     <a:bodyPr wrap="square"/>
@@ -4467,7 +4467,7 @@
                             <a:srgbClr val="1F2D3A"/>
                           </a:solidFill>
                         </a:rPr>
-                        <a:t>4. hafta: CERT çiftleri, biçim dizisi, UAF, UB, korumalar</a:t>
+                        <a:t>Week 4: CERT pairs, format string, UAF, UB, protections</a:t>
                       </a:r>
                     </a:p>
                   </a:txBody>
@@ -4478,7 +4478,7 @@
                   </a:tcPr>
                 </a:tc>
               </a:tr>
-              <a:tr h="421081">
+              <a:tr h="367588">
                 <a:tc>
                   <a:txBody>
                     <a:bodyPr wrap="square"/>
@@ -4511,7 +4511,7 @@
                             <a:srgbClr val="1F2D3A"/>
                           </a:solidFill>
                         </a:rPr>
-                        <a:t>5–6. hafta: enjeksiyon, seri durumdan çıkarma, ProGuard, SBOM, RASP</a:t>
+                        <a:t>Weeks 5–6: injection, deserialisation, ProGuard, SBOM, RASP</a:t>
                       </a:r>
                     </a:p>
                   </a:txBody>
@@ -4522,7 +4522,7 @@
                   </a:tcPr>
                 </a:tc>
               </a:tr>
-              <a:tr h="421082">
+              <a:tr h="367594">
                 <a:tc>
                   <a:txBody>
                     <a:bodyPr wrap="square"/>
@@ -4555,7 +4555,7 @@
                             <a:srgbClr val="1F2D3A"/>
                           </a:solidFill>
                         </a:rPr>
-                        <a:t>Örnek soruları süre tutarak çöz, yanlışları oku</a:t>
+                        <a:t>Work through sample questions against the clock, review mistakes</a:t>
                       </a:r>
                     </a:p>
                   </a:txBody>
@@ -4640,7 +4640,7 @@
                   <a:srgbClr val="5B6770"/>
                 </a:solidFill>
               </a:rPr>
-              <a:t>CEN429 Güvenli Programlama · Hafta 8</a:t>
+              <a:t>CEN429 Secure Programming · Week 8</a:t>
             </a:r>
           </a:p>
         </p:txBody>
@@ -4673,7 +4673,7 @@
                   <a:srgbClr val="5B6770"/>
                 </a:solidFill>
               </a:rPr>
-              <a:t>RTEÜ Bilgisayar Mühendisliği · 2026-2027 Güz</a:t>
+              <a:t>RTEU Computer Engineering · 2026-2027 Fall</a:t>
             </a:r>
           </a:p>
         </p:txBody>
@@ -4740,7 +4740,7 @@
                   <a:srgbClr val="006D77"/>
                 </a:solidFill>
               </a:rPr>
-              <a:t>Çalışma planı — şema</a:t>
+              <a:t>Study Plan — Diagram</a:t>
             </a:r>
           </a:p>
         </p:txBody>
@@ -4839,7 +4839,7 @@
                   <a:srgbClr val="5B6770"/>
                 </a:solidFill>
               </a:rPr>
-              <a:t>CEN429 Güvenli Programlama · Hafta 8</a:t>
+              <a:t>CEN429 Secure Programming · Week 8</a:t>
             </a:r>
           </a:p>
         </p:txBody>
@@ -4872,7 +4872,7 @@
                   <a:srgbClr val="5B6770"/>
                 </a:solidFill>
               </a:rPr>
-              <a:t>RTEÜ Bilgisayar Mühendisliği · 2026-2027 Güz</a:t>
+              <a:t>RTEU Computer Engineering · 2026-2027 Fall</a:t>
             </a:r>
           </a:p>
         </p:txBody>
@@ -4939,7 +4939,7 @@
                   <a:srgbClr val="006D77"/>
                 </a:solidFill>
               </a:rPr>
-              <a:t>Örnek: hatayı bulun (1)</a:t>
+              <a:t>Example: Find the Bug (1)</a:t>
             </a:r>
           </a:p>
         </p:txBody>
@@ -5182,7 +5182,7 @@
                   <a:srgbClr val="5B6770"/>
                 </a:solidFill>
               </a:rPr>
-              <a:t>CEN429 Güvenli Programlama · Hafta 8</a:t>
+              <a:t>CEN429 Secure Programming · Week 8</a:t>
             </a:r>
           </a:p>
         </p:txBody>
@@ -5215,7 +5215,7 @@
                   <a:srgbClr val="5B6770"/>
                 </a:solidFill>
               </a:rPr>
-              <a:t>RTEÜ Bilgisayar Mühendisliği · 2026-2027 Güz</a:t>
+              <a:t>RTEU Computer Engineering · 2026-2027 Fall</a:t>
             </a:r>
           </a:p>
         </p:txBody>
@@ -5282,7 +5282,7 @@
                   <a:srgbClr val="006D77"/>
                 </a:solidFill>
               </a:rPr>
-              <a:t>Örnek: hatayı bulun (2)</a:t>
+              <a:t>Example: Find the Bug (2)</a:t>
             </a:r>
           </a:p>
         </p:txBody>
@@ -5543,7 +5543,7 @@
                   <a:srgbClr val="5B6770"/>
                 </a:solidFill>
               </a:rPr>
-              <a:t>CEN429 Güvenli Programlama · Hafta 8</a:t>
+              <a:t>CEN429 Secure Programming · Week 8</a:t>
             </a:r>
           </a:p>
         </p:txBody>
@@ -5576,7 +5576,7 @@
                   <a:srgbClr val="5B6770"/>
                 </a:solidFill>
               </a:rPr>
-              <a:t>RTEÜ Bilgisayar Mühendisliği · 2026-2027 Güz</a:t>
+              <a:t>RTEU Computer Engineering · 2026-2027 Fall</a:t>
             </a:r>
           </a:p>
         </p:txBody>
@@ -5643,7 +5643,7 @@
                   <a:srgbClr val="006D77"/>
                 </a:solidFill>
               </a:rPr>
-              <a:t>Örnek: senaryolar</a:t>
+              <a:t>Example: Scenarios</a:t>
             </a:r>
           </a:p>
         </p:txBody>
@@ -5689,7 +5689,7 @@
                   <a:srgbClr val="1F2D3A"/>
                 </a:solidFill>
               </a:rPr>
-              <a:t>Bütün kullanıcılarda </a:t>
+              <a:t>The same </a:t>
             </a:r>
             <a:r>
               <a:rPr sz="2000" b="1">
@@ -5697,7 +5697,7 @@
                   <a:srgbClr val="1F2D3A"/>
                 </a:solidFill>
               </a:rPr>
-              <a:t>aynı gömülü AES anahtarı</a:t>
+              <a:t>embedded AES key</a:t>
             </a:r>
             <a:r>
               <a:rPr sz="2000" b="0">
@@ -5705,7 +5705,7 @@
                   <a:srgbClr val="1F2D3A"/>
                 </a:solidFill>
               </a:rPr>
-              <a:t>: riskler ve öneri?</a:t>
+              <a:t> on every user's device: risks and recommendation?</a:t>
             </a:r>
           </a:p>
           <a:p>
@@ -5728,7 +5728,7 @@
                   <a:srgbClr val="1F2D3A"/>
                 </a:solidFill>
               </a:rPr>
-              <a:t>Dağıtılan paket </a:t>
+              <a:t>A shipped package is a </a:t>
             </a:r>
             <a:r>
               <a:rPr sz="2000" b="1">
@@ -5736,7 +5736,7 @@
                   <a:srgbClr val="1F2D3A"/>
                 </a:solidFill>
               </a:rPr>
-              <a:t>hata ayıklama derlemesi</a:t>
+              <a:t>debug build</a:t>
             </a:r>
             <a:r>
               <a:rPr sz="2000" b="0">
@@ -5744,7 +5744,7 @@
                   <a:srgbClr val="1F2D3A"/>
                 </a:solidFill>
               </a:rPr>
-              <a:t>: hangi bulgular?</a:t>
+              <a:t>: which findings?</a:t>
             </a:r>
           </a:p>
           <a:p>
@@ -5767,7 +5767,7 @@
                   <a:srgbClr val="1F2D3A"/>
                 </a:solidFill>
               </a:rPr>
-              <a:t>"Bu işlemi ben yapmadım": hangi STRIDE harfi, hangi kanıt?</a:t>
+              <a:t>"I did not make this transaction": which STRIDE letter, which evidence?</a:t>
             </a:r>
           </a:p>
           <a:p>
@@ -5790,7 +5790,7 @@
                   <a:srgbClr val="1F2D3A"/>
                 </a:solidFill>
               </a:rPr>
-              <a:t>Arşiv açan fonksiyon: hangi hatalara karşı ne yaparsınız?</a:t>
+              <a:t>A function that extracts an archive: which bugs do you guard against?</a:t>
             </a:r>
           </a:p>
           <a:p>
@@ -5813,7 +5813,7 @@
                   <a:srgbClr val="1F2D3A"/>
                 </a:solidFill>
               </a:rPr>
-              <a:t>Log4Shell'de asıl sorun neydi, ne önlerdi?</a:t>
+              <a:t>What was the real problem in Log4Shell, what would have prevented it?</a:t>
             </a:r>
           </a:p>
           <a:p>
@@ -5836,7 +5836,7 @@
                   <a:srgbClr val="1F2D3A"/>
                 </a:solidFill>
               </a:rPr>
-              <a:t>RASP denetimleri neden tek bir </a:t>
+              <a:t>Why shouldn't RASP checks be evaluated with a single </a:t>
             </a:r>
             <a:r>
               <a:rPr sz="2000" b="0">
@@ -5853,7 +5853,7 @@
                   <a:srgbClr val="1F2D3A"/>
                 </a:solidFill>
               </a:rPr>
-              <a:t> ile değerlendirilmemeli?</a:t>
+              <a:t>?</a:t>
             </a:r>
           </a:p>
         </p:txBody>
@@ -5928,7 +5928,7 @@
                   <a:srgbClr val="5B6770"/>
                 </a:solidFill>
               </a:rPr>
-              <a:t>CEN429 Güvenli Programlama · Hafta 8</a:t>
+              <a:t>CEN429 Secure Programming · Week 8</a:t>
             </a:r>
           </a:p>
         </p:txBody>
@@ -5961,7 +5961,7 @@
                   <a:srgbClr val="5B6770"/>
                 </a:solidFill>
               </a:rPr>
-              <a:t>RTEÜ Bilgisayar Mühendisliği · 2026-2027 Güz</a:t>
+              <a:t>RTEU Computer Engineering · 2026-2027 Fall</a:t>
             </a:r>
           </a:p>
         </p:txBody>
@@ -6028,7 +6028,7 @@
                   <a:srgbClr val="006D77"/>
                 </a:solidFill>
               </a:rPr>
-              <a:t>Gelecek hafta</a:t>
+              <a:t>Next Week</a:t>
             </a:r>
           </a:p>
         </p:txBody>
@@ -6062,7 +6062,7 @@
                   <a:srgbClr val="1F2D3A"/>
                 </a:solidFill>
               </a:rPr>
-              <a:t>Hafta 9 — Gelişmiş kod gizleme ve çeşitlendirme</a:t>
+              <a:t>Week 9 — Advanced Code Obfuscation and Diversification</a:t>
             </a:r>
           </a:p>
         </p:txBody>
@@ -6108,7 +6108,7 @@
                   <a:srgbClr val="1F2D3A"/>
                 </a:solidFill>
               </a:rPr>
-              <a:t>Gizleme taksonomisi, opak yüklemler, veri kodlama</a:t>
+              <a:t>Obfuscation taxonomy, opaque predicates, data encoding</a:t>
             </a:r>
           </a:p>
           <a:p>
@@ -6131,7 +6131,7 @@
                   <a:srgbClr val="1F2D3A"/>
                 </a:solidFill>
               </a:rPr>
-              <a:t>Sanallaştırma ve derleyici tabanlı gizleme (kavram)</a:t>
+              <a:t>Virtualisation and compiler-based obfuscation (concept)</a:t>
             </a:r>
           </a:p>
           <a:p>
@@ -6154,7 +6154,7 @@
                   <a:srgbClr val="1F2D3A"/>
                 </a:solidFill>
               </a:rPr>
-              <a:t>Gizlemenin ölçülmesi: güç, dayanıklılık, maliyet</a:t>
+              <a:t>Measuring obfuscation: potency, resilience, cost</a:t>
             </a:r>
           </a:p>
         </p:txBody>
@@ -6213,7 +6213,7 @@
                   <a:srgbClr val="D8F0F2"/>
                 </a:solidFill>
               </a:rPr>
-              <a:t>CEN429 Güvenli Programlama · Hafta 8</a:t>
+              <a:t>CEN429 Secure Programming · Week 8</a:t>
             </a:r>
           </a:p>
         </p:txBody>
@@ -6246,7 +6246,7 @@
                   <a:srgbClr val="D8F0F2"/>
                 </a:solidFill>
               </a:rPr>
-              <a:t>RTEÜ Bilgisayar Mühendisliği · 2026-2027 Güz</a:t>
+              <a:t>RTEU Computer Engineering · 2026-2027 Fall</a:t>
             </a:r>
           </a:p>
         </p:txBody>
@@ -6314,7 +6314,7 @@
                   <a:srgbClr val="FFFFFF"/>
                 </a:solidFill>
               </a:rPr>
-              <a:t>Ek · Hafta hafta konu haritası (1–6)</a:t>
+              <a:t>Appendix · Week-by-Week Topic Map (1–6)</a:t>
             </a:r>
           </a:p>
         </p:txBody>
@@ -6389,7 +6389,7 @@
                   <a:srgbClr val="5B6770"/>
                 </a:solidFill>
               </a:rPr>
-              <a:t>CEN429 Güvenli Programlama · Hafta 8</a:t>
+              <a:t>CEN429 Secure Programming · Week 8</a:t>
             </a:r>
           </a:p>
         </p:txBody>
@@ -6422,7 +6422,7 @@
                   <a:srgbClr val="5B6770"/>
                 </a:solidFill>
               </a:rPr>
-              <a:t>RTEÜ Bilgisayar Mühendisliği · 2026-2027 Güz</a:t>
+              <a:t>RTEU Computer Engineering · 2026-2027 Fall</a:t>
             </a:r>
           </a:p>
         </p:txBody>
@@ -6489,7 +6489,7 @@
                   <a:srgbClr val="006D77"/>
                 </a:solidFill>
               </a:rPr>
-              <a:t>1. hafta · anahtar noktalar</a:t>
+              <a:t>Week 1 · Key Points</a:t>
             </a:r>
           </a:p>
         </p:txBody>
@@ -6535,7 +6535,7 @@
                   <a:srgbClr val="1F2D3A"/>
                 </a:solidFill>
               </a:rPr>
-              <a:t>CIA üçlüsü; hata ≠ zafiyet.</a:t>
+              <a:t>CIA triad; a bug ≠ a vulnerability.</a:t>
             </a:r>
           </a:p>
           <a:p>
@@ -6558,7 +6558,7 @@
                   <a:srgbClr val="1F2D3A"/>
                 </a:solidFill>
               </a:rPr>
-              <a:t>MATE (beyaz kutu) saldırgan.</a:t>
+              <a:t>MATE (white-box) attacker.</a:t>
             </a:r>
           </a:p>
           <a:p>
@@ -6581,7 +6581,7 @@
                   <a:srgbClr val="1F2D3A"/>
                 </a:solidFill>
               </a:rPr>
-              <a:t>STRIDE, saldırı ağacı, DFD.</a:t>
+              <a:t>STRIDE, attack tree, DFD.</a:t>
             </a:r>
           </a:p>
           <a:p>
@@ -6604,7 +6604,7 @@
                   <a:srgbClr val="1F2D3A"/>
                 </a:solidFill>
               </a:rPr>
-              <a:t>Katmanlı savunma; tasarım ilkeleri.</a:t>
+              <a:t>Layered defence; design principles.</a:t>
             </a:r>
           </a:p>
         </p:txBody>
@@ -6679,7 +6679,7 @@
                   <a:srgbClr val="5B6770"/>
                 </a:solidFill>
               </a:rPr>
-              <a:t>CEN429 Güvenli Programlama · Hafta 8</a:t>
+              <a:t>CEN429 Secure Programming · Week 8</a:t>
             </a:r>
           </a:p>
         </p:txBody>
@@ -6712,7 +6712,7 @@
                   <a:srgbClr val="5B6770"/>
                 </a:solidFill>
               </a:rPr>
-              <a:t>RTEÜ Bilgisayar Mühendisliği · 2026-2027 Güz</a:t>
+              <a:t>RTEU Computer Engineering · 2026-2027 Fall</a:t>
             </a:r>
           </a:p>
         </p:txBody>
@@ -6779,7 +6779,7 @@
                   <a:srgbClr val="006D77"/>
                 </a:solidFill>
               </a:rPr>
-              <a:t>2. hafta · anahtar noktalar</a:t>
+              <a:t>Week 2 · Key Points</a:t>
             </a:r>
           </a:p>
         </p:txBody>
@@ -6825,7 +6825,7 @@
                   <a:srgbClr val="1F2D3A"/>
                 </a:solidFill>
               </a:rPr>
-              <a:t>Tehdit modelleme adımları.</a:t>
+              <a:t>Threat modelling steps.</a:t>
             </a:r>
           </a:p>
           <a:p>
@@ -6848,7 +6848,7 @@
                   <a:srgbClr val="1F2D3A"/>
                 </a:solidFill>
               </a:rPr>
-              <a:t>Güven sınırı; en az yetki.</a:t>
+              <a:t>Trust boundary; least privilege.</a:t>
             </a:r>
           </a:p>
           <a:p>
@@ -6871,7 +6871,7 @@
                   <a:srgbClr val="1F2D3A"/>
                 </a:solidFill>
               </a:rPr>
-              <a:t>Varlık listesi ve C/I/I+ etiketi.</a:t>
+              <a:t>Asset list and C/I/I+ labels.</a:t>
             </a:r>
           </a:p>
         </p:txBody>
@@ -6946,7 +6946,7 @@
                   <a:srgbClr val="5B6770"/>
                 </a:solidFill>
               </a:rPr>
-              <a:t>CEN429 Güvenli Programlama · Hafta 8</a:t>
+              <a:t>CEN429 Secure Programming · Week 8</a:t>
             </a:r>
           </a:p>
         </p:txBody>
@@ -6979,7 +6979,7 @@
                   <a:srgbClr val="5B6770"/>
                 </a:solidFill>
               </a:rPr>
-              <a:t>RTEÜ Bilgisayar Mühendisliği · 2026-2027 Güz</a:t>
+              <a:t>RTEU Computer Engineering · 2026-2027 Fall</a:t>
             </a:r>
           </a:p>
         </p:txBody>
@@ -7046,7 +7046,7 @@
                   <a:srgbClr val="006D77"/>
                 </a:solidFill>
               </a:rPr>
-              <a:t>3. hafta · anahtar noktalar</a:t>
+              <a:t>Week 3 · Key Points</a:t>
             </a:r>
           </a:p>
         </p:txBody>
@@ -7092,7 +7092,7 @@
                   <a:srgbClr val="1F2D3A"/>
                 </a:solidFill>
               </a:rPr>
-              <a:t>Verinin üç hâli.</a:t>
+              <a:t>The three states of data.</a:t>
             </a:r>
           </a:p>
           <a:p>
@@ -7115,7 +7115,7 @@
                   <a:srgbClr val="1F2D3A"/>
                 </a:solidFill>
               </a:rPr>
-              <a:t>AEAD; nonce tekrarı felaketi.</a:t>
+              <a:t>AEAD; nonce reuse is catastrophic.</a:t>
             </a:r>
           </a:p>
           <a:p>
@@ -7138,7 +7138,7 @@
                   <a:srgbClr val="1F2D3A"/>
                 </a:solidFill>
               </a:rPr>
-              <a:t>CSPRNG; KDF (parola → anahtar).</a:t>
+              <a:t>CSPRNG; KDF (password → key).</a:t>
             </a:r>
           </a:p>
           <a:p>
@@ -7161,7 +7161,7 @@
                   <a:srgbClr val="1F2D3A"/>
                 </a:solidFill>
               </a:rPr>
-              <a:t>Anahtar hiyerarşisi; ileri gizlilik.</a:t>
+              <a:t>Key hierarchy; forward secrecy.</a:t>
             </a:r>
           </a:p>
         </p:txBody>
@@ -7236,7 +7236,7 @@
                   <a:srgbClr val="5B6770"/>
                 </a:solidFill>
               </a:rPr>
-              <a:t>CEN429 Güvenli Programlama · Hafta 8</a:t>
+              <a:t>CEN429 Secure Programming · Week 8</a:t>
             </a:r>
           </a:p>
         </p:txBody>
@@ -7269,7 +7269,7 @@
                   <a:srgbClr val="5B6770"/>
                 </a:solidFill>
               </a:rPr>
-              <a:t>RTEÜ Bilgisayar Mühendisliği · 2026-2027 Güz</a:t>
+              <a:t>RTEU Computer Engineering · 2026-2027 Fall</a:t>
             </a:r>
           </a:p>
         </p:txBody>
@@ -7336,7 +7336,7 @@
                   <a:srgbClr val="006D77"/>
                 </a:solidFill>
               </a:rPr>
-              <a:t>Quiz-1: ne, ne zaman?</a:t>
+              <a:t>Quiz-1: What, When?</a:t>
             </a:r>
           </a:p>
         </p:txBody>
@@ -7350,7 +7350,7 @@
         <p:spPr>
           <a:xfrm>
             <a:off x="640080" y="1325880"/>
-            <a:ext cx="10911535" cy="1925320"/>
+            <a:ext cx="10911535" cy="1595120"/>
           </a:xfrm>
           <a:prstGeom prst="rect">
             <a:avLst/>
@@ -7382,7 +7382,7 @@
                   <a:srgbClr val="1F2D3A"/>
                 </a:solidFill>
               </a:rPr>
-              <a:t>Kapsam: </a:t>
+              <a:t>Scope: </a:t>
             </a:r>
             <a:r>
               <a:rPr sz="2000" b="1">
@@ -7390,7 +7390,7 @@
                   <a:srgbClr val="1F2D3A"/>
                 </a:solidFill>
               </a:rPr>
-              <a:t>1–6. haftalar</a:t>
+              <a:t>weeks 1–6</a:t>
             </a:r>
             <a:r>
               <a:rPr sz="2000" b="0">
@@ -7398,7 +7398,7 @@
                   <a:srgbClr val="1F2D3A"/>
                 </a:solidFill>
               </a:rPr>
-              <a:t> · vizenin </a:t>
+              <a:t> · </a:t>
             </a:r>
             <a:r>
               <a:rPr sz="2000" b="1">
@@ -7406,7 +7406,7 @@
                   <a:srgbClr val="1F2D3A"/>
                 </a:solidFill>
               </a:rPr>
-              <a:t>%40</a:t>
+              <a:t>40%</a:t>
             </a:r>
             <a:r>
               <a:rPr sz="2000" b="0">
@@ -7414,7 +7414,7 @@
                   <a:srgbClr val="1F2D3A"/>
                 </a:solidFill>
               </a:rPr>
-              <a:t>'ı</a:t>
+              <a:t> of the midterm</a:t>
             </a:r>
           </a:p>
           <a:p>
@@ -7437,7 +7437,7 @@
                   <a:srgbClr val="1F2D3A"/>
                 </a:solidFill>
               </a:rPr>
-              <a:t>Tarih, saat, yer, süre, soru biçimi: </a:t>
+              <a:t>Date, time, place, duration, question format: announced </a:t>
             </a:r>
             <a:r>
               <a:rPr sz="2000" b="1">
@@ -7445,15 +7445,7 @@
                   <a:srgbClr val="1F2D3A"/>
                 </a:solidFill>
               </a:rPr>
-              <a:t>ders sınıfında</a:t>
-            </a:r>
-            <a:r>
-              <a:rPr sz="2000" b="0">
-                <a:solidFill>
-                  <a:srgbClr val="1F2D3A"/>
-                </a:solidFill>
-              </a:rPr>
-              <a:t> duyurulur</a:t>
+              <a:t>in class</a:t>
             </a:r>
           </a:p>
           <a:p>
@@ -7476,7 +7468,7 @@
                   <a:srgbClr val="1F2D3A"/>
                 </a:solidFill>
               </a:rPr>
-              <a:t>Ölçülen: ezber değil, </a:t>
+              <a:t>What's measured: not memorization, but the </a:t>
             </a:r>
             <a:r>
               <a:rPr sz="2000" b="1">
@@ -7484,7 +7476,7 @@
                   <a:srgbClr val="1F2D3A"/>
                 </a:solidFill>
               </a:rPr>
-              <a:t>neden</a:t>
+              <a:t>why</a:t>
             </a:r>
             <a:r>
               <a:rPr sz="2000" b="0">
@@ -7492,7 +7484,7 @@
                   <a:srgbClr val="1F2D3A"/>
                 </a:solidFill>
               </a:rPr>
-              <a:t> sorusu</a:t>
+              <a:t> question</a:t>
             </a:r>
           </a:p>
           <a:p>
@@ -7515,7 +7507,7 @@
                   <a:srgbClr val="1F2D3A"/>
                 </a:solidFill>
               </a:rPr>
-              <a:t>En iyi hazırlık: her haftanın </a:t>
+              <a:t>Best preparation: each week's </a:t>
             </a:r>
             <a:r>
               <a:rPr sz="2000" b="1">
@@ -7523,7 +7515,7 @@
                   <a:srgbClr val="1F2D3A"/>
                 </a:solidFill>
               </a:rPr>
-              <a:t>Kendini sınama</a:t>
+              <a:t>Self-check</a:t>
             </a:r>
             <a:r>
               <a:rPr sz="2000" b="0">
@@ -7531,7 +7523,7 @@
                   <a:srgbClr val="1F2D3A"/>
                 </a:solidFill>
               </a:rPr>
-              <a:t> soruları + demoları yeniden çalıştırmak</a:t>
+              <a:t> questions + rerunning the demos</a:t>
             </a:r>
           </a:p>
         </p:txBody>
@@ -7606,7 +7598,7 @@
                   <a:srgbClr val="5B6770"/>
                 </a:solidFill>
               </a:rPr>
-              <a:t>CEN429 Güvenli Programlama · Hafta 8</a:t>
+              <a:t>CEN429 Secure Programming · Week 8</a:t>
             </a:r>
           </a:p>
         </p:txBody>
@@ -7639,7 +7631,7 @@
                   <a:srgbClr val="5B6770"/>
                 </a:solidFill>
               </a:rPr>
-              <a:t>RTEÜ Bilgisayar Mühendisliği · 2026-2027 Güz</a:t>
+              <a:t>RTEU Computer Engineering · 2026-2027 Fall</a:t>
             </a:r>
           </a:p>
         </p:txBody>
@@ -7706,7 +7698,7 @@
                   <a:srgbClr val="006D77"/>
                 </a:solidFill>
               </a:rPr>
-              <a:t>4. hafta · anahtar noktalar</a:t>
+              <a:t>Week 4 · Key Points</a:t>
             </a:r>
           </a:p>
         </p:txBody>
@@ -7752,7 +7744,7 @@
                   <a:srgbClr val="1F2D3A"/>
                 </a:solidFill>
               </a:rPr>
-              <a:t>Üç katman: kod → derleyici/OS → gizleme.</a:t>
+              <a:t>Three layers: code → compiler/OS → obfuscation.</a:t>
             </a:r>
           </a:p>
           <a:p>
@@ -7775,7 +7767,7 @@
                   <a:srgbClr val="1F2D3A"/>
                 </a:solidFill>
               </a:rPr>
-              <a:t>CERT/CWE; UAF; tamsayı/UB.</a:t>
+              <a:t>CERT/CWE; UAF; integer/UB.</a:t>
             </a:r>
           </a:p>
           <a:p>
@@ -7798,7 +7790,7 @@
                   <a:srgbClr val="1F2D3A"/>
                 </a:solidFill>
               </a:rPr>
-              <a:t>Sanitizer (ASan/UBSan), fuzzing.</a:t>
+              <a:t>Sanitizers (ASan/UBSan), fuzzing.</a:t>
             </a:r>
           </a:p>
           <a:p>
@@ -7821,7 +7813,7 @@
                   <a:srgbClr val="1F2D3A"/>
                 </a:solidFill>
               </a:rPr>
-              <a:t>Derleyici korumaları (kanarya, ASLR, NX).</a:t>
+              <a:t>Compiler protections (canary, ASLR, NX).</a:t>
             </a:r>
           </a:p>
         </p:txBody>
@@ -7896,7 +7888,7 @@
                   <a:srgbClr val="5B6770"/>
                 </a:solidFill>
               </a:rPr>
-              <a:t>CEN429 Güvenli Programlama · Hafta 8</a:t>
+              <a:t>CEN429 Secure Programming · Week 8</a:t>
             </a:r>
           </a:p>
         </p:txBody>
@@ -7929,7 +7921,7 @@
                   <a:srgbClr val="5B6770"/>
                 </a:solidFill>
               </a:rPr>
-              <a:t>RTEÜ Bilgisayar Mühendisliği · 2026-2027 Güz</a:t>
+              <a:t>RTEU Computer Engineering · 2026-2027 Fall</a:t>
             </a:r>
           </a:p>
         </p:txBody>
@@ -7996,7 +7988,7 @@
                   <a:srgbClr val="006D77"/>
                 </a:solidFill>
               </a:rPr>
-              <a:t>5. hafta · anahtar noktalar</a:t>
+              <a:t>Week 5 · Key Points</a:t>
             </a:r>
           </a:p>
         </p:txBody>
@@ -8042,7 +8034,7 @@
                   <a:srgbClr val="1F2D3A"/>
                 </a:solidFill>
               </a:rPr>
-              <a:t>Yönetilen dil bellek hatasını çözer, enjeksiyonu çözmez.</a:t>
+              <a:t>A managed language solves memory errors, not injection.</a:t>
             </a:r>
           </a:p>
           <a:p>
@@ -8065,7 +8057,7 @@
                   <a:srgbClr val="1F2D3A"/>
                 </a:solidFill>
               </a:rPr>
-              <a:t>SQL/komut/yol enjeksiyonu → parametreli/argüman dizisi.</a:t>
+              <a:t>SQL/command/path injection → parameterization/argument array.</a:t>
             </a:r>
           </a:p>
           <a:p>
@@ -8088,7 +8080,7 @@
                   <a:srgbClr val="1F2D3A"/>
                 </a:solidFill>
               </a:rPr>
-              <a:t>Deserialization; ProGuard/R8; SBOM.</a:t>
+              <a:t>Deserialisation; ProGuard/R8; SBOM.</a:t>
             </a:r>
           </a:p>
         </p:txBody>
@@ -8163,7 +8155,7 @@
                   <a:srgbClr val="5B6770"/>
                 </a:solidFill>
               </a:rPr>
-              <a:t>CEN429 Güvenli Programlama · Hafta 8</a:t>
+              <a:t>CEN429 Secure Programming · Week 8</a:t>
             </a:r>
           </a:p>
         </p:txBody>
@@ -8196,7 +8188,7 @@
                   <a:srgbClr val="5B6770"/>
                 </a:solidFill>
               </a:rPr>
-              <a:t>RTEÜ Bilgisayar Mühendisliği · 2026-2027 Güz</a:t>
+              <a:t>RTEU Computer Engineering · 2026-2027 Fall</a:t>
             </a:r>
           </a:p>
         </p:txBody>
@@ -8263,7 +8255,7 @@
                   <a:srgbClr val="006D77"/>
                 </a:solidFill>
               </a:rPr>
-              <a:t>6. hafta · anahtar noktalar</a:t>
+              <a:t>Week 6 · Key Points</a:t>
             </a:r>
           </a:p>
         </p:txBody>
@@ -8309,7 +8301,7 @@
                   <a:srgbClr val="1F2D3A"/>
                 </a:solidFill>
               </a:rPr>
-              <a:t>RASP: algıla, savun, caydır.</a:t>
+              <a:t>RASP: detect, defend, deter.</a:t>
             </a:r>
           </a:p>
           <a:p>
@@ -8332,7 +8324,7 @@
                   <a:srgbClr val="1F2D3A"/>
                 </a:solidFill>
               </a:rPr>
-              <a:t>Bütünlük (self-hash), anti-debug, hook algılama.</a:t>
+              <a:t>Integrity (self-hashing), anti-debug, hook detection.</a:t>
             </a:r>
           </a:p>
           <a:p>
@@ -8355,7 +8347,7 @@
                   <a:srgbClr val="1F2D3A"/>
                 </a:solidFill>
               </a:rPr>
-              <a:t>Çapraz denetim; tepki politikası; cihaz bağlama.</a:t>
+              <a:t>Cross-checking; response policy; device binding.</a:t>
             </a:r>
           </a:p>
         </p:txBody>
@@ -8430,7 +8422,7 @@
                   <a:srgbClr val="5B6770"/>
                 </a:solidFill>
               </a:rPr>
-              <a:t>CEN429 Güvenli Programlama · Hafta 8</a:t>
+              <a:t>CEN429 Secure Programming · Week 8</a:t>
             </a:r>
           </a:p>
         </p:txBody>
@@ -8463,7 +8455,7 @@
                   <a:srgbClr val="5B6770"/>
                 </a:solidFill>
               </a:rPr>
-              <a:t>RTEÜ Bilgisayar Mühendisliği · 2026-2027 Güz</a:t>
+              <a:t>RTEU Computer Engineering · 2026-2027 Fall</a:t>
             </a:r>
           </a:p>
         </p:txBody>
@@ -8530,7 +8522,7 @@
                   <a:srgbClr val="006D77"/>
                 </a:solidFill>
               </a:rPr>
-              <a:t>Sık karıştırılanlar</a:t>
+              <a:t>Frequently Confused</a:t>
             </a:r>
           </a:p>
         </p:txBody>
@@ -8545,7 +8537,7 @@
         </p:nvGraphicFramePr>
         <p:xfrm>
           <a:off x="640080" y="1325880"/>
-          <a:ext cx="10911534" cy="2221991"/>
+          <a:ext cx="10729674" cy="2221991"/>
         </p:xfrm>
         <a:graphic>
           <a:graphicData uri="http://schemas.openxmlformats.org/drawingml/2006/table">
@@ -8554,9 +8546,9 @@
                 <a:tableStyleId>{5C22544A-7EE6-4342-B048-85BDC9FD1C3A}</a:tableStyleId>
               </a:tblPr>
               <a:tblGrid>
-                <a:gridCol w="2216405"/>
-                <a:gridCol w="3580347"/>
-                <a:gridCol w="5114782"/>
+                <a:gridCol w="2727883"/>
+                <a:gridCol w="3637178"/>
+                <a:gridCol w="4364613"/>
               </a:tblGrid>
               <a:tr h="370331">
                 <a:tc>
@@ -8612,7 +8604,7 @@
                             <a:srgbClr val="FFFFFF"/>
                           </a:solidFill>
                         </a:rPr>
-                        <a:t>Fark</a:t>
+                        <a:t>Difference</a:t>
                       </a:r>
                     </a:p>
                   </a:txBody>
@@ -8635,7 +8627,7 @@
                             <a:srgbClr val="1F2D3A"/>
                           </a:solidFill>
                         </a:rPr>
-                        <a:t>Hata</a:t>
+                        <a:t>Bug</a:t>
                       </a:r>
                     </a:p>
                   </a:txBody>
@@ -8656,7 +8648,7 @@
                             <a:srgbClr val="1F2D3A"/>
                           </a:solidFill>
                         </a:rPr>
-                        <a:t>Zafiyet</a:t>
+                        <a:t>Vulnerability</a:t>
                       </a:r>
                     </a:p>
                   </a:txBody>
@@ -8677,7 +8669,7 @@
                             <a:srgbClr val="1F2D3A"/>
                           </a:solidFill>
                         </a:rPr>
-                        <a:t>Kötüye kullanılabilir hata</a:t>
+                        <a:t>An exploitable bug</a:t>
                       </a:r>
                     </a:p>
                   </a:txBody>
@@ -8700,7 +8692,7 @@
                             <a:srgbClr val="1F2D3A"/>
                           </a:solidFill>
                         </a:rPr>
-                        <a:t>Kara kutu</a:t>
+                        <a:t>Black-box</a:t>
                       </a:r>
                     </a:p>
                   </a:txBody>
@@ -8721,7 +8713,7 @@
                             <a:srgbClr val="1F2D3A"/>
                           </a:solidFill>
                         </a:rPr>
-                        <a:t>Beyaz kutu (MATE)</a:t>
+                        <a:t>White-box (MATE)</a:t>
                       </a:r>
                     </a:p>
                   </a:txBody>
@@ -8742,7 +8734,7 @@
                             <a:srgbClr val="1F2D3A"/>
                           </a:solidFill>
                         </a:rPr>
-                        <a:t>Programa sahip</a:t>
+                        <a:t>Has the program</a:t>
                       </a:r>
                     </a:p>
                   </a:txBody>
@@ -8765,7 +8757,7 @@
                             <a:srgbClr val="1F2D3A"/>
                           </a:solidFill>
                         </a:rPr>
-                        <a:t>Simetrik</a:t>
+                        <a:t>Symmetric</a:t>
                       </a:r>
                     </a:p>
                   </a:txBody>
@@ -8786,7 +8778,7 @@
                             <a:srgbClr val="1F2D3A"/>
                           </a:solidFill>
                         </a:rPr>
-                        <a:t>Asimetrik</a:t>
+                        <a:t>Asymmetric</a:t>
                       </a:r>
                     </a:p>
                   </a:txBody>
@@ -8807,7 +8799,7 @@
                             <a:srgbClr val="1F2D3A"/>
                           </a:solidFill>
                         </a:rPr>
-                        <a:t>Tek / çift anahtar</a:t>
+                        <a:t>Single / paired key</a:t>
                       </a:r>
                     </a:p>
                   </a:txBody>
@@ -8851,7 +8843,7 @@
                             <a:srgbClr val="1F2D3A"/>
                           </a:solidFill>
                         </a:rPr>
-                        <a:t>Yalnız şifreleme</a:t>
+                        <a:t>Encryption only</a:t>
                       </a:r>
                     </a:p>
                   </a:txBody>
@@ -8872,7 +8864,7 @@
                             <a:srgbClr val="1F2D3A"/>
                           </a:solidFill>
                         </a:rPr>
-                        <a:t>+ bütünlük</a:t>
+                        <a:t>+ integrity</a:t>
                       </a:r>
                     </a:p>
                   </a:txBody>
@@ -8895,7 +8887,7 @@
                             <a:srgbClr val="1F2D3A"/>
                           </a:solidFill>
                         </a:rPr>
-                        <a:t>Gizleme</a:t>
+                        <a:t>Obfuscation</a:t>
                       </a:r>
                     </a:p>
                   </a:txBody>
@@ -8916,7 +8908,7 @@
                             <a:srgbClr val="1F2D3A"/>
                           </a:solidFill>
                         </a:rPr>
-                        <a:t>Güvenli kod</a:t>
+                        <a:t>Secure code</a:t>
                       </a:r>
                     </a:p>
                   </a:txBody>
@@ -8937,7 +8929,7 @@
                             <a:srgbClr val="1F2D3A"/>
                           </a:solidFill>
                         </a:rPr>
-                        <a:t>Hatayı düzeltmez</a:t>
+                        <a:t>Does not fix the bug</a:t>
                       </a:r>
                     </a:p>
                   </a:txBody>
@@ -9006,7 +8998,7 @@
                   <a:srgbClr val="D8F0F2"/>
                 </a:solidFill>
               </a:rPr>
-              <a:t>CEN429 Güvenli Programlama · Hafta 8</a:t>
+              <a:t>CEN429 Secure Programming · Week 8</a:t>
             </a:r>
           </a:p>
         </p:txBody>
@@ -9039,7 +9031,7 @@
                   <a:srgbClr val="D8F0F2"/>
                 </a:solidFill>
               </a:rPr>
-              <a:t>RTEÜ Bilgisayar Mühendisliği · 2026-2027 Güz</a:t>
+              <a:t>RTEU Computer Engineering · 2026-2027 Fall</a:t>
             </a:r>
           </a:p>
         </p:txBody>
@@ -9107,7 +9099,7 @@
                   <a:srgbClr val="FFFFFF"/>
                 </a:solidFill>
               </a:rPr>
-              <a:t>Ek · Çözümlü pratik sorular</a:t>
+              <a:t>Appendix · Solved Practice Questions</a:t>
             </a:r>
           </a:p>
         </p:txBody>
@@ -9182,7 +9174,7 @@
                   <a:srgbClr val="5B6770"/>
                 </a:solidFill>
               </a:rPr>
-              <a:t>CEN429 Güvenli Programlama · Hafta 8</a:t>
+              <a:t>CEN429 Secure Programming · Week 8</a:t>
             </a:r>
           </a:p>
         </p:txBody>
@@ -9215,7 +9207,7 @@
                   <a:srgbClr val="5B6770"/>
                 </a:solidFill>
               </a:rPr>
-              <a:t>RTEÜ Bilgisayar Mühendisliği · 2026-2027 Güz</a:t>
+              <a:t>RTEU Computer Engineering · 2026-2027 Fall</a:t>
             </a:r>
           </a:p>
         </p:txBody>
@@ -9282,7 +9274,7 @@
                   <a:srgbClr val="006D77"/>
                 </a:solidFill>
               </a:rPr>
-              <a:t>Soru 1</a:t>
+              <a:t>Question 1</a:t>
             </a:r>
           </a:p>
         </p:txBody>
@@ -9316,7 +9308,7 @@
                   <a:srgbClr val="1F2D3A"/>
                 </a:solidFill>
               </a:rPr>
-              <a:t>MATE saldırgan neden kriptografiyi tek başına yetersiz bırakır?</a:t>
+              <a:t>Why does a MATE attacker make cryptography alone insufficient?</a:t>
             </a:r>
           </a:p>
         </p:txBody>
@@ -9330,7 +9322,7 @@
         <p:spPr>
           <a:xfrm>
             <a:off x="640080" y="1875536"/>
-            <a:ext cx="10911535" cy="770128"/>
+            <a:ext cx="10911535" cy="1100327"/>
           </a:xfrm>
           <a:prstGeom prst="rect">
             <a:avLst/>
@@ -9350,7 +9342,7 @@
                   <a:srgbClr val="1F2D3A"/>
                 </a:solidFill>
               </a:rPr>
-              <a:t>Cevap:</a:t>
+              <a:t>Answer:</a:t>
             </a:r>
             <a:r>
               <a:rPr sz="2000" b="0">
@@ -9358,7 +9350,7 @@
                   <a:srgbClr val="1F2D3A"/>
                 </a:solidFill>
               </a:rPr>
-              <a:t> Anahtar bellekte; saldırgan programı çalıştırıp okur. Kripto gizliliği verir ama beyaz kutuda anahtar korunmaz; RASP/gizleme/whitebox gerekir.</a:t>
+              <a:t> The key sits in memory; the attacker can run the program and read it. Cryptography provides confidentiality, but in a white-box setting the key is not protected; RASP/obfuscation/white-box cryptography is needed.</a:t>
             </a:r>
           </a:p>
         </p:txBody>
@@ -9433,7 +9425,7 @@
                   <a:srgbClr val="5B6770"/>
                 </a:solidFill>
               </a:rPr>
-              <a:t>CEN429 Güvenli Programlama · Hafta 8</a:t>
+              <a:t>CEN429 Secure Programming · Week 8</a:t>
             </a:r>
           </a:p>
         </p:txBody>
@@ -9466,7 +9458,7 @@
                   <a:srgbClr val="5B6770"/>
                 </a:solidFill>
               </a:rPr>
-              <a:t>RTEÜ Bilgisayar Mühendisliği · 2026-2027 Güz</a:t>
+              <a:t>RTEU Computer Engineering · 2026-2027 Fall</a:t>
             </a:r>
           </a:p>
         </p:txBody>
@@ -9533,7 +9525,7 @@
                   <a:srgbClr val="006D77"/>
                 </a:solidFill>
               </a:rPr>
-              <a:t>Soru 2</a:t>
+              <a:t>Question 2</a:t>
             </a:r>
           </a:p>
         </p:txBody>
@@ -9567,7 +9559,7 @@
                   <a:srgbClr val="1F2D3A"/>
                 </a:solidFill>
               </a:rPr>
-              <a:t>AES-GCM'de aynı nonce iki kez kullanılırsa?</a:t>
+              <a:t>What happens if the same nonce is used twice in AES-GCM?</a:t>
             </a:r>
           </a:p>
         </p:txBody>
@@ -9601,7 +9593,7 @@
                   <a:srgbClr val="1F2D3A"/>
                 </a:solidFill>
               </a:rPr>
-              <a:t>Cevap:</a:t>
+              <a:t>Answer:</a:t>
             </a:r>
             <a:r>
               <a:rPr sz="2000" b="0">
@@ -9609,7 +9601,7 @@
                   <a:srgbClr val="1F2D3A"/>
                 </a:solidFill>
               </a:rPr>
-              <a:t> Gizlilik ve bütünlük çöker; anahtar akışı ve veri sızabilir. Nonce her zaman benzersiz olmalı.</a:t>
+              <a:t> Confidentiality and integrity collapse; the keystream and data can leak. The nonce must always be unique.</a:t>
             </a:r>
           </a:p>
         </p:txBody>
@@ -9684,7 +9676,7 @@
                   <a:srgbClr val="5B6770"/>
                 </a:solidFill>
               </a:rPr>
-              <a:t>CEN429 Güvenli Programlama · Hafta 8</a:t>
+              <a:t>CEN429 Secure Programming · Week 8</a:t>
             </a:r>
           </a:p>
         </p:txBody>
@@ -9717,7 +9709,7 @@
                   <a:srgbClr val="5B6770"/>
                 </a:solidFill>
               </a:rPr>
-              <a:t>RTEÜ Bilgisayar Mühendisliği · 2026-2027 Güz</a:t>
+              <a:t>RTEU Computer Engineering · 2026-2027 Fall</a:t>
             </a:r>
           </a:p>
         </p:txBody>
@@ -9784,7 +9776,7 @@
                   <a:srgbClr val="006D77"/>
                 </a:solidFill>
               </a:rPr>
-              <a:t>Soru 3</a:t>
+              <a:t>Question 3</a:t>
             </a:r>
           </a:p>
         </p:txBody>
@@ -9818,7 +9810,7 @@
                   <a:srgbClr val="1F2D3A"/>
                 </a:solidFill>
               </a:rPr>
-              <a:t>SQL enjeksiyonunu ne kesin önler?</a:t>
+              <a:t>What definitively prevents SQL injection?</a:t>
             </a:r>
           </a:p>
         </p:txBody>
@@ -9852,7 +9844,7 @@
                   <a:srgbClr val="1F2D3A"/>
                 </a:solidFill>
               </a:rPr>
-              <a:t>Cevap:</a:t>
+              <a:t>Answer:</a:t>
             </a:r>
             <a:r>
               <a:rPr sz="2000" b="0">
@@ -9860,7 +9852,7 @@
                   <a:srgbClr val="1F2D3A"/>
                 </a:solidFill>
               </a:rPr>
-              <a:t> Parametreli sorgu (prepared statement); veri asla komut olarak yorumlanmaz. String birleştirme yapılmaz.</a:t>
+              <a:t> A parameterised query (prepared statement); data is never interpreted as a command. No string concatenation.</a:t>
             </a:r>
           </a:p>
         </p:txBody>
@@ -9935,7 +9927,7 @@
                   <a:srgbClr val="5B6770"/>
                 </a:solidFill>
               </a:rPr>
-              <a:t>CEN429 Güvenli Programlama · Hafta 8</a:t>
+              <a:t>CEN429 Secure Programming · Week 8</a:t>
             </a:r>
           </a:p>
         </p:txBody>
@@ -9968,7 +9960,7 @@
                   <a:srgbClr val="5B6770"/>
                 </a:solidFill>
               </a:rPr>
-              <a:t>RTEÜ Bilgisayar Mühendisliği · 2026-2027 Güz</a:t>
+              <a:t>RTEU Computer Engineering · 2026-2027 Fall</a:t>
             </a:r>
           </a:p>
         </p:txBody>
@@ -10035,7 +10027,7 @@
                   <a:srgbClr val="006D77"/>
                 </a:solidFill>
               </a:rPr>
-              <a:t>Soru 4</a:t>
+              <a:t>Question 4</a:t>
             </a:r>
           </a:p>
         </p:txBody>
@@ -10069,7 +10061,7 @@
                   <a:srgbClr val="1F2D3A"/>
                 </a:solidFill>
               </a:rPr>
-              <a:t>ASan hangi taşmayı göremez?</a:t>
+              <a:t>Which overflow can ASan not see?</a:t>
             </a:r>
           </a:p>
         </p:txBody>
@@ -10083,7 +10075,7 @@
         <p:spPr>
           <a:xfrm>
             <a:off x="640080" y="1875536"/>
-            <a:ext cx="10911535" cy="439928"/>
+            <a:ext cx="10911535" cy="770128"/>
           </a:xfrm>
           <a:prstGeom prst="rect">
             <a:avLst/>
@@ -10103,7 +10095,7 @@
                   <a:srgbClr val="1F2D3A"/>
                 </a:solidFill>
               </a:rPr>
-              <a:t>Cevap:</a:t>
+              <a:t>Answer:</a:t>
             </a:r>
             <a:r>
               <a:rPr sz="2000" b="0">
@@ -10111,7 +10103,7 @@
                   <a:srgbClr val="1F2D3A"/>
                 </a:solidFill>
               </a:rPr>
-              <a:t> Aynı yapının içinde alandan alana taşmayı (arada zehirli bölge yoktur).</a:t>
+              <a:t> A field-to-field overflow within the same structure (there is no poisoned region in between).</a:t>
             </a:r>
           </a:p>
         </p:txBody>
@@ -10186,7 +10178,7 @@
                   <a:srgbClr val="5B6770"/>
                 </a:solidFill>
               </a:rPr>
-              <a:t>CEN429 Güvenli Programlama · Hafta 8</a:t>
+              <a:t>CEN429 Secure Programming · Week 8</a:t>
             </a:r>
           </a:p>
         </p:txBody>
@@ -10219,7 +10211,7 @@
                   <a:srgbClr val="5B6770"/>
                 </a:solidFill>
               </a:rPr>
-              <a:t>RTEÜ Bilgisayar Mühendisliği · 2026-2027 Güz</a:t>
+              <a:t>RTEU Computer Engineering · 2026-2027 Fall</a:t>
             </a:r>
           </a:p>
         </p:txBody>
@@ -10286,7 +10278,7 @@
                   <a:srgbClr val="006D77"/>
                 </a:solidFill>
               </a:rPr>
-              <a:t>Soru 5</a:t>
+              <a:t>Question 5</a:t>
             </a:r>
           </a:p>
         </p:txBody>
@@ -10320,7 +10312,7 @@
                   <a:srgbClr val="1F2D3A"/>
                 </a:solidFill>
               </a:rPr>
-              <a:t>Kanarya neyi durdurur, neyi durdurmaz?</a:t>
+              <a:t>What does a canary stop, and what does it not stop?</a:t>
             </a:r>
           </a:p>
         </p:txBody>
@@ -10354,7 +10346,7 @@
                   <a:srgbClr val="1F2D3A"/>
                 </a:solidFill>
               </a:rPr>
-              <a:t>Cevap:</a:t>
+              <a:t>Answer:</a:t>
             </a:r>
             <a:r>
               <a:rPr sz="2000" b="0">
@@ -10362,7 +10354,7 @@
                   <a:srgbClr val="1F2D3A"/>
                 </a:solidFill>
               </a:rPr>
-              <a:t> Durdurur: dönüş adresine ulaşan yığın taşması. Durdurmaz: öbek taşması, önceki değişkenler, sızan kanarya.</a:t>
+              <a:t> Stops: a stack overflow that reaches the return address. Does not stop: heap overflow, variables before the canary, a leaked canary.</a:t>
             </a:r>
           </a:p>
         </p:txBody>
@@ -10437,7 +10429,7 @@
                   <a:srgbClr val="5B6770"/>
                 </a:solidFill>
               </a:rPr>
-              <a:t>CEN429 Güvenli Programlama · Hafta 8</a:t>
+              <a:t>CEN429 Secure Programming · Week 8</a:t>
             </a:r>
           </a:p>
         </p:txBody>
@@ -10470,7 +10462,7 @@
                   <a:srgbClr val="5B6770"/>
                 </a:solidFill>
               </a:rPr>
-              <a:t>RTEÜ Bilgisayar Mühendisliği · 2026-2027 Güz</a:t>
+              <a:t>RTEU Computer Engineering · 2026-2027 Fall</a:t>
             </a:r>
           </a:p>
         </p:txBody>
@@ -10537,7 +10529,7 @@
                   <a:srgbClr val="006D77"/>
                 </a:solidFill>
               </a:rPr>
-              <a:t>Vize notu hesabı — şema</a:t>
+              <a:t>Midterm Grade Calculation — Diagram</a:t>
             </a:r>
           </a:p>
         </p:txBody>
@@ -10636,7 +10628,7 @@
                   <a:srgbClr val="5B6770"/>
                 </a:solidFill>
               </a:rPr>
-              <a:t>CEN429 Güvenli Programlama · Hafta 8</a:t>
+              <a:t>CEN429 Secure Programming · Week 8</a:t>
             </a:r>
           </a:p>
         </p:txBody>
@@ -10669,7 +10661,7 @@
                   <a:srgbClr val="5B6770"/>
                 </a:solidFill>
               </a:rPr>
-              <a:t>RTEÜ Bilgisayar Mühendisliği · 2026-2027 Güz</a:t>
+              <a:t>RTEU Computer Engineering · 2026-2027 Fall</a:t>
             </a:r>
           </a:p>
         </p:txBody>
@@ -10736,7 +10728,7 @@
                   <a:srgbClr val="006D77"/>
                 </a:solidFill>
               </a:rPr>
-              <a:t>Soru 6</a:t>
+              <a:t>Question 6</a:t>
             </a:r>
           </a:p>
         </p:txBody>
@@ -10770,7 +10762,7 @@
                   <a:srgbClr val="1F2D3A"/>
                 </a:solidFill>
               </a:rPr>
-              <a:t>RASP self-hashing tek başına neden yetmez?</a:t>
+              <a:t>Why is RASP self-hashing not enough on its own?</a:t>
             </a:r>
           </a:p>
         </p:txBody>
@@ -10804,7 +10796,7 @@
                   <a:srgbClr val="1F2D3A"/>
                 </a:solidFill>
               </a:rPr>
-              <a:t>Cevap:</a:t>
+              <a:t>Answer:</a:t>
             </a:r>
             <a:r>
               <a:rPr sz="2000" b="0">
@@ -10812,7 +10804,7 @@
                   <a:srgbClr val="1F2D3A"/>
                 </a:solidFill>
               </a:rPr>
-              <a:t> Saldırgan özet fonksiyonunu bulup atlatabilir. Gizleme + çapraz + örtüşen denetim gerekir.</a:t>
+              <a:t> The attacker can find the digest function and bypass it. Obfuscation + cross-checking + overlapping checks are needed.</a:t>
             </a:r>
           </a:p>
         </p:txBody>
@@ -10887,7 +10879,7 @@
                   <a:srgbClr val="5B6770"/>
                 </a:solidFill>
               </a:rPr>
-              <a:t>CEN429 Güvenli Programlama · Hafta 8</a:t>
+              <a:t>CEN429 Secure Programming · Week 8</a:t>
             </a:r>
           </a:p>
         </p:txBody>
@@ -10920,7 +10912,7 @@
                   <a:srgbClr val="5B6770"/>
                 </a:solidFill>
               </a:rPr>
-              <a:t>RTEÜ Bilgisayar Mühendisliği · 2026-2027 Güz</a:t>
+              <a:t>RTEU Computer Engineering · 2026-2027 Fall</a:t>
             </a:r>
           </a:p>
         </p:txBody>
@@ -10987,7 +10979,7 @@
                   <a:srgbClr val="006D77"/>
                 </a:solidFill>
               </a:rPr>
-              <a:t>Soru 7</a:t>
+              <a:t>Question 7</a:t>
             </a:r>
           </a:p>
         </p:txBody>
@@ -11021,7 +11013,7 @@
                   <a:srgbClr val="1F2D3A"/>
                 </a:solidFill>
               </a:rPr>
-              <a:t>Paroladan anahtar türetirken neden KDF ve tuz?</a:t>
+              <a:t>Why a KDF and a salt when deriving a key from a password?</a:t>
             </a:r>
           </a:p>
         </p:txBody>
@@ -11055,7 +11047,7 @@
                   <a:srgbClr val="1F2D3A"/>
                 </a:solidFill>
               </a:rPr>
-              <a:t>Cevap:</a:t>
+              <a:t>Answer:</a:t>
             </a:r>
             <a:r>
               <a:rPr sz="2000" b="0">
@@ -11063,7 +11055,7 @@
                   <a:srgbClr val="1F2D3A"/>
                 </a:solidFill>
               </a:rPr>
-              <a:t> Parola düşük entropili; KDF yavaşlatır, tuz aynı parolaların aynı anahtar üretmesini önler (gökkuşağı tablosu).</a:t>
+              <a:t> A password has low entropy; the KDF slows down guessing, and the salt stops identical passwords from producing the same key (rainbow table).</a:t>
             </a:r>
           </a:p>
         </p:txBody>
@@ -11138,7 +11130,7 @@
                   <a:srgbClr val="5B6770"/>
                 </a:solidFill>
               </a:rPr>
-              <a:t>CEN429 Güvenli Programlama · Hafta 8</a:t>
+              <a:t>CEN429 Secure Programming · Week 8</a:t>
             </a:r>
           </a:p>
         </p:txBody>
@@ -11171,7 +11163,7 @@
                   <a:srgbClr val="5B6770"/>
                 </a:solidFill>
               </a:rPr>
-              <a:t>RTEÜ Bilgisayar Mühendisliği · 2026-2027 Güz</a:t>
+              <a:t>RTEU Computer Engineering · 2026-2027 Fall</a:t>
             </a:r>
           </a:p>
         </p:txBody>
@@ -11238,7 +11230,7 @@
                   <a:srgbClr val="006D77"/>
                 </a:solidFill>
               </a:rPr>
-              <a:t>Soru 8</a:t>
+              <a:t>Question 8</a:t>
             </a:r>
           </a:p>
         </p:txBody>
@@ -11272,7 +11264,7 @@
                   <a:srgbClr val="1F2D3A"/>
                 </a:solidFill>
               </a:rPr>
-              <a:t>En az yetki ilkesi bir örnekle?</a:t>
+              <a:t>An example of the least-privilege principle?</a:t>
             </a:r>
           </a:p>
         </p:txBody>
@@ -11306,7 +11298,7 @@
                   <a:srgbClr val="1F2D3A"/>
                 </a:solidFill>
               </a:rPr>
-              <a:t>Cevap:</a:t>
+              <a:t>Answer:</a:t>
             </a:r>
             <a:r>
               <a:rPr sz="2000" b="0">
@@ -11314,7 +11306,7 @@
                   <a:srgbClr val="1F2D3A"/>
                 </a:solidFill>
               </a:rPr>
-              <a:t> Uygulamanın DB kullanıcısı yalnız </a:t>
+              <a:t> The application's DB user should only be able to </a:t>
             </a:r>
             <a:r>
               <a:rPr sz="2000" b="0">
@@ -11331,7 +11323,7 @@
                   <a:srgbClr val="1F2D3A"/>
                 </a:solidFill>
               </a:rPr>
-              <a:t> yapabilsin; </a:t>
+              <a:t>; it should not have </a:t>
             </a:r>
             <a:r>
               <a:rPr sz="2000" b="0">
@@ -11348,7 +11340,7 @@
                   <a:srgbClr val="1F2D3A"/>
                 </a:solidFill>
               </a:rPr>
-              <a:t> yetkisi olmasın. Fazla yetki = büyük hasar.</a:t>
+              <a:t> privilege. Excess privilege = greater damage.</a:t>
             </a:r>
           </a:p>
         </p:txBody>
@@ -11423,7 +11415,7 @@
                   <a:srgbClr val="5B6770"/>
                 </a:solidFill>
               </a:rPr>
-              <a:t>CEN429 Güvenli Programlama · Hafta 8</a:t>
+              <a:t>CEN429 Secure Programming · Week 8</a:t>
             </a:r>
           </a:p>
         </p:txBody>
@@ -11456,7 +11448,7 @@
                   <a:srgbClr val="5B6770"/>
                 </a:solidFill>
               </a:rPr>
-              <a:t>RTEÜ Bilgisayar Mühendisliği · 2026-2027 Güz</a:t>
+              <a:t>RTEU Computer Engineering · 2026-2027 Fall</a:t>
             </a:r>
           </a:p>
         </p:txBody>
@@ -11523,7 +11515,7 @@
                   <a:srgbClr val="006D77"/>
                 </a:solidFill>
               </a:rPr>
-              <a:t>Soru 9</a:t>
+              <a:t>Question 9</a:t>
             </a:r>
           </a:p>
         </p:txBody>
@@ -11557,7 +11549,7 @@
                   <a:srgbClr val="1F2D3A"/>
                 </a:solidFill>
               </a:rPr>
-              <a:t>Tehdit modellemede STRIDE'ın "E"si nedir, bir önlem?</a:t>
+              <a:t>What is the "E" in STRIDE, and one control for it?</a:t>
             </a:r>
           </a:p>
         </p:txBody>
@@ -11591,7 +11583,7 @@
                   <a:srgbClr val="1F2D3A"/>
                 </a:solidFill>
               </a:rPr>
-              <a:t>Cevap:</a:t>
+              <a:t>Answer:</a:t>
             </a:r>
             <a:r>
               <a:rPr sz="2000" b="0">
@@ -11599,7 +11591,7 @@
                   <a:srgbClr val="1F2D3A"/>
                 </a:solidFill>
               </a:rPr>
-              <a:t> Elevation of privilege (yetki yükseltme). Önlem: en az yetki, yetki denetimi, güvenli varsayılan.</a:t>
+              <a:t> Elevation of privilege. Control: least privilege, authorization checks, secure defaults.</a:t>
             </a:r>
           </a:p>
         </p:txBody>
@@ -11674,7 +11666,7 @@
                   <a:srgbClr val="5B6770"/>
                 </a:solidFill>
               </a:rPr>
-              <a:t>CEN429 Güvenli Programlama · Hafta 8</a:t>
+              <a:t>CEN429 Secure Programming · Week 8</a:t>
             </a:r>
           </a:p>
         </p:txBody>
@@ -11707,7 +11699,7 @@
                   <a:srgbClr val="5B6770"/>
                 </a:solidFill>
               </a:rPr>
-              <a:t>RTEÜ Bilgisayar Mühendisliği · 2026-2027 Güz</a:t>
+              <a:t>RTEU Computer Engineering · 2026-2027 Fall</a:t>
             </a:r>
           </a:p>
         </p:txBody>
@@ -11774,7 +11766,7 @@
                   <a:srgbClr val="006D77"/>
                 </a:solidFill>
               </a:rPr>
-              <a:t>Soru 10</a:t>
+              <a:t>Question 10</a:t>
             </a:r>
           </a:p>
         </p:txBody>
@@ -11808,7 +11800,7 @@
                   <a:srgbClr val="1F2D3A"/>
                 </a:solidFill>
               </a:rPr>
-              <a:t>Deserialization neden tehlikeli, çözüm?</a:t>
+              <a:t>Why is deserialisation dangerous, and what is the fix?</a:t>
             </a:r>
           </a:p>
         </p:txBody>
@@ -11842,7 +11834,7 @@
                   <a:srgbClr val="1F2D3A"/>
                 </a:solidFill>
               </a:rPr>
-              <a:t>Cevap:</a:t>
+              <a:t>Answer:</a:t>
             </a:r>
             <a:r>
               <a:rPr sz="2000" b="0">
@@ -11850,7 +11842,7 @@
                   <a:srgbClr val="1F2D3A"/>
                 </a:solidFill>
               </a:rPr>
-              <a:t> Çıkarma sırasında kod çalışabilir (gadget). Çözüm: veri biçimi + şema; zorunda kalınırsa beyaz liste filtresi.</a:t>
+              <a:t> Code can execute during extraction (a gadget chain). Fix: a data format + schema; an allowlist filter if unavoidable.</a:t>
             </a:r>
           </a:p>
         </p:txBody>
@@ -11925,7 +11917,7 @@
                   <a:srgbClr val="5B6770"/>
                 </a:solidFill>
               </a:rPr>
-              <a:t>CEN429 Güvenli Programlama · Hafta 8</a:t>
+              <a:t>CEN429 Secure Programming · Week 8</a:t>
             </a:r>
           </a:p>
         </p:txBody>
@@ -11958,7 +11950,7 @@
                   <a:srgbClr val="5B6770"/>
                 </a:solidFill>
               </a:rPr>
-              <a:t>RTEÜ Bilgisayar Mühendisliği · 2026-2027 Güz</a:t>
+              <a:t>RTEU Computer Engineering · 2026-2027 Fall</a:t>
             </a:r>
           </a:p>
         </p:txBody>
@@ -12025,7 +12017,7 @@
                   <a:srgbClr val="006D77"/>
                 </a:solidFill>
               </a:rPr>
-              <a:t>Örnek · çoktan seçmeli</a:t>
+              <a:t>Example · Multiple Choice</a:t>
             </a:r>
           </a:p>
         </p:txBody>
@@ -12059,7 +12051,7 @@
                   <a:srgbClr val="1F2D3A"/>
                 </a:solidFill>
               </a:rPr>
-              <a:t>Aşağıdakilerden hangisi bir AEAD kipidir?</a:t>
+              <a:t>Which of the following is an AEAD mode?</a:t>
             </a:r>
           </a:p>
         </p:txBody>
@@ -12109,7 +12101,7 @@
                   <a:srgbClr val="1F2D3A"/>
                 </a:solidFill>
               </a:rPr>
-              <a:t> ✓ D) Ham RSA</a:t>
+              <a:t> ✓ D) Raw RSA</a:t>
             </a:r>
           </a:p>
         </p:txBody>
@@ -12184,7 +12176,7 @@
                   <a:srgbClr val="5B6770"/>
                 </a:solidFill>
               </a:rPr>
-              <a:t>CEN429 Güvenli Programlama · Hafta 8</a:t>
+              <a:t>CEN429 Secure Programming · Week 8</a:t>
             </a:r>
           </a:p>
         </p:txBody>
@@ -12217,7 +12209,7 @@
                   <a:srgbClr val="5B6770"/>
                 </a:solidFill>
               </a:rPr>
-              <a:t>RTEÜ Bilgisayar Mühendisliği · 2026-2027 Güz</a:t>
+              <a:t>RTEU Computer Engineering · 2026-2027 Fall</a:t>
             </a:r>
           </a:p>
         </p:txBody>
@@ -12284,7 +12276,7 @@
                   <a:srgbClr val="006D77"/>
                 </a:solidFill>
               </a:rPr>
-              <a:t>Örnek · doğru/yanlış</a:t>
+              <a:t>Example · True/False</a:t>
             </a:r>
           </a:p>
         </p:txBody>
@@ -12330,7 +12322,7 @@
                   <a:srgbClr val="1F2D3A"/>
                 </a:solidFill>
               </a:rPr>
-              <a:t>Gizleme hatayı düzeltir. </a:t>
+              <a:t>Obfuscation fixes the bug. </a:t>
             </a:r>
             <a:r>
               <a:rPr sz="2000" b="1">
@@ -12338,7 +12330,7 @@
                   <a:srgbClr val="1F2D3A"/>
                 </a:solidFill>
               </a:rPr>
-              <a:t>(Y)</a:t>
+              <a:t>(F)</a:t>
             </a:r>
           </a:p>
           <a:p>
@@ -12361,7 +12353,7 @@
                   <a:srgbClr val="1F2D3A"/>
                 </a:solidFill>
               </a:rPr>
-              <a:t>Nonce gizli olmalı. </a:t>
+              <a:t>The nonce must be secret. </a:t>
             </a:r>
             <a:r>
               <a:rPr sz="2000" b="1">
@@ -12369,7 +12361,7 @@
                   <a:srgbClr val="1F2D3A"/>
                 </a:solidFill>
               </a:rPr>
-              <a:t>(Y — benzersiz olmalı, gizli değil)</a:t>
+              <a:t>(F — must be unique, not secret)</a:t>
             </a:r>
           </a:p>
           <a:p>
@@ -12392,7 +12384,7 @@
                   <a:srgbClr val="1F2D3A"/>
                 </a:solidFill>
               </a:rPr>
-              <a:t>Parametreli sorgu SQL enjeksiyonunu önler. </a:t>
+              <a:t>A parameterised query prevents SQL injection. </a:t>
             </a:r>
             <a:r>
               <a:rPr sz="2000" b="1">
@@ -12400,7 +12392,7 @@
                   <a:srgbClr val="1F2D3A"/>
                 </a:solidFill>
               </a:rPr>
-              <a:t>(D)</a:t>
+              <a:t>(T)</a:t>
             </a:r>
           </a:p>
         </p:txBody>
@@ -12475,7 +12467,7 @@
                   <a:srgbClr val="5B6770"/>
                 </a:solidFill>
               </a:rPr>
-              <a:t>CEN429 Güvenli Programlama · Hafta 8</a:t>
+              <a:t>CEN429 Secure Programming · Week 8</a:t>
             </a:r>
           </a:p>
         </p:txBody>
@@ -12508,7 +12500,7 @@
                   <a:srgbClr val="5B6770"/>
                 </a:solidFill>
               </a:rPr>
-              <a:t>RTEÜ Bilgisayar Mühendisliği · 2026-2027 Güz</a:t>
+              <a:t>RTEU Computer Engineering · 2026-2027 Fall</a:t>
             </a:r>
           </a:p>
         </p:txBody>
@@ -12575,7 +12567,7 @@
                   <a:srgbClr val="006D77"/>
                 </a:solidFill>
               </a:rPr>
-              <a:t>Çalışma planı</a:t>
+              <a:t>Study Plan</a:t>
             </a:r>
           </a:p>
         </p:txBody>
@@ -12621,7 +12613,7 @@
                   <a:srgbClr val="1F2D3A"/>
                 </a:solidFill>
               </a:rPr>
-              <a:t>Her haftanın "Kendini sınama"sını cevaba bakmadan yap.</a:t>
+              <a:t>Do each week's "Self-check" without looking at the answers.</a:t>
             </a:r>
           </a:p>
           <a:p>
@@ -12644,7 +12636,7 @@
                   <a:srgbClr val="1F2D3A"/>
                 </a:solidFill>
               </a:rPr>
-              <a:t>Sık karıştırılanları ezberden değil </a:t>
+              <a:t>Learn frequently confused pairs by their </a:t>
             </a:r>
             <a:r>
               <a:rPr sz="2000" b="1">
@@ -12652,7 +12644,7 @@
                   <a:srgbClr val="1F2D3A"/>
                 </a:solidFill>
               </a:rPr>
-              <a:t>nedeniyle</a:t>
+              <a:t>reason</a:t>
             </a:r>
             <a:r>
               <a:rPr sz="2000" b="0">
@@ -12660,7 +12652,7 @@
                   <a:srgbClr val="1F2D3A"/>
                 </a:solidFill>
               </a:rPr>
-              <a:t> öğren.</a:t>
+              <a:t>, not by rote.</a:t>
             </a:r>
           </a:p>
           <a:p>
@@ -12683,7 +12675,7 @@
                   <a:srgbClr val="1F2D3A"/>
                 </a:solidFill>
               </a:rPr>
-              <a:t>3. ve 4. haftanın demolarını bir kez daha gözden geçir.</a:t>
+              <a:t>Review the Week 3 and Week 4 demos once more.</a:t>
             </a:r>
           </a:p>
         </p:txBody>
@@ -12758,7 +12750,7 @@
                   <a:srgbClr val="5B6770"/>
                 </a:solidFill>
               </a:rPr>
-              <a:t>CEN429 Güvenli Programlama · Hafta 8</a:t>
+              <a:t>CEN429 Secure Programming · Week 8</a:t>
             </a:r>
           </a:p>
         </p:txBody>
@@ -12791,7 +12783,7 @@
                   <a:srgbClr val="5B6770"/>
                 </a:solidFill>
               </a:rPr>
-              <a:t>RTEÜ Bilgisayar Mühendisliği · 2026-2027 Güz</a:t>
+              <a:t>RTEU Computer Engineering · 2026-2027 Fall</a:t>
             </a:r>
           </a:p>
         </p:txBody>
@@ -12858,7 +12850,7 @@
                   <a:srgbClr val="006D77"/>
                 </a:solidFill>
               </a:rPr>
-              <a:t>Son söz (Quiz-1 hazırlık)</a:t>
+              <a:t>Final Word (Quiz-1 Prep)</a:t>
             </a:r>
           </a:p>
         </p:txBody>
@@ -12911,7 +12903,7 @@
                   <a:srgbClr val="1F2D3A"/>
                 </a:solidFill>
               </a:rPr>
-              <a:t>Ezber değil, </a:t>
+              <a:t>Not memorization — what's measured is the </a:t>
             </a:r>
             <a:r>
               <a:rPr sz="2000" b="1">
@@ -12919,7 +12911,7 @@
                   <a:srgbClr val="1F2D3A"/>
                 </a:solidFill>
               </a:rPr>
-              <a:t>neden</a:t>
+              <a:t>why</a:t>
             </a:r>
             <a:r>
               <a:rPr sz="2000" b="0">
@@ -12927,7 +12919,7 @@
                   <a:srgbClr val="1F2D3A"/>
                 </a:solidFill>
               </a:rPr>
-              <a:t> ölçülür: "neden bu kip?", "neden bu denetim?", "neyi korumaz?"</a:t>
+              <a:t>: "why this mode?", "why this check?", "what doesn't it protect?"</a:t>
             </a:r>
           </a:p>
         </p:txBody>
@@ -12961,7 +12953,7 @@
                   <a:srgbClr val="1F2D3A"/>
                 </a:solidFill>
               </a:rPr>
-              <a:t>İyi şanslar.</a:t>
+              <a:t>Good luck.</a:t>
             </a:r>
           </a:p>
         </p:txBody>
@@ -13036,7 +13028,7 @@
                   <a:srgbClr val="5B6770"/>
                 </a:solidFill>
               </a:rPr>
-              <a:t>CEN429 Güvenli Programlama · Hafta 8</a:t>
+              <a:t>CEN429 Secure Programming · Week 8</a:t>
             </a:r>
           </a:p>
         </p:txBody>
@@ -13069,7 +13061,7 @@
                   <a:srgbClr val="5B6770"/>
                 </a:solidFill>
               </a:rPr>
-              <a:t>RTEÜ Bilgisayar Mühendisliği · 2026-2027 Güz</a:t>
+              <a:t>RTEU Computer Engineering · 2026-2027 Fall</a:t>
             </a:r>
           </a:p>
         </p:txBody>
@@ -13136,7 +13128,7 @@
                   <a:srgbClr val="006D77"/>
                 </a:solidFill>
               </a:rPr>
-              <a:t>Konu haritası (1)</a:t>
+              <a:t>Topic Map (1)</a:t>
             </a:r>
           </a:p>
         </p:txBody>
@@ -13160,8 +13152,8 @@
                 <a:tableStyleId>{5C22544A-7EE6-4342-B048-85BDC9FD1C3A}</a:tableStyleId>
               </a:tblPr>
               <a:tblGrid>
-                <a:gridCol w="450476"/>
-                <a:gridCol w="10461058"/>
+                <a:gridCol w="398594"/>
+                <a:gridCol w="10512940"/>
               </a:tblGrid>
               <a:tr h="732434">
                 <a:tc>
@@ -13175,7 +13167,7 @@
                             <a:srgbClr val="FFFFFF"/>
                           </a:solidFill>
                         </a:rPr>
-                        <a:t>Hafta</a:t>
+                        <a:t>Week</a:t>
                       </a:r>
                     </a:p>
                   </a:txBody>
@@ -13196,7 +13188,7 @@
                             <a:srgbClr val="FFFFFF"/>
                           </a:solidFill>
                         </a:rPr>
-                        <a:t>Ana kavramlar</a:t>
+                        <a:t>Core concepts</a:t>
                       </a:r>
                     </a:p>
                   </a:txBody>
@@ -13240,7 +13232,7 @@
                             <a:srgbClr val="1F2D3A"/>
                           </a:solidFill>
                         </a:rPr>
-                        <a:t>CIA · varlık–tehdit–zafiyet–risk · beyaz kutu · Saltzer–Schroeder · 7 katman · koruma planı 7 adım · arayüz/varlık tablosu · STRIDE, VAD · saldırı ağacı · güvenli başlatma · bellek hataları · güvenli silme</a:t>
+                        <a:t>CIA · asset–threat–vulnerability–risk · white-box · Saltzer–Schroeder · 7 layers · 7-step protection plan · interface/asset table · STRIDE, DFD · attack tree · secure startup · memory errors · secure erasure</a:t>
                       </a:r>
                     </a:p>
                   </a:txBody>
@@ -13284,7 +13276,7 @@
                             <a:srgbClr val="1F2D3A"/>
                           </a:solidFill>
                         </a:rPr>
-                        <a:t>Virüs/solucan/truva · salgın · kural tespiti · bütünlük izleme · BLP, Biba, Clark–Wilson · Unix/Windows ACL · RBAC · CWE, OWASP, CVE, CVSS · günlük enjeksiyonu</a:t>
+                        <a:t>Virus/worm/trojan · outbreak · rule-based detection · integrity monitoring · BLP, Biba, Clark–Wilson · Unix/Windows ACL · RBAC · CWE, OWASP, CVE, CVSS · log injection</a:t>
                       </a:r>
                     </a:p>
                   </a:txBody>
@@ -13328,7 +13320,7 @@
                             <a:srgbClr val="1F2D3A"/>
                           </a:solidFill>
                         </a:rPr>
-                        <a:t>AEAD · özet/MAC/imza · CSPRNG · nonce/IV/tuz · ECB · Argon2id · HKDF · anahtar yaşam döngüsü · TLS 1.3 · sabitleme · fail-open · maskeleme · kabuklar</a:t>
+                        <a:t>AEAD · digest/MAC/signature · CSPRNG · nonce/IV/salt · ECB · Argon2id · HKDF · key lifecycle · TLS 1.3 · pinning · fail-open · masking · shells</a:t>
                       </a:r>
                     </a:p>
                   </a:txBody>
@@ -13413,7 +13405,7 @@
                   <a:srgbClr val="5B6770"/>
                 </a:solidFill>
               </a:rPr>
-              <a:t>CEN429 Güvenli Programlama · Hafta 8</a:t>
+              <a:t>CEN429 Secure Programming · Week 8</a:t>
             </a:r>
           </a:p>
         </p:txBody>
@@ -13446,7 +13438,7 @@
                   <a:srgbClr val="5B6770"/>
                 </a:solidFill>
               </a:rPr>
-              <a:t>RTEÜ Bilgisayar Mühendisliği · 2026-2027 Güz</a:t>
+              <a:t>RTEU Computer Engineering · 2026-2027 Fall</a:t>
             </a:r>
           </a:p>
         </p:txBody>
@@ -13513,7 +13505,7 @@
                   <a:srgbClr val="006D77"/>
                 </a:solidFill>
               </a:rPr>
-              <a:t>Quiz-1 kapsamı — şema</a:t>
+              <a:t>Quiz-1 Scope — Diagram</a:t>
             </a:r>
           </a:p>
         </p:txBody>
@@ -13612,7 +13604,7 @@
                   <a:srgbClr val="5B6770"/>
                 </a:solidFill>
               </a:rPr>
-              <a:t>CEN429 Güvenli Programlama · Hafta 8</a:t>
+              <a:t>CEN429 Secure Programming · Week 8</a:t>
             </a:r>
           </a:p>
         </p:txBody>
@@ -13645,7 +13637,7 @@
                   <a:srgbClr val="5B6770"/>
                 </a:solidFill>
               </a:rPr>
-              <a:t>RTEÜ Bilgisayar Mühendisliği · 2026-2027 Güz</a:t>
+              <a:t>RTEU Computer Engineering · 2026-2027 Fall</a:t>
             </a:r>
           </a:p>
         </p:txBody>
@@ -13712,7 +13704,7 @@
                   <a:srgbClr val="006D77"/>
                 </a:solidFill>
               </a:rPr>
-              <a:t>Konu haritası (2)</a:t>
+              <a:t>Topic Map (2)</a:t>
             </a:r>
           </a:p>
         </p:txBody>
@@ -13727,7 +13719,7 @@
         </p:nvGraphicFramePr>
         <p:xfrm>
           <a:off x="640080" y="1325880"/>
-          <a:ext cx="10911534" cy="2715768"/>
+          <a:ext cx="10911534" cy="2929737"/>
         </p:xfrm>
         <a:graphic>
           <a:graphicData uri="http://schemas.openxmlformats.org/drawingml/2006/table">
@@ -13736,10 +13728,10 @@
                 <a:tableStyleId>{5C22544A-7EE6-4342-B048-85BDC9FD1C3A}</a:tableStyleId>
               </a:tblPr>
               <a:tblGrid>
-                <a:gridCol w="516862"/>
-                <a:gridCol w="10394672"/>
+                <a:gridCol w="423748"/>
+                <a:gridCol w="10487786"/>
               </a:tblGrid>
-              <a:tr h="678942">
+              <a:tr h="732434">
                 <a:tc>
                   <a:txBody>
                     <a:bodyPr wrap="square"/>
@@ -13751,7 +13743,7 @@
                             <a:srgbClr val="FFFFFF"/>
                           </a:solidFill>
                         </a:rPr>
-                        <a:t>Hafta</a:t>
+                        <a:t>Week</a:t>
                       </a:r>
                     </a:p>
                   </a:txBody>
@@ -13772,7 +13764,7 @@
                             <a:srgbClr val="FFFFFF"/>
                           </a:solidFill>
                         </a:rPr>
-                        <a:t>Ana kavramlar</a:t>
+                        <a:t>Core concepts</a:t>
                       </a:r>
                     </a:p>
                   </a:txBody>
@@ -13783,7 +13775,7 @@
                   </a:tcPr>
                 </a:tc>
               </a:tr>
-              <a:tr h="678942">
+              <a:tr h="732434">
                 <a:tc>
                   <a:txBody>
                     <a:bodyPr wrap="square"/>
@@ -13816,7 +13808,7 @@
                             <a:srgbClr val="1F2D3A"/>
                           </a:solidFill>
                         </a:rPr>
-                        <a:t>SEI CERT · girdi doğrulama · biçim dizisi · UAF · tamsayı/UB · hata işleme, sinyaller · statik analiz · sanitizer · fuzzing · kanarya/FORTIFY/ASLR/NX/RELRO/CFI · gizlemeye giriş</a:t>
+                        <a:t>SEI CERT · input validation · format string · UAF · integer/UB · error handling, signals · static analysis · sanitizers · fuzzing · canary/FORTIFY/ASLR/NX/RELRO/CFI · introduction to obfuscation</a:t>
                       </a:r>
                     </a:p>
                   </a:txBody>
@@ -13827,7 +13819,7 @@
                   </a:tcPr>
                 </a:tc>
               </a:tr>
-              <a:tr h="678942">
+              <a:tr h="732434">
                 <a:tc>
                   <a:txBody>
                     <a:bodyPr wrap="square"/>
@@ -13860,7 +13852,7 @@
                             <a:srgbClr val="1F2D3A"/>
                           </a:solidFill>
                         </a:rPr>
-                        <a:t>Yönetilen dil · CERT Java · enjeksiyon kökü · SQL/komut/yol · seri durumdan çıkarma · XXE/XSS · Python/JS, ReDoS · bayt kodu · ProGuard/R8 · SBOM, VEX</a:t>
+                        <a:t>Managed language · CERT Java · injection root cause · SQL/command/path · deserialisation · XXE/XSS · Python/JS, ReDoS · bytecode · ProGuard/R8 · SBOM, VEX</a:t>
                       </a:r>
                     </a:p>
                   </a:txBody>
@@ -13871,7 +13863,7 @@
                   </a:tcPr>
                 </a:tc>
               </a:tr>
-              <a:tr h="678942">
+              <a:tr h="732435">
                 <a:tc>
                   <a:txBody>
                     <a:bodyPr wrap="square"/>
@@ -13904,7 +13896,7 @@
                             <a:srgbClr val="1F2D3A"/>
                           </a:solidFill>
                         </a:rPr>
-                        <a:t>Algılama–savunma–caydırma · MATE · RASP mimarisi · bütünlük · hata ayıklayıcı/ortam/kanca · bellek koruması · root/imza · akış sayacı · tepki, decoy, cihaz bağlama</a:t>
+                        <a:t>Detection–defence–deterrence · MATE · RASP architecture · integrity · debugger/environment/hook · memory protection · root/signature · flow counter · response, decoy, device binding</a:t>
                       </a:r>
                     </a:p>
                   </a:txBody>
@@ -13989,7 +13981,7 @@
                   <a:srgbClr val="5B6770"/>
                 </a:solidFill>
               </a:rPr>
-              <a:t>CEN429 Güvenli Programlama · Hafta 8</a:t>
+              <a:t>CEN429 Secure Programming · Week 8</a:t>
             </a:r>
           </a:p>
         </p:txBody>
@@ -14022,7 +14014,7 @@
                   <a:srgbClr val="5B6770"/>
                 </a:solidFill>
               </a:rPr>
-              <a:t>RTEÜ Bilgisayar Mühendisliği · 2026-2027 Güz</a:t>
+              <a:t>RTEU Computer Engineering · 2026-2027 Fall</a:t>
             </a:r>
           </a:p>
         </p:txBody>
@@ -14089,7 +14081,7 @@
                   <a:srgbClr val="006D77"/>
                 </a:solidFill>
               </a:rPr>
-              <a:t>Soru tipleri — şema</a:t>
+              <a:t>Question Types — Diagram</a:t>
             </a:r>
           </a:p>
         </p:txBody>
@@ -14188,7 +14180,7 @@
                   <a:srgbClr val="5B6770"/>
                 </a:solidFill>
               </a:rPr>
-              <a:t>CEN429 Güvenli Programlama · Hafta 8</a:t>
+              <a:t>CEN429 Secure Programming · Week 8</a:t>
             </a:r>
           </a:p>
         </p:txBody>
@@ -14221,7 +14213,7 @@
                   <a:srgbClr val="5B6770"/>
                 </a:solidFill>
               </a:rPr>
-              <a:t>RTEÜ Bilgisayar Mühendisliği · 2026-2027 Güz</a:t>
+              <a:t>RTEU Computer Engineering · 2026-2027 Fall</a:t>
             </a:r>
           </a:p>
         </p:txBody>
@@ -14288,7 +14280,7 @@
                   <a:srgbClr val="006D77"/>
                 </a:solidFill>
               </a:rPr>
-              <a:t>Sık karıştırılanlar (1)</a:t>
+              <a:t>Frequently Confused (1)</a:t>
             </a:r>
           </a:p>
         </p:txBody>
@@ -14303,7 +14295,7 @@
         </p:nvGraphicFramePr>
         <p:xfrm>
           <a:off x="640080" y="1325880"/>
-          <a:ext cx="10911534" cy="3154680"/>
+          <a:ext cx="10911534" cy="2940710"/>
         </p:xfrm>
         <a:graphic>
           <a:graphicData uri="http://schemas.openxmlformats.org/drawingml/2006/table">
@@ -14312,11 +14304,11 @@
                 <a:tableStyleId>{5C22544A-7EE6-4342-B048-85BDC9FD1C3A}</a:tableStyleId>
               </a:tblPr>
               <a:tblGrid>
-                <a:gridCol w="2597984"/>
-                <a:gridCol w="1948488"/>
-                <a:gridCol w="6365062"/>
+                <a:gridCol w="2346566"/>
+                <a:gridCol w="2933208"/>
+                <a:gridCol w="5631760"/>
               </a:tblGrid>
-              <a:tr h="394335">
+              <a:tr h="367588">
                 <a:tc>
                   <a:txBody>
                     <a:bodyPr wrap="square"/>
@@ -14370,7 +14362,7 @@
                             <a:srgbClr val="FFFFFF"/>
                           </a:solidFill>
                         </a:rPr>
-                        <a:t>Fark</a:t>
+                        <a:t>Difference</a:t>
                       </a:r>
                     </a:p>
                   </a:txBody>
@@ -14381,7 +14373,7 @@
                   </a:tcPr>
                 </a:tc>
               </a:tr>
-              <a:tr h="394335">
+              <a:tr h="367588">
                 <a:tc>
                   <a:txBody>
                     <a:bodyPr wrap="square"/>
@@ -14393,7 +14385,7 @@
                             <a:srgbClr val="1F2D3A"/>
                           </a:solidFill>
                         </a:rPr>
-                        <a:t>Kodlama</a:t>
+                        <a:t>Encoding</a:t>
                       </a:r>
                     </a:p>
                   </a:txBody>
@@ -14414,7 +14406,7 @@
                             <a:srgbClr val="1F2D3A"/>
                           </a:solidFill>
                         </a:rPr>
-                        <a:t>Şifreleme</a:t>
+                        <a:t>Encryption</a:t>
                       </a:r>
                     </a:p>
                   </a:txBody>
@@ -14435,7 +14427,7 @@
                             <a:srgbClr val="1F2D3A"/>
                           </a:solidFill>
                         </a:rPr>
-                        <a:t>Kodlama anahtarsız, gizlilik yok</a:t>
+                        <a:t>Encoding is keyless, no confidentiality</a:t>
                       </a:r>
                     </a:p>
                   </a:txBody>
@@ -14446,7 +14438,7 @@
                   </a:tcPr>
                 </a:tc>
               </a:tr>
-              <a:tr h="394335">
+              <a:tr h="367588">
                 <a:tc>
                   <a:txBody>
                     <a:bodyPr wrap="square"/>
@@ -14458,7 +14450,7 @@
                             <a:srgbClr val="1F2D3A"/>
                           </a:solidFill>
                         </a:rPr>
-                        <a:t>Özet</a:t>
+                        <a:t>Digest</a:t>
                       </a:r>
                     </a:p>
                   </a:txBody>
@@ -14500,7 +14492,7 @@
                             <a:srgbClr val="1F2D3A"/>
                           </a:solidFill>
                         </a:rPr>
-                        <a:t>MAC gizli anahtar ister</a:t>
+                        <a:t>MAC requires a secret key</a:t>
                       </a:r>
                     </a:p>
                   </a:txBody>
@@ -14511,7 +14503,7 @@
                   </a:tcPr>
                 </a:tc>
               </a:tr>
-              <a:tr h="394335">
+              <a:tr h="367588">
                 <a:tc>
                   <a:txBody>
                     <a:bodyPr wrap="square"/>
@@ -14544,7 +14536,7 @@
                             <a:srgbClr val="1F2D3A"/>
                           </a:solidFill>
                         </a:rPr>
-                        <a:t>İmza</a:t>
+                        <a:t>Signature</a:t>
                       </a:r>
                     </a:p>
                   </a:txBody>
@@ -14565,7 +14557,7 @@
                             <a:srgbClr val="1F2D3A"/>
                           </a:solidFill>
                         </a:rPr>
-                        <a:t>İmza asimetrik → inkâr edilemezlik</a:t>
+                        <a:t>Signature is asymmetric → non-repudiation</a:t>
                       </a:r>
                     </a:p>
                   </a:txBody>
@@ -14576,7 +14568,7 @@
                   </a:tcPr>
                 </a:tc>
               </a:tr>
-              <a:tr h="394335">
+              <a:tr h="367588">
                 <a:tc>
                   <a:txBody>
                     <a:bodyPr wrap="square"/>
@@ -14609,7 +14601,7 @@
                             <a:srgbClr val="1F2D3A"/>
                           </a:solidFill>
                         </a:rPr>
-                        <a:t>Tuz</a:t>
+                        <a:t>Salt</a:t>
                       </a:r>
                     </a:p>
                   </a:txBody>
@@ -14630,7 +14622,7 @@
                             <a:srgbClr val="1F2D3A"/>
                           </a:solidFill>
                         </a:rPr>
-                        <a:t>Nonce asla tekrar etmez · tuz parola başına</a:t>
+                        <a:t>Nonce never repeats · salt is per password</a:t>
                       </a:r>
                     </a:p>
                   </a:txBody>
@@ -14641,7 +14633,7 @@
                   </a:tcPr>
                 </a:tc>
               </a:tr>
-              <a:tr h="394335">
+              <a:tr h="367588">
                 <a:tc>
                   <a:txBody>
                     <a:bodyPr wrap="square"/>
@@ -14695,7 +14687,7 @@
                             <a:srgbClr val="1F2D3A"/>
                           </a:solidFill>
                         </a:rPr>
-                        <a:t>Parola (yavaş) · yüksek entropili sır (hızlı)</a:t>
+                        <a:t>Password (slow) · high-entropy secret (fast)</a:t>
                       </a:r>
                     </a:p>
                   </a:txBody>
@@ -14706,7 +14698,7 @@
                   </a:tcPr>
                 </a:tc>
               </a:tr>
-              <a:tr h="394335">
+              <a:tr h="367588">
                 <a:tc>
                   <a:txBody>
                     <a:bodyPr wrap="square"/>
@@ -14718,7 +14710,7 @@
                             <a:srgbClr val="1F2D3A"/>
                           </a:solidFill>
                         </a:rPr>
-                        <a:t>Zincir doğrulama</a:t>
+                        <a:t>Chain validation</a:t>
                       </a:r>
                     </a:p>
                   </a:txBody>
@@ -14739,7 +14731,7 @@
                             <a:srgbClr val="1F2D3A"/>
                           </a:solidFill>
                         </a:rPr>
-                        <a:t>Ad denetimi</a:t>
+                        <a:t>Hostname verification</a:t>
                       </a:r>
                     </a:p>
                   </a:txBody>
@@ -14760,7 +14752,7 @@
                             <a:srgbClr val="1F2D3A"/>
                           </a:solidFill>
                         </a:rPr>
-                        <a:t>"Güvenilir CA mı?" · "Bu sunucu için mi?"</a:t>
+                        <a:t>"Trusted CA?" · "For this server?"</a:t>
                       </a:r>
                     </a:p>
                   </a:txBody>
@@ -14771,7 +14763,7 @@
                   </a:tcPr>
                 </a:tc>
               </a:tr>
-              <a:tr h="394335">
+              <a:tr h="367594">
                 <a:tc>
                   <a:txBody>
                     <a:bodyPr wrap="square"/>
@@ -14825,7 +14817,7 @@
                             <a:srgbClr val="1F2D3A"/>
                           </a:solidFill>
                         </a:rPr>
-                        <a:t>Hatada "geçti" · hatada "reddet"</a:t>
+                        <a:t>On error "pass" · on error "reject"</a:t>
                       </a:r>
                     </a:p>
                   </a:txBody>
@@ -14910,7 +14902,7 @@
                   <a:srgbClr val="5B6770"/>
                 </a:solidFill>
               </a:rPr>
-              <a:t>CEN429 Güvenli Programlama · Hafta 8</a:t>
+              <a:t>CEN429 Secure Programming · Week 8</a:t>
             </a:r>
           </a:p>
         </p:txBody>
@@ -14943,7 +14935,7 @@
                   <a:srgbClr val="5B6770"/>
                 </a:solidFill>
               </a:rPr>
-              <a:t>RTEÜ Bilgisayar Mühendisliği · 2026-2027 Güz</a:t>
+              <a:t>RTEU Computer Engineering · 2026-2027 Fall</a:t>
             </a:r>
           </a:p>
         </p:txBody>
@@ -15010,7 +15002,7 @@
                   <a:srgbClr val="006D77"/>
                 </a:solidFill>
               </a:rPr>
-              <a:t>Sık karıştırılanlar (2)</a:t>
+              <a:t>Frequently Confused (2)</a:t>
             </a:r>
           </a:p>
         </p:txBody>
@@ -15025,7 +15017,7 @@
         </p:nvGraphicFramePr>
         <p:xfrm>
           <a:off x="640080" y="1325880"/>
-          <a:ext cx="10911534" cy="3478377"/>
+          <a:ext cx="10911535" cy="3692347"/>
         </p:xfrm>
         <a:graphic>
           <a:graphicData uri="http://schemas.openxmlformats.org/drawingml/2006/table">
@@ -15034,11 +15026,11 @@
                 <a:tableStyleId>{5C22544A-7EE6-4342-B048-85BDC9FD1C3A}</a:tableStyleId>
               </a:tblPr>
               <a:tblGrid>
-                <a:gridCol w="2463895"/>
-                <a:gridCol w="2229238"/>
-                <a:gridCol w="6218401"/>
+                <a:gridCol w="2484805"/>
+                <a:gridCol w="2376770"/>
+                <a:gridCol w="6049960"/>
               </a:tblGrid>
-              <a:tr h="386486">
+              <a:tr h="410260">
                 <a:tc>
                   <a:txBody>
                     <a:bodyPr wrap="square"/>
@@ -15092,7 +15084,7 @@
                             <a:srgbClr val="FFFFFF"/>
                           </a:solidFill>
                         </a:rPr>
-                        <a:t>Fark</a:t>
+                        <a:t>Difference</a:t>
                       </a:r>
                     </a:p>
                   </a:txBody>
@@ -15103,7 +15095,7 @@
                   </a:tcPr>
                 </a:tc>
               </a:tr>
-              <a:tr h="386486">
+              <a:tr h="410260">
                 <a:tc>
                   <a:txBody>
                     <a:bodyPr wrap="square"/>
@@ -15115,7 +15107,7 @@
                             <a:srgbClr val="1F2D3A"/>
                           </a:solidFill>
                         </a:rPr>
-                        <a:t>Kanarya</a:t>
+                        <a:t>Canary</a:t>
                       </a:r>
                     </a:p>
                   </a:txBody>
@@ -15157,7 +15149,7 @@
                             <a:srgbClr val="1F2D3A"/>
                           </a:solidFill>
                         </a:rPr>
-                        <a:t>Dönüşte taşma tespiti · adres rastgeleleştirme</a:t>
+                        <a:t>Overflow detection on return · address randomisation</a:t>
                       </a:r>
                     </a:p>
                   </a:txBody>
@@ -15168,7 +15160,7 @@
                   </a:tcPr>
                 </a:tc>
               </a:tr>
-              <a:tr h="386486">
+              <a:tr h="410260">
                 <a:tc>
                   <a:txBody>
                     <a:bodyPr wrap="square"/>
@@ -15222,7 +15214,7 @@
                             <a:srgbClr val="1F2D3A"/>
                           </a:solidFill>
                         </a:rPr>
-                        <a:t>Bellek erişimi · tanımsız davranış</a:t>
+                        <a:t>Memory access · undefined behaviour</a:t>
                       </a:r>
                     </a:p>
                   </a:txBody>
@@ -15233,7 +15225,7 @@
                   </a:tcPr>
                 </a:tc>
               </a:tr>
-              <a:tr h="386486">
+              <a:tr h="410260">
                 <a:tc>
                   <a:txBody>
                     <a:bodyPr wrap="square"/>
@@ -15245,7 +15237,7 @@
                             <a:srgbClr val="1F2D3A"/>
                           </a:solidFill>
                         </a:rPr>
-                        <a:t>İşaretsiz sarma</a:t>
+                        <a:t>Unsigned wraparound</a:t>
                       </a:r>
                     </a:p>
                   </a:txBody>
@@ -15266,7 +15258,7 @@
                             <a:srgbClr val="1F2D3A"/>
                           </a:solidFill>
                         </a:rPr>
-                        <a:t>İşaretli taşma</a:t>
+                        <a:t>Signed overflow</a:t>
                       </a:r>
                     </a:p>
                   </a:txBody>
@@ -15287,7 +15279,7 @@
                             <a:srgbClr val="1F2D3A"/>
                           </a:solidFill>
                         </a:rPr>
-                        <a:t>Tanımlı · </a:t>
+                        <a:t>Defined · </a:t>
                       </a:r>
                       <a:r>
                         <a:rPr sz="1296" b="1">
@@ -15295,7 +15287,7 @@
                             <a:srgbClr val="1F2D3A"/>
                           </a:solidFill>
                         </a:rPr>
-                        <a:t>tanımsız</a:t>
+                        <a:t>undefined</a:t>
                       </a:r>
                     </a:p>
                   </a:txBody>
@@ -15306,7 +15298,7 @@
                   </a:tcPr>
                 </a:tc>
               </a:tr>
-              <a:tr h="386486">
+              <a:tr h="410260">
                 <a:tc>
                   <a:txBody>
                     <a:bodyPr wrap="square"/>
@@ -15318,7 +15310,7 @@
                             <a:srgbClr val="1F2D3A"/>
                           </a:solidFill>
                         </a:rPr>
-                        <a:t>Parametreli sorgu</a:t>
+                        <a:t>Parameterised query</a:t>
                       </a:r>
                     </a:p>
                   </a:txBody>
@@ -15339,7 +15331,7 @@
                             <a:srgbClr val="1F2D3A"/>
                           </a:solidFill>
                         </a:rPr>
-                        <a:t>Kaçış</a:t>
+                        <a:t>Escaping</a:t>
                       </a:r>
                     </a:p>
                   </a:txBody>
@@ -15360,7 +15352,7 @@
                             <a:srgbClr val="1F2D3A"/>
                           </a:solidFill>
                         </a:rPr>
-                        <a:t>Asıl çözüm · ikinci hat</a:t>
+                        <a:t>The real fix · a second line of defence</a:t>
                       </a:r>
                     </a:p>
                   </a:txBody>
@@ -15371,7 +15363,7 @@
                   </a:tcPr>
                 </a:tc>
               </a:tr>
-              <a:tr h="386486">
+              <a:tr h="410260">
                 <a:tc>
                   <a:txBody>
                     <a:bodyPr wrap="square"/>
@@ -15404,7 +15396,7 @@
                             <a:srgbClr val="1F2D3A"/>
                           </a:solidFill>
                         </a:rPr>
-                        <a:t>Dize gizleme</a:t>
+                        <a:t>String obfuscation</a:t>
                       </a:r>
                     </a:p>
                   </a:txBody>
@@ -15425,7 +15417,7 @@
                             <a:srgbClr val="1F2D3A"/>
                           </a:solidFill>
                         </a:rPr>
-                        <a:t>Adlar · dizgeler</a:t>
+                        <a:t>Names · strings</a:t>
                       </a:r>
                     </a:p>
                   </a:txBody>
@@ -15436,7 +15428,7 @@
                   </a:tcPr>
                 </a:tc>
               </a:tr>
-              <a:tr h="386486">
+              <a:tr h="410260">
                 <a:tc>
                   <a:txBody>
                     <a:bodyPr wrap="square"/>
@@ -15448,7 +15440,7 @@
                             <a:srgbClr val="1F2D3A"/>
                           </a:solidFill>
                         </a:rPr>
-                        <a:t>Gizleme</a:t>
+                        <a:t>Obfuscation</a:t>
                       </a:r>
                     </a:p>
                   </a:txBody>
@@ -15469,7 +15461,7 @@
                             <a:srgbClr val="1F2D3A"/>
                           </a:solidFill>
                         </a:rPr>
-                        <a:t>Güvenli kodlama</a:t>
+                        <a:t>Secure coding</a:t>
                       </a:r>
                     </a:p>
                   </a:txBody>
@@ -15490,7 +15482,7 @@
                             <a:srgbClr val="1F2D3A"/>
                           </a:solidFill>
                         </a:rPr>
-                        <a:t>Geciktirir · düzeltir</a:t>
+                        <a:t>Delays · fixes</a:t>
                       </a:r>
                     </a:p>
                   </a:txBody>
@@ -15501,7 +15493,7 @@
                   </a:tcPr>
                 </a:tc>
               </a:tr>
-              <a:tr h="386486">
+              <a:tr h="410260">
                 <a:tc>
                   <a:txBody>
                     <a:bodyPr wrap="square"/>
@@ -15513,7 +15505,7 @@
                             <a:srgbClr val="1F2D3A"/>
                           </a:solidFill>
                         </a:rPr>
-                        <a:t>Maskeleme</a:t>
+                        <a:t>Masking</a:t>
                       </a:r>
                     </a:p>
                   </a:txBody>
@@ -15534,7 +15526,7 @@
                             <a:srgbClr val="1F2D3A"/>
                           </a:solidFill>
                         </a:rPr>
-                        <a:t>Tokenizasyon</a:t>
+                        <a:t>Tokenization</a:t>
                       </a:r>
                     </a:p>
                   </a:txBody>
@@ -15555,7 +15547,7 @@
                             <a:srgbClr val="1F2D3A"/>
                           </a:solidFill>
                         </a:rPr>
-                        <a:t>Gösterimde gizle · kasadaki değere bağlı belirteç</a:t>
+                        <a:t>Hide on display · token bound to a vaulted value</a:t>
                       </a:r>
                     </a:p>
                   </a:txBody>
@@ -15566,7 +15558,7 @@
                   </a:tcPr>
                 </a:tc>
               </a:tr>
-              <a:tr h="386489">
+              <a:tr h="410267">
                 <a:tc>
                   <a:txBody>
                     <a:bodyPr wrap="square"/>
@@ -15578,7 +15570,7 @@
                             <a:srgbClr val="1F2D3A"/>
                           </a:solidFill>
                         </a:rPr>
-                        <a:t>Takma ad</a:t>
+                        <a:t>Pseudonym</a:t>
                       </a:r>
                     </a:p>
                   </a:txBody>
@@ -15599,7 +15591,7 @@
                             <a:srgbClr val="1F2D3A"/>
                           </a:solidFill>
                         </a:rPr>
-                        <a:t>Anonim</a:t>
+                        <a:t>Anonymous</a:t>
                       </a:r>
                     </a:p>
                   </a:txBody>
@@ -15620,7 +15612,7 @@
                             <a:srgbClr val="1F2D3A"/>
                           </a:solidFill>
                         </a:rPr>
-                        <a:t>Hâlâ kişisel veri · kişiye bağlanamaz</a:t>
+                        <a:t>Still personal data · cannot be linked to a person</a:t>
                       </a:r>
                     </a:p>
                   </a:txBody>

--- a/docs/week-8/cen429-week-8-sunum.en.pptx
+++ b/docs/week-8/cen429-week-8-sunum.en.pptx
@@ -33,16 +33,6 @@
     <p:sldId id="281" r:id="rId33"/>
     <p:sldId id="282" r:id="rId34"/>
     <p:sldId id="283" r:id="rId35"/>
-    <p:sldId id="284" r:id="rId36"/>
-    <p:sldId id="285" r:id="rId37"/>
-    <p:sldId id="286" r:id="rId38"/>
-    <p:sldId id="287" r:id="rId39"/>
-    <p:sldId id="288" r:id="rId40"/>
-    <p:sldId id="289" r:id="rId41"/>
-    <p:sldId id="290" r:id="rId42"/>
-    <p:sldId id="291" r:id="rId43"/>
-    <p:sldId id="292" r:id="rId44"/>
-    <p:sldId id="293" r:id="rId45"/>
   </p:sldIdLst>
   <p:sldSz cx="12191695" cy="6858000" type="screen4x3"/>
   <p:notesSz cx="6858000" cy="9144000"/>
@@ -679,7 +669,7 @@
           <a:lstStyle/>
           <a:p>
             <a:r>
-              <a:t>Speaker note: 1) SQL injection → use a PreparedStatement. 2) The plaintext is used before the tag is verified, and the return value of Final is never checked. 3) Fail-open: the error is swallowed and the connection is accepted.</a:t>
+              <a:t>Speaker note: 1) SQL injection; the definitive fix is a parameterised query (PreparedStatement) — data is never interpreted as a command, no string concatenation. 2) The plaintext is used before the tag is verified, and the return value of Final is never checked. 3) Fail-open: the error is swallowed and the connection is accepted.</a:t>
             </a:r>
           </a:p>
         </p:txBody>
@@ -750,76 +740,6 @@
           <a:p>
             <a:r>
               <a:t>Speaker note: Answers are on the Week 8 page, in collapsible boxes.</a:t>
-            </a:r>
-          </a:p>
-        </p:txBody>
-      </p:sp>
-      <p:sp>
-        <p:nvSpPr>
-          <p:cNvPr id="4" name="Slide Number Placeholder 3"/>
-          <p:cNvSpPr>
-            <a:spLocks noGrp="1"/>
-          </p:cNvSpPr>
-          <p:nvPr>
-            <p:ph type="sldNum" idx="5" sz="quarter"/>
-          </p:nvPr>
-        </p:nvSpPr>
-        <p:spPr/>
-      </p:sp>
-    </p:spTree>
-  </p:cSld>
-  <p:clrMapOvr>
-    <a:masterClrMapping/>
-  </p:clrMapOvr>
-</p:notes>
-</file>
-
-<file path=ppt/notesSlides/notesSlide5.xml><?xml version="1.0" encoding="utf-8"?>
-<p:notes xmlns:a="http://schemas.openxmlformats.org/drawingml/2006/main" xmlns:p="http://schemas.openxmlformats.org/presentationml/2006/main" xmlns:r="http://schemas.openxmlformats.org/officeDocument/2006/relationships">
-  <p:cSld>
-    <p:spTree>
-      <p:nvGrpSpPr>
-        <p:cNvPr id="1" name=""/>
-        <p:cNvGrpSpPr/>
-        <p:nvPr/>
-      </p:nvGrpSpPr>
-      <p:grpSpPr>
-        <a:xfrm>
-          <a:off x="0" y="0"/>
-          <a:ext cx="0" cy="0"/>
-          <a:chOff x="0" y="0"/>
-          <a:chExt cx="0" cy="0"/>
-        </a:xfrm>
-      </p:grpSpPr>
-      <p:sp>
-        <p:nvSpPr>
-          <p:cNvPr id="2" name="Slide Image Placeholder 1"/>
-          <p:cNvSpPr>
-            <a:spLocks noGrp="1"/>
-          </p:cNvSpPr>
-          <p:nvPr>
-            <p:ph type="sldImg" idx="2"/>
-          </p:nvPr>
-        </p:nvSpPr>
-        <p:spPr/>
-      </p:sp>
-      <p:sp>
-        <p:nvSpPr>
-          <p:cNvPr id="3" name="Notes Placeholder 2"/>
-          <p:cNvSpPr>
-            <a:spLocks noGrp="1"/>
-          </p:cNvSpPr>
-          <p:nvPr>
-            <p:ph type="body" idx="3" sz="quarter"/>
-          </p:nvPr>
-        </p:nvSpPr>
-        <p:spPr/>
-        <p:txBody>
-          <a:bodyPr/>
-          <a:lstStyle/>
-          <a:p>
-            <a:r>
-              <a:t>Speaker note: Quiz-1 covers weeks 1-6. We review each week's key points and the most commonly confused distinctions.</a:t>
             </a:r>
           </a:p>
         </p:txBody>
@@ -4740,14 +4660,14 @@
                   <a:srgbClr val="006D77"/>
                 </a:solidFill>
               </a:rPr>
-              <a:t>Study Plan — Diagram</a:t>
+              <a:t>Midterm Grade Calculation — Diagram</a:t>
             </a:r>
           </a:p>
         </p:txBody>
       </p:sp>
       <p:pic>
         <p:nvPicPr>
-          <p:cNvPr id="7" name="Picture 6" descr="h08-04-calisma-plani.png"/>
+          <p:cNvPr id="7" name="Picture 6" descr="h08-03-vize-hesabi.png"/>
           <p:cNvPicPr>
             <a:picLocks noChangeAspect="1"/>
           </p:cNvPicPr>
@@ -4761,8 +4681,8 @@
         </p:blipFill>
         <p:spPr>
           <a:xfrm>
-            <a:off x="2046645" y="1325880"/>
-            <a:ext cx="8098404" cy="3864472"/>
+            <a:off x="640080" y="1325880"/>
+            <a:ext cx="10911535" cy="3794094"/>
           </a:xfrm>
           <a:prstGeom prst="rect">
             <a:avLst/>
@@ -4934,184 +4854,40 @@
           <a:lstStyle/>
           <a:p>
             <a:r>
-              <a:rPr sz="2600" b="1">
+              <a:rPr sz="3000" b="1">
                 <a:solidFill>
                   <a:srgbClr val="006D77"/>
                 </a:solidFill>
               </a:rPr>
-              <a:t>Example: Find the Bug (1)</a:t>
-            </a:r>
-          </a:p>
-        </p:txBody>
-      </p:sp>
-      <p:sp>
-        <p:nvSpPr>
-          <p:cNvPr id="7" name="Rectangle 6"/>
-          <p:cNvSpPr/>
-          <p:nvPr/>
-        </p:nvSpPr>
+              <a:t>Study Plan — Diagram</a:t>
+            </a:r>
+          </a:p>
+        </p:txBody>
+      </p:sp>
+      <p:pic>
+        <p:nvPicPr>
+          <p:cNvPr id="7" name="Picture 6" descr="h08-04-calisma-plani.png"/>
+          <p:cNvPicPr>
+            <a:picLocks noChangeAspect="1"/>
+          </p:cNvPicPr>
+          <p:nvPr/>
+        </p:nvPicPr>
+        <p:blipFill>
+          <a:blip r:embed="rId3"/>
+          <a:stretch>
+            <a:fillRect/>
+          </a:stretch>
+        </p:blipFill>
         <p:spPr>
           <a:xfrm>
             <a:off x="640080" y="1325880"/>
-            <a:ext cx="10911535" cy="1124712"/>
-          </a:xfrm>
-          <a:prstGeom prst="rect">
-            <a:avLst/>
-          </a:prstGeom>
-          <a:solidFill>
-            <a:srgbClr val="F3F4F6"/>
-          </a:solidFill>
-          <a:ln>
-            <a:solidFill>
-              <a:srgbClr val="D9DEE3"/>
-            </a:solidFill>
-          </a:ln>
-        </p:spPr>
-        <p:style>
-          <a:lnRef idx="1">
-            <a:schemeClr val="accent1"/>
-          </a:lnRef>
-          <a:fillRef idx="3">
-            <a:schemeClr val="accent1"/>
-          </a:fillRef>
-          <a:effectRef idx="2">
-            <a:schemeClr val="accent1"/>
-          </a:effectRef>
-          <a:fontRef idx="minor">
-            <a:schemeClr val="lt1"/>
-          </a:fontRef>
-        </p:style>
-        <p:txBody>
-          <a:bodyPr rtlCol="0" anchor="t" wrap="none" lIns="137160" rIns="137160" tIns="91440" bIns="91440"/>
-          <a:lstStyle/>
-          <a:p>
-            <a:pPr algn="l"/>
-            <a:r>
-              <a:rPr sz="1116">
-                <a:solidFill>
-                  <a:srgbClr val="1F2D3A"/>
-                </a:solidFill>
-                <a:latin typeface="Consolas"/>
-              </a:rPr>
-              <a:t>void kaydet(const char *ad) {</a:t>
-            </a:r>
-          </a:p>
-          <a:p>
-            <a:pPr algn="l"/>
-            <a:r>
-              <a:rPr sz="1116">
-                <a:solidFill>
-                  <a:srgbClr val="1F2D3A"/>
-                </a:solidFill>
-                <a:latin typeface="Consolas"/>
-              </a:rPr>
-              <a:t>    char tampon[32];</a:t>
-            </a:r>
-          </a:p>
-          <a:p>
-            <a:pPr algn="l"/>
-            <a:r>
-              <a:rPr sz="1116">
-                <a:solidFill>
-                  <a:srgbClr val="1F2D3A"/>
-                </a:solidFill>
-                <a:latin typeface="Consolas"/>
-              </a:rPr>
-              <a:t>    sprintf(tampon, "kullanici=%s", ad);</a:t>
-            </a:r>
-          </a:p>
-          <a:p>
-            <a:pPr algn="l"/>
-            <a:r>
-              <a:rPr sz="1116">
-                <a:solidFill>
-                  <a:srgbClr val="1F2D3A"/>
-                </a:solidFill>
-                <a:latin typeface="Consolas"/>
-              </a:rPr>
-              <a:t>    syslog(LOG_INFO, tampon);</a:t>
-            </a:r>
-          </a:p>
-          <a:p>
-            <a:pPr algn="l"/>
-            <a:r>
-              <a:rPr sz="1116">
-                <a:solidFill>
-                  <a:srgbClr val="1F2D3A"/>
-                </a:solidFill>
-                <a:latin typeface="Consolas"/>
-              </a:rPr>
-              <a:t>}</a:t>
-            </a:r>
-          </a:p>
-        </p:txBody>
-      </p:sp>
-      <p:sp>
-        <p:nvSpPr>
-          <p:cNvPr id="8" name="Rectangle 7"/>
-          <p:cNvSpPr/>
-          <p:nvPr/>
-        </p:nvSpPr>
-        <p:spPr>
-          <a:xfrm>
-            <a:off x="640080" y="2560320"/>
-            <a:ext cx="10911535" cy="614476"/>
-          </a:xfrm>
-          <a:prstGeom prst="rect">
-            <a:avLst/>
-          </a:prstGeom>
-          <a:solidFill>
-            <a:srgbClr val="F3F4F6"/>
-          </a:solidFill>
-          <a:ln>
-            <a:solidFill>
-              <a:srgbClr val="D9DEE3"/>
-            </a:solidFill>
-          </a:ln>
-        </p:spPr>
-        <p:style>
-          <a:lnRef idx="1">
-            <a:schemeClr val="accent1"/>
-          </a:lnRef>
-          <a:fillRef idx="3">
-            <a:schemeClr val="accent1"/>
-          </a:fillRef>
-          <a:effectRef idx="2">
-            <a:schemeClr val="accent1"/>
-          </a:effectRef>
-          <a:fontRef idx="minor">
-            <a:schemeClr val="lt1"/>
-          </a:fontRef>
-        </p:style>
-        <p:txBody>
-          <a:bodyPr rtlCol="0" anchor="t" wrap="none" lIns="137160" rIns="137160" tIns="91440" bIns="91440"/>
-          <a:lstStyle/>
-          <a:p>
-            <a:pPr algn="l"/>
-            <a:r>
-              <a:rPr sz="1116">
-                <a:solidFill>
-                  <a:srgbClr val="1F2D3A"/>
-                </a:solidFill>
-                <a:latin typeface="Consolas"/>
-              </a:rPr>
-              <a:t>char parola[64];  oku(parola, sizeof parola);  dogrula(parola);</a:t>
-            </a:r>
-          </a:p>
-          <a:p>
-            <a:pPr algn="l"/>
-            <a:r>
-              <a:rPr sz="1116">
-                <a:solidFill>
-                  <a:srgbClr val="1F2D3A"/>
-                </a:solidFill>
-                <a:latin typeface="Consolas"/>
-              </a:rPr>
-              <a:t>memset(parola, 0, sizeof parola);  return;</a:t>
-            </a:r>
-          </a:p>
-        </p:txBody>
-      </p:sp>
+            <a:ext cx="10911535" cy="2445324"/>
+          </a:xfrm>
+          <a:prstGeom prst="rect">
+            <a:avLst/>
+          </a:prstGeom>
+        </p:spPr>
+      </p:pic>
     </p:spTree>
   </p:cSld>
   <p:clrMapOvr>
@@ -5277,198 +5053,88 @@
           <a:lstStyle/>
           <a:p>
             <a:r>
-              <a:rPr sz="2600" b="1">
+              <a:rPr sz="3000" b="1">
                 <a:solidFill>
                   <a:srgbClr val="006D77"/>
                 </a:solidFill>
               </a:rPr>
-              <a:t>Example: Find the Bug (2)</a:t>
-            </a:r>
-          </a:p>
-        </p:txBody>
-      </p:sp>
-      <p:sp>
-        <p:nvSpPr>
-          <p:cNvPr id="7" name="Rectangle 6"/>
-          <p:cNvSpPr/>
+              <a:t>Question 1</a:t>
+            </a:r>
+          </a:p>
+        </p:txBody>
+      </p:sp>
+      <p:sp>
+        <p:nvSpPr>
+          <p:cNvPr id="7" name="TextBox 6"/>
+          <p:cNvSpPr txBox="1"/>
           <p:nvPr/>
         </p:nvSpPr>
         <p:spPr>
           <a:xfrm>
             <a:off x="640080" y="1325880"/>
-            <a:ext cx="10911535" cy="444398"/>
-          </a:xfrm>
-          <a:prstGeom prst="rect">
-            <a:avLst/>
-          </a:prstGeom>
-          <a:solidFill>
-            <a:srgbClr val="F3F4F6"/>
-          </a:solidFill>
-          <a:ln>
-            <a:solidFill>
-              <a:srgbClr val="D9DEE3"/>
-            </a:solidFill>
-          </a:ln>
-        </p:spPr>
-        <p:style>
-          <a:lnRef idx="1">
-            <a:schemeClr val="accent1"/>
-          </a:lnRef>
-          <a:fillRef idx="3">
-            <a:schemeClr val="accent1"/>
-          </a:fillRef>
-          <a:effectRef idx="2">
-            <a:schemeClr val="accent1"/>
-          </a:effectRef>
-          <a:fontRef idx="minor">
-            <a:schemeClr val="lt1"/>
-          </a:fontRef>
-        </p:style>
-        <p:txBody>
-          <a:bodyPr rtlCol="0" anchor="t" wrap="none" lIns="137160" rIns="137160" tIns="91440" bIns="91440"/>
+            <a:ext cx="10911535" cy="439928"/>
+          </a:xfrm>
+          <a:prstGeom prst="rect">
+            <a:avLst/>
+          </a:prstGeom>
+          <a:noFill/>
+        </p:spPr>
+        <p:txBody>
+          <a:bodyPr wrap="square" lIns="45720" rIns="45720">
+            <a:spAutoFit/>
+          </a:bodyPr>
           <a:lstStyle/>
           <a:p>
             <a:pPr algn="l"/>
             <a:r>
-              <a:rPr sz="1116">
+              <a:rPr sz="2000" b="1">
                 <a:solidFill>
                   <a:srgbClr val="1F2D3A"/>
                 </a:solidFill>
-                <a:latin typeface="Consolas"/>
-              </a:rPr>
-              <a:t>String sql = "SELECT * FROM notlar WHERE ogrenci = '" + no + "'";</a:t>
-            </a:r>
-          </a:p>
-        </p:txBody>
-      </p:sp>
-      <p:sp>
-        <p:nvSpPr>
-          <p:cNvPr id="8" name="Rectangle 7"/>
-          <p:cNvSpPr/>
-          <p:nvPr/>
-        </p:nvSpPr>
-        <p:spPr>
-          <a:xfrm>
-            <a:off x="640080" y="1880006"/>
-            <a:ext cx="10911535" cy="784555"/>
-          </a:xfrm>
-          <a:prstGeom prst="rect">
-            <a:avLst/>
-          </a:prstGeom>
-          <a:solidFill>
-            <a:srgbClr val="F3F4F6"/>
-          </a:solidFill>
-          <a:ln>
-            <a:solidFill>
-              <a:srgbClr val="D9DEE3"/>
-            </a:solidFill>
-          </a:ln>
-        </p:spPr>
-        <p:style>
-          <a:lnRef idx="1">
-            <a:schemeClr val="accent1"/>
-          </a:lnRef>
-          <a:fillRef idx="3">
-            <a:schemeClr val="accent1"/>
-          </a:fillRef>
-          <a:effectRef idx="2">
-            <a:schemeClr val="accent1"/>
-          </a:effectRef>
-          <a:fontRef idx="minor">
-            <a:schemeClr val="lt1"/>
-          </a:fontRef>
-        </p:style>
-        <p:txBody>
-          <a:bodyPr rtlCol="0" anchor="t" wrap="none" lIns="137160" rIns="137160" tIns="91440" bIns="91440"/>
+              </a:rPr>
+              <a:t>Why does a MATE attacker make cryptography alone insufficient?</a:t>
+            </a:r>
+          </a:p>
+        </p:txBody>
+      </p:sp>
+      <p:sp>
+        <p:nvSpPr>
+          <p:cNvPr id="8" name="TextBox 7"/>
+          <p:cNvSpPr txBox="1"/>
+          <p:nvPr/>
+        </p:nvSpPr>
+        <p:spPr>
+          <a:xfrm>
+            <a:off x="640080" y="1875536"/>
+            <a:ext cx="10911535" cy="1100327"/>
+          </a:xfrm>
+          <a:prstGeom prst="rect">
+            <a:avLst/>
+          </a:prstGeom>
+          <a:noFill/>
+        </p:spPr>
+        <p:txBody>
+          <a:bodyPr wrap="square" lIns="45720" rIns="45720">
+            <a:spAutoFit/>
+          </a:bodyPr>
           <a:lstStyle/>
           <a:p>
             <a:pPr algn="l"/>
             <a:r>
-              <a:rPr sz="1116">
+              <a:rPr sz="2000" b="1">
                 <a:solidFill>
                   <a:srgbClr val="1F2D3A"/>
                 </a:solidFill>
-                <a:latin typeface="Consolas"/>
-              </a:rPr>
-              <a:t>EVP_DecryptUpdate(ctx, acik, &amp;n, sifreli, sifreli_n);</a:t>
-            </a:r>
-          </a:p>
-          <a:p>
-            <a:pPr algn="l"/>
-            <a:r>
-              <a:rPr sz="1116">
+              </a:rPr>
+              <a:t>Answer:</a:t>
+            </a:r>
+            <a:r>
+              <a:rPr sz="2000" b="0">
                 <a:solidFill>
                   <a:srgbClr val="1F2D3A"/>
                 </a:solidFill>
-                <a:latin typeface="Consolas"/>
-              </a:rPr>
-              <a:t>kullan(acik, n);</a:t>
-            </a:r>
-          </a:p>
-          <a:p>
-            <a:pPr algn="l"/>
-            <a:r>
-              <a:rPr sz="1116">
-                <a:solidFill>
-                  <a:srgbClr val="1F2D3A"/>
-                </a:solidFill>
-                <a:latin typeface="Consolas"/>
-              </a:rPr>
-              <a:t>EVP_DecryptFinal_ex(ctx, acik + n, &amp;m);</a:t>
-            </a:r>
-          </a:p>
-        </p:txBody>
-      </p:sp>
-      <p:sp>
-        <p:nvSpPr>
-          <p:cNvPr id="9" name="Rectangle 8"/>
-          <p:cNvSpPr/>
-          <p:nvPr/>
-        </p:nvSpPr>
-        <p:spPr>
-          <a:xfrm>
-            <a:off x="640080" y="2774289"/>
-            <a:ext cx="10911535" cy="444398"/>
-          </a:xfrm>
-          <a:prstGeom prst="rect">
-            <a:avLst/>
-          </a:prstGeom>
-          <a:solidFill>
-            <a:srgbClr val="F3F4F6"/>
-          </a:solidFill>
-          <a:ln>
-            <a:solidFill>
-              <a:srgbClr val="D9DEE3"/>
-            </a:solidFill>
-          </a:ln>
-        </p:spPr>
-        <p:style>
-          <a:lnRef idx="1">
-            <a:schemeClr val="accent1"/>
-          </a:lnRef>
-          <a:fillRef idx="3">
-            <a:schemeClr val="accent1"/>
-          </a:fillRef>
-          <a:effectRef idx="2">
-            <a:schemeClr val="accent1"/>
-          </a:effectRef>
-          <a:fontRef idx="minor">
-            <a:schemeClr val="lt1"/>
-          </a:fontRef>
-        </p:style>
-        <p:txBody>
-          <a:bodyPr rtlCol="0" anchor="t" wrap="none" lIns="137160" rIns="137160" tIns="91440" bIns="91440"/>
-          <a:lstStyle/>
-          <a:p>
-            <a:pPr algn="l"/>
-            <a:r>
-              <a:rPr sz="1116">
-                <a:solidFill>
-                  <a:srgbClr val="1F2D3A"/>
-                </a:solidFill>
-                <a:latin typeface="Consolas"/>
-              </a:rPr>
-              <a:t>try { pinDenetle(zincir); } catch (KeyStoreException e) { e.printStackTrace(); }</a:t>
+              </a:rPr>
+              <a:t> The key sits in memory; the attacker can run the program and read it. Cryptography provides confidentiality, but in a white-box setting the key is not protected; RASP/obfuscation/white-box cryptography is needed.</a:t>
             </a:r>
           </a:p>
         </p:txBody>
@@ -5643,7 +5309,7 @@
                   <a:srgbClr val="006D77"/>
                 </a:solidFill>
               </a:rPr>
-              <a:t>Example: Scenarios</a:t>
+              <a:t>Question 2</a:t>
             </a:r>
           </a:p>
         </p:txBody>
@@ -5657,7 +5323,7 @@
         <p:spPr>
           <a:xfrm>
             <a:off x="640080" y="1325880"/>
-            <a:ext cx="10911535" cy="2346960"/>
+            <a:ext cx="10911535" cy="439928"/>
           </a:xfrm>
           <a:prstGeom prst="rect">
             <a:avLst/>
@@ -5670,18 +5336,48 @@
           </a:bodyPr>
           <a:lstStyle/>
           <a:p>
-            <a:pPr>
-              <a:spcAft>
-                <a:spcPts val="300"/>
-              </a:spcAft>
-            </a:pPr>
+            <a:pPr algn="l"/>
             <a:r>
               <a:rPr sz="2000" b="1">
                 <a:solidFill>
-                  <a:srgbClr val="006D77"/>
-                </a:solidFill>
-              </a:rPr>
-              <a:t>1. </a:t>
+                  <a:srgbClr val="1F2D3A"/>
+                </a:solidFill>
+              </a:rPr>
+              <a:t>What happens if the same nonce is used twice in AES-GCM?</a:t>
+            </a:r>
+          </a:p>
+        </p:txBody>
+      </p:sp>
+      <p:sp>
+        <p:nvSpPr>
+          <p:cNvPr id="8" name="TextBox 7"/>
+          <p:cNvSpPr txBox="1"/>
+          <p:nvPr/>
+        </p:nvSpPr>
+        <p:spPr>
+          <a:xfrm>
+            <a:off x="640080" y="1875536"/>
+            <a:ext cx="10911535" cy="770128"/>
+          </a:xfrm>
+          <a:prstGeom prst="rect">
+            <a:avLst/>
+          </a:prstGeom>
+          <a:noFill/>
+        </p:spPr>
+        <p:txBody>
+          <a:bodyPr wrap="square" lIns="45720" rIns="45720">
+            <a:spAutoFit/>
+          </a:bodyPr>
+          <a:lstStyle/>
+          <a:p>
+            <a:pPr algn="l"/>
+            <a:r>
+              <a:rPr sz="2000" b="1">
+                <a:solidFill>
+                  <a:srgbClr val="1F2D3A"/>
+                </a:solidFill>
+              </a:rPr>
+              <a:t>Answer:</a:t>
             </a:r>
             <a:r>
               <a:rPr sz="2000" b="0">
@@ -5689,171 +5385,7 @@
                   <a:srgbClr val="1F2D3A"/>
                 </a:solidFill>
               </a:rPr>
-              <a:t>The same </a:t>
-            </a:r>
-            <a:r>
-              <a:rPr sz="2000" b="1">
-                <a:solidFill>
-                  <a:srgbClr val="1F2D3A"/>
-                </a:solidFill>
-              </a:rPr>
-              <a:t>embedded AES key</a:t>
-            </a:r>
-            <a:r>
-              <a:rPr sz="2000" b="0">
-                <a:solidFill>
-                  <a:srgbClr val="1F2D3A"/>
-                </a:solidFill>
-              </a:rPr>
-              <a:t> on every user's device: risks and recommendation?</a:t>
-            </a:r>
-          </a:p>
-          <a:p>
-            <a:pPr>
-              <a:spcAft>
-                <a:spcPts val="300"/>
-              </a:spcAft>
-            </a:pPr>
-            <a:r>
-              <a:rPr sz="2000" b="1">
-                <a:solidFill>
-                  <a:srgbClr val="006D77"/>
-                </a:solidFill>
-              </a:rPr>
-              <a:t>2. </a:t>
-            </a:r>
-            <a:r>
-              <a:rPr sz="2000" b="0">
-                <a:solidFill>
-                  <a:srgbClr val="1F2D3A"/>
-                </a:solidFill>
-              </a:rPr>
-              <a:t>A shipped package is a </a:t>
-            </a:r>
-            <a:r>
-              <a:rPr sz="2000" b="1">
-                <a:solidFill>
-                  <a:srgbClr val="1F2D3A"/>
-                </a:solidFill>
-              </a:rPr>
-              <a:t>debug build</a:t>
-            </a:r>
-            <a:r>
-              <a:rPr sz="2000" b="0">
-                <a:solidFill>
-                  <a:srgbClr val="1F2D3A"/>
-                </a:solidFill>
-              </a:rPr>
-              <a:t>: which findings?</a:t>
-            </a:r>
-          </a:p>
-          <a:p>
-            <a:pPr>
-              <a:spcAft>
-                <a:spcPts val="300"/>
-              </a:spcAft>
-            </a:pPr>
-            <a:r>
-              <a:rPr sz="2000" b="1">
-                <a:solidFill>
-                  <a:srgbClr val="006D77"/>
-                </a:solidFill>
-              </a:rPr>
-              <a:t>3. </a:t>
-            </a:r>
-            <a:r>
-              <a:rPr sz="2000" b="0">
-                <a:solidFill>
-                  <a:srgbClr val="1F2D3A"/>
-                </a:solidFill>
-              </a:rPr>
-              <a:t>"I did not make this transaction": which STRIDE letter, which evidence?</a:t>
-            </a:r>
-          </a:p>
-          <a:p>
-            <a:pPr>
-              <a:spcAft>
-                <a:spcPts val="300"/>
-              </a:spcAft>
-            </a:pPr>
-            <a:r>
-              <a:rPr sz="2000" b="1">
-                <a:solidFill>
-                  <a:srgbClr val="006D77"/>
-                </a:solidFill>
-              </a:rPr>
-              <a:t>4. </a:t>
-            </a:r>
-            <a:r>
-              <a:rPr sz="2000" b="0">
-                <a:solidFill>
-                  <a:srgbClr val="1F2D3A"/>
-                </a:solidFill>
-              </a:rPr>
-              <a:t>A function that extracts an archive: which bugs do you guard against?</a:t>
-            </a:r>
-          </a:p>
-          <a:p>
-            <a:pPr>
-              <a:spcAft>
-                <a:spcPts val="300"/>
-              </a:spcAft>
-            </a:pPr>
-            <a:r>
-              <a:rPr sz="2000" b="1">
-                <a:solidFill>
-                  <a:srgbClr val="006D77"/>
-                </a:solidFill>
-              </a:rPr>
-              <a:t>5. </a:t>
-            </a:r>
-            <a:r>
-              <a:rPr sz="2000" b="0">
-                <a:solidFill>
-                  <a:srgbClr val="1F2D3A"/>
-                </a:solidFill>
-              </a:rPr>
-              <a:t>What was the real problem in Log4Shell, what would have prevented it?</a:t>
-            </a:r>
-          </a:p>
-          <a:p>
-            <a:pPr>
-              <a:spcAft>
-                <a:spcPts val="300"/>
-              </a:spcAft>
-            </a:pPr>
-            <a:r>
-              <a:rPr sz="2000" b="1">
-                <a:solidFill>
-                  <a:srgbClr val="006D77"/>
-                </a:solidFill>
-              </a:rPr>
-              <a:t>6. </a:t>
-            </a:r>
-            <a:r>
-              <a:rPr sz="2000" b="0">
-                <a:solidFill>
-                  <a:srgbClr val="1F2D3A"/>
-                </a:solidFill>
-              </a:rPr>
-              <a:t>Why shouldn't RASP checks be evaluated with a single </a:t>
-            </a:r>
-            <a:r>
-              <a:rPr sz="2000" b="0">
-                <a:solidFill>
-                  <a:srgbClr val="A1123F"/>
-                </a:solidFill>
-                <a:latin typeface="Consolas"/>
-              </a:rPr>
-              <a:t>if</a:t>
-            </a:r>
-            <a:r>
-              <a:rPr sz="2000" b="0">
-                <a:solidFill>
-                  <a:srgbClr val="1F2D3A"/>
-                </a:solidFill>
-              </a:rPr>
-              <a:t>?</a:t>
+              <a:t> Confidentiality and integrity collapse; the keystream and data can leak. The nonce must always be unique.</a:t>
             </a:r>
           </a:p>
         </p:txBody>
@@ -6028,7 +5560,7 @@
                   <a:srgbClr val="006D77"/>
                 </a:solidFill>
               </a:rPr>
-              <a:t>Next Week</a:t>
+              <a:t>Question 3</a:t>
             </a:r>
           </a:p>
         </p:txBody>
@@ -6062,7 +5594,7 @@
                   <a:srgbClr val="1F2D3A"/>
                 </a:solidFill>
               </a:rPr>
-              <a:t>Week 9 — Advanced Code Obfuscation and Diversification</a:t>
+              <a:t>Which overflow can ASan not see?</a:t>
             </a:r>
           </a:p>
         </p:txBody>
@@ -6076,7 +5608,7 @@
         <p:spPr>
           <a:xfrm>
             <a:off x="640080" y="1875536"/>
-            <a:ext cx="10911535" cy="1219200"/>
+            <a:ext cx="10911535" cy="770128"/>
           </a:xfrm>
           <a:prstGeom prst="rect">
             <a:avLst/>
@@ -6089,18 +5621,14 @@
           </a:bodyPr>
           <a:lstStyle/>
           <a:p>
-            <a:pPr>
-              <a:spcAft>
-                <a:spcPts val="300"/>
-              </a:spcAft>
-            </a:pPr>
+            <a:pPr algn="l"/>
             <a:r>
               <a:rPr sz="2000" b="1">
                 <a:solidFill>
-                  <a:srgbClr val="006D77"/>
-                </a:solidFill>
-              </a:rPr>
-              <a:t>• </a:t>
+                  <a:srgbClr val="1F2D3A"/>
+                </a:solidFill>
+              </a:rPr>
+              <a:t>Answer:</a:t>
             </a:r>
             <a:r>
               <a:rPr sz="2000" b="0">
@@ -6108,53 +5636,7 @@
                   <a:srgbClr val="1F2D3A"/>
                 </a:solidFill>
               </a:rPr>
-              <a:t>Obfuscation taxonomy, opaque predicates, data encoding</a:t>
-            </a:r>
-          </a:p>
-          <a:p>
-            <a:pPr>
-              <a:spcAft>
-                <a:spcPts val="300"/>
-              </a:spcAft>
-            </a:pPr>
-            <a:r>
-              <a:rPr sz="2000" b="1">
-                <a:solidFill>
-                  <a:srgbClr val="006D77"/>
-                </a:solidFill>
-              </a:rPr>
-              <a:t>• </a:t>
-            </a:r>
-            <a:r>
-              <a:rPr sz="2000" b="0">
-                <a:solidFill>
-                  <a:srgbClr val="1F2D3A"/>
-                </a:solidFill>
-              </a:rPr>
-              <a:t>Virtualisation and compiler-based obfuscation (concept)</a:t>
-            </a:r>
-          </a:p>
-          <a:p>
-            <a:pPr>
-              <a:spcAft>
-                <a:spcPts val="300"/>
-              </a:spcAft>
-            </a:pPr>
-            <a:r>
-              <a:rPr sz="2000" b="1">
-                <a:solidFill>
-                  <a:srgbClr val="006D77"/>
-                </a:solidFill>
-              </a:rPr>
-              <a:t>• </a:t>
-            </a:r>
-            <a:r>
-              <a:rPr sz="2000" b="0">
-                <a:solidFill>
-                  <a:srgbClr val="1F2D3A"/>
-                </a:solidFill>
-              </a:rPr>
-              <a:t>Measuring obfuscation: potency, resilience, cost</a:t>
+              <a:t> A field-to-field overflow within the same structure (there is no poisoned region in between).</a:t>
             </a:r>
           </a:p>
         </p:txBody>
@@ -6170,14 +5652,6 @@
 <file path=ppt/slides/slide16.xml><?xml version="1.0" encoding="utf-8"?>
 <p:sld xmlns:a="http://schemas.openxmlformats.org/drawingml/2006/main" xmlns:p="http://schemas.openxmlformats.org/presentationml/2006/main" xmlns:r="http://schemas.openxmlformats.org/officeDocument/2006/relationships">
   <p:cSld>
-    <p:bg>
-      <p:bgPr>
-        <a:solidFill>
-          <a:srgbClr val="006D77"/>
-        </a:solidFill>
-        <a:effectLst/>
-      </p:bgPr>
-    </p:bg>
     <p:spTree>
       <p:nvGrpSpPr>
         <p:cNvPr id="1" name=""/>
@@ -6185,9 +5659,33 @@
         <p:nvPr/>
       </p:nvGrpSpPr>
       <p:grpSpPr/>
-      <p:sp>
-        <p:nvSpPr>
-          <p:cNvPr id="2" name="TextBox 1"/>
+      <p:pic>
+        <p:nvPicPr>
+          <p:cNvPr id="2" name="Picture 1" descr="rteu_logo_kucuk.jpg"/>
+          <p:cNvPicPr>
+            <a:picLocks noChangeAspect="1"/>
+          </p:cNvPicPr>
+          <p:nvPr/>
+        </p:nvPicPr>
+        <p:blipFill>
+          <a:blip r:embed="rId2"/>
+          <a:stretch>
+            <a:fillRect/>
+          </a:stretch>
+        </p:blipFill>
+        <p:spPr>
+          <a:xfrm>
+            <a:off x="640080" y="164592"/>
+            <a:ext cx="242773" cy="329184"/>
+          </a:xfrm>
+          <a:prstGeom prst="rect">
+            <a:avLst/>
+          </a:prstGeom>
+        </p:spPr>
+      </p:pic>
+      <p:sp>
+        <p:nvSpPr>
+          <p:cNvPr id="3" name="TextBox 2"/>
           <p:cNvSpPr txBox="1"/>
           <p:nvPr/>
         </p:nvSpPr>
@@ -6210,7 +5708,7 @@
             <a:r>
               <a:rPr sz="1100" b="0">
                 <a:solidFill>
-                  <a:srgbClr val="D8F0F2"/>
+                  <a:srgbClr val="5B6770"/>
                 </a:solidFill>
               </a:rPr>
               <a:t>CEN429 Secure Programming · Week 8</a:t>
@@ -6220,7 +5718,7 @@
       </p:sp>
       <p:sp>
         <p:nvSpPr>
-          <p:cNvPr id="3" name="TextBox 2"/>
+          <p:cNvPr id="4" name="TextBox 3"/>
           <p:cNvSpPr txBox="1"/>
           <p:nvPr/>
         </p:nvSpPr>
@@ -6243,7 +5741,7 @@
             <a:r>
               <a:rPr sz="1000" b="0">
                 <a:solidFill>
-                  <a:srgbClr val="D8F0F2"/>
+                  <a:srgbClr val="5B6770"/>
                 </a:solidFill>
               </a:rPr>
               <a:t>RTEU Computer Engineering · 2026-2027 Fall</a:t>
@@ -6253,7 +5751,7 @@
       </p:sp>
       <p:sp>
         <p:nvSpPr>
-          <p:cNvPr id="4" name="TextBox 3"/>
+          <p:cNvPr id="5" name="TextBox 4"/>
           <p:cNvSpPr txBox="1"/>
           <p:nvPr/>
         </p:nvSpPr>
@@ -6277,7 +5775,7 @@
             <a:r>
               <a:rPr sz="1000" b="0">
                 <a:solidFill>
-                  <a:srgbClr val="D8F0F2"/>
+                  <a:srgbClr val="5B6770"/>
                 </a:solidFill>
               </a:rPr>
               <a:t>16</a:t>
@@ -6287,14 +5785,47 @@
       </p:sp>
       <p:sp>
         <p:nvSpPr>
-          <p:cNvPr id="5" name="TextBox 4"/>
-          <p:cNvSpPr txBox="1"/>
-          <p:nvPr/>
-        </p:nvSpPr>
-        <p:spPr>
-          <a:xfrm>
-            <a:off x="640080" y="2743200"/>
-            <a:ext cx="10911535" cy="1280160"/>
+          <p:cNvPr id="6" name="TextBox 5"/>
+          <p:cNvSpPr txBox="1"/>
+          <p:nvPr/>
+        </p:nvSpPr>
+        <p:spPr>
+          <a:xfrm>
+            <a:off x="640080" y="548640"/>
+            <a:ext cx="10911535" cy="731520"/>
+          </a:xfrm>
+          <a:prstGeom prst="rect">
+            <a:avLst/>
+          </a:prstGeom>
+          <a:noFill/>
+        </p:spPr>
+        <p:txBody>
+          <a:bodyPr wrap="square" lIns="45720" rIns="45720" anchor="ctr">
+            <a:spAutoFit/>
+          </a:bodyPr>
+          <a:lstStyle/>
+          <a:p>
+            <a:r>
+              <a:rPr sz="3000" b="1">
+                <a:solidFill>
+                  <a:srgbClr val="006D77"/>
+                </a:solidFill>
+              </a:rPr>
+              <a:t>Question 4</a:t>
+            </a:r>
+          </a:p>
+        </p:txBody>
+      </p:sp>
+      <p:sp>
+        <p:nvSpPr>
+          <p:cNvPr id="7" name="TextBox 6"/>
+          <p:cNvSpPr txBox="1"/>
+          <p:nvPr/>
+        </p:nvSpPr>
+        <p:spPr>
+          <a:xfrm>
+            <a:off x="640080" y="1325880"/>
+            <a:ext cx="10911535" cy="439928"/>
           </a:xfrm>
           <a:prstGeom prst="rect">
             <a:avLst/>
@@ -6309,12 +5840,54 @@
           <a:p>
             <a:pPr algn="l"/>
             <a:r>
-              <a:rPr sz="4000" b="1">
-                <a:solidFill>
-                  <a:srgbClr val="FFFFFF"/>
-                </a:solidFill>
-              </a:rPr>
-              <a:t>Appendix · Week-by-Week Topic Map (1–6)</a:t>
+              <a:rPr sz="2000" b="1">
+                <a:solidFill>
+                  <a:srgbClr val="1F2D3A"/>
+                </a:solidFill>
+              </a:rPr>
+              <a:t>What does a canary stop, and what does it not stop?</a:t>
+            </a:r>
+          </a:p>
+        </p:txBody>
+      </p:sp>
+      <p:sp>
+        <p:nvSpPr>
+          <p:cNvPr id="8" name="TextBox 7"/>
+          <p:cNvSpPr txBox="1"/>
+          <p:nvPr/>
+        </p:nvSpPr>
+        <p:spPr>
+          <a:xfrm>
+            <a:off x="640080" y="1875536"/>
+            <a:ext cx="10911535" cy="770128"/>
+          </a:xfrm>
+          <a:prstGeom prst="rect">
+            <a:avLst/>
+          </a:prstGeom>
+          <a:noFill/>
+        </p:spPr>
+        <p:txBody>
+          <a:bodyPr wrap="square" lIns="45720" rIns="45720">
+            <a:spAutoFit/>
+          </a:bodyPr>
+          <a:lstStyle/>
+          <a:p>
+            <a:pPr algn="l"/>
+            <a:r>
+              <a:rPr sz="2000" b="1">
+                <a:solidFill>
+                  <a:srgbClr val="1F2D3A"/>
+                </a:solidFill>
+              </a:rPr>
+              <a:t>Answer:</a:t>
+            </a:r>
+            <a:r>
+              <a:rPr sz="2000" b="0">
+                <a:solidFill>
+                  <a:srgbClr val="1F2D3A"/>
+                </a:solidFill>
+              </a:rPr>
+              <a:t> Stops: a stack overflow that reaches the return address. Does not stop: heap overflow, variables before the canary, a leaked canary.</a:t>
             </a:r>
           </a:p>
         </p:txBody>
@@ -6489,7 +6062,7 @@
                   <a:srgbClr val="006D77"/>
                 </a:solidFill>
               </a:rPr>
-              <a:t>Week 1 · Key Points</a:t>
+              <a:t>Question 5</a:t>
             </a:r>
           </a:p>
         </p:txBody>
@@ -6503,7 +6076,7 @@
         <p:spPr>
           <a:xfrm>
             <a:off x="640080" y="1325880"/>
-            <a:ext cx="10911535" cy="1595120"/>
+            <a:ext cx="10911535" cy="439928"/>
           </a:xfrm>
           <a:prstGeom prst="rect">
             <a:avLst/>
@@ -6516,18 +6089,48 @@
           </a:bodyPr>
           <a:lstStyle/>
           <a:p>
-            <a:pPr>
-              <a:spcAft>
-                <a:spcPts val="300"/>
-              </a:spcAft>
-            </a:pPr>
+            <a:pPr algn="l"/>
             <a:r>
               <a:rPr sz="2000" b="1">
                 <a:solidFill>
-                  <a:srgbClr val="006D77"/>
-                </a:solidFill>
-              </a:rPr>
-              <a:t>• </a:t>
+                  <a:srgbClr val="1F2D3A"/>
+                </a:solidFill>
+              </a:rPr>
+              <a:t>Why is RASP self-hashing not enough on its own?</a:t>
+            </a:r>
+          </a:p>
+        </p:txBody>
+      </p:sp>
+      <p:sp>
+        <p:nvSpPr>
+          <p:cNvPr id="8" name="TextBox 7"/>
+          <p:cNvSpPr txBox="1"/>
+          <p:nvPr/>
+        </p:nvSpPr>
+        <p:spPr>
+          <a:xfrm>
+            <a:off x="640080" y="1875536"/>
+            <a:ext cx="10911535" cy="770128"/>
+          </a:xfrm>
+          <a:prstGeom prst="rect">
+            <a:avLst/>
+          </a:prstGeom>
+          <a:noFill/>
+        </p:spPr>
+        <p:txBody>
+          <a:bodyPr wrap="square" lIns="45720" rIns="45720">
+            <a:spAutoFit/>
+          </a:bodyPr>
+          <a:lstStyle/>
+          <a:p>
+            <a:pPr algn="l"/>
+            <a:r>
+              <a:rPr sz="2000" b="1">
+                <a:solidFill>
+                  <a:srgbClr val="1F2D3A"/>
+                </a:solidFill>
+              </a:rPr>
+              <a:t>Answer:</a:t>
             </a:r>
             <a:r>
               <a:rPr sz="2000" b="0">
@@ -6535,76 +6138,7 @@
                   <a:srgbClr val="1F2D3A"/>
                 </a:solidFill>
               </a:rPr>
-              <a:t>CIA triad; a bug ≠ a vulnerability.</a:t>
-            </a:r>
-          </a:p>
-          <a:p>
-            <a:pPr>
-              <a:spcAft>
-                <a:spcPts val="300"/>
-              </a:spcAft>
-            </a:pPr>
-            <a:r>
-              <a:rPr sz="2000" b="1">
-                <a:solidFill>
-                  <a:srgbClr val="006D77"/>
-                </a:solidFill>
-              </a:rPr>
-              <a:t>• </a:t>
-            </a:r>
-            <a:r>
-              <a:rPr sz="2000" b="0">
-                <a:solidFill>
-                  <a:srgbClr val="1F2D3A"/>
-                </a:solidFill>
-              </a:rPr>
-              <a:t>MATE (white-box) attacker.</a:t>
-            </a:r>
-          </a:p>
-          <a:p>
-            <a:pPr>
-              <a:spcAft>
-                <a:spcPts val="300"/>
-              </a:spcAft>
-            </a:pPr>
-            <a:r>
-              <a:rPr sz="2000" b="1">
-                <a:solidFill>
-                  <a:srgbClr val="006D77"/>
-                </a:solidFill>
-              </a:rPr>
-              <a:t>• </a:t>
-            </a:r>
-            <a:r>
-              <a:rPr sz="2000" b="0">
-                <a:solidFill>
-                  <a:srgbClr val="1F2D3A"/>
-                </a:solidFill>
-              </a:rPr>
-              <a:t>STRIDE, attack tree, DFD.</a:t>
-            </a:r>
-          </a:p>
-          <a:p>
-            <a:pPr>
-              <a:spcAft>
-                <a:spcPts val="300"/>
-              </a:spcAft>
-            </a:pPr>
-            <a:r>
-              <a:rPr sz="2000" b="1">
-                <a:solidFill>
-                  <a:srgbClr val="006D77"/>
-                </a:solidFill>
-              </a:rPr>
-              <a:t>• </a:t>
-            </a:r>
-            <a:r>
-              <a:rPr sz="2000" b="0">
-                <a:solidFill>
-                  <a:srgbClr val="1F2D3A"/>
-                </a:solidFill>
-              </a:rPr>
-              <a:t>Layered defence; design principles.</a:t>
+              <a:t> The attacker can find the digest function and bypass it. Obfuscation + cross-checking + overlapping checks are needed.</a:t>
             </a:r>
           </a:p>
         </p:txBody>
@@ -6779,7 +6313,7 @@
                   <a:srgbClr val="006D77"/>
                 </a:solidFill>
               </a:rPr>
-              <a:t>Week 2 · Key Points</a:t>
+              <a:t>Question 6</a:t>
             </a:r>
           </a:p>
         </p:txBody>
@@ -6793,7 +6327,7 @@
         <p:spPr>
           <a:xfrm>
             <a:off x="640080" y="1325880"/>
-            <a:ext cx="10911535" cy="1219200"/>
+            <a:ext cx="10911535" cy="439928"/>
           </a:xfrm>
           <a:prstGeom prst="rect">
             <a:avLst/>
@@ -6806,18 +6340,48 @@
           </a:bodyPr>
           <a:lstStyle/>
           <a:p>
-            <a:pPr>
-              <a:spcAft>
-                <a:spcPts val="300"/>
-              </a:spcAft>
-            </a:pPr>
+            <a:pPr algn="l"/>
             <a:r>
               <a:rPr sz="2000" b="1">
                 <a:solidFill>
-                  <a:srgbClr val="006D77"/>
-                </a:solidFill>
-              </a:rPr>
-              <a:t>• </a:t>
+                  <a:srgbClr val="1F2D3A"/>
+                </a:solidFill>
+              </a:rPr>
+              <a:t>Why a KDF and a salt when deriving a key from a password?</a:t>
+            </a:r>
+          </a:p>
+        </p:txBody>
+      </p:sp>
+      <p:sp>
+        <p:nvSpPr>
+          <p:cNvPr id="8" name="TextBox 7"/>
+          <p:cNvSpPr txBox="1"/>
+          <p:nvPr/>
+        </p:nvSpPr>
+        <p:spPr>
+          <a:xfrm>
+            <a:off x="640080" y="1875536"/>
+            <a:ext cx="10911535" cy="770128"/>
+          </a:xfrm>
+          <a:prstGeom prst="rect">
+            <a:avLst/>
+          </a:prstGeom>
+          <a:noFill/>
+        </p:spPr>
+        <p:txBody>
+          <a:bodyPr wrap="square" lIns="45720" rIns="45720">
+            <a:spAutoFit/>
+          </a:bodyPr>
+          <a:lstStyle/>
+          <a:p>
+            <a:pPr algn="l"/>
+            <a:r>
+              <a:rPr sz="2000" b="1">
+                <a:solidFill>
+                  <a:srgbClr val="1F2D3A"/>
+                </a:solidFill>
+              </a:rPr>
+              <a:t>Answer:</a:t>
             </a:r>
             <a:r>
               <a:rPr sz="2000" b="0">
@@ -6825,53 +6389,7 @@
                   <a:srgbClr val="1F2D3A"/>
                 </a:solidFill>
               </a:rPr>
-              <a:t>Threat modelling steps.</a:t>
-            </a:r>
-          </a:p>
-          <a:p>
-            <a:pPr>
-              <a:spcAft>
-                <a:spcPts val="300"/>
-              </a:spcAft>
-            </a:pPr>
-            <a:r>
-              <a:rPr sz="2000" b="1">
-                <a:solidFill>
-                  <a:srgbClr val="006D77"/>
-                </a:solidFill>
-              </a:rPr>
-              <a:t>• </a:t>
-            </a:r>
-            <a:r>
-              <a:rPr sz="2000" b="0">
-                <a:solidFill>
-                  <a:srgbClr val="1F2D3A"/>
-                </a:solidFill>
-              </a:rPr>
-              <a:t>Trust boundary; least privilege.</a:t>
-            </a:r>
-          </a:p>
-          <a:p>
-            <a:pPr>
-              <a:spcAft>
-                <a:spcPts val="300"/>
-              </a:spcAft>
-            </a:pPr>
-            <a:r>
-              <a:rPr sz="2000" b="1">
-                <a:solidFill>
-                  <a:srgbClr val="006D77"/>
-                </a:solidFill>
-              </a:rPr>
-              <a:t>• </a:t>
-            </a:r>
-            <a:r>
-              <a:rPr sz="2000" b="0">
-                <a:solidFill>
-                  <a:srgbClr val="1F2D3A"/>
-                </a:solidFill>
-              </a:rPr>
-              <a:t>Asset list and C/I/I+ labels.</a:t>
+              <a:t> A password has low entropy; the KDF slows down guessing, and the salt stops identical passwords from producing the same key (rainbow table).</a:t>
             </a:r>
           </a:p>
         </p:txBody>
@@ -7046,7 +6564,7 @@
                   <a:srgbClr val="006D77"/>
                 </a:solidFill>
               </a:rPr>
-              <a:t>Week 3 · Key Points</a:t>
+              <a:t>Question 7</a:t>
             </a:r>
           </a:p>
         </p:txBody>
@@ -7060,7 +6578,7 @@
         <p:spPr>
           <a:xfrm>
             <a:off x="640080" y="1325880"/>
-            <a:ext cx="10911535" cy="1595120"/>
+            <a:ext cx="10911535" cy="439928"/>
           </a:xfrm>
           <a:prstGeom prst="rect">
             <a:avLst/>
@@ -7073,18 +6591,48 @@
           </a:bodyPr>
           <a:lstStyle/>
           <a:p>
-            <a:pPr>
-              <a:spcAft>
-                <a:spcPts val="300"/>
-              </a:spcAft>
-            </a:pPr>
+            <a:pPr algn="l"/>
             <a:r>
               <a:rPr sz="2000" b="1">
                 <a:solidFill>
-                  <a:srgbClr val="006D77"/>
-                </a:solidFill>
-              </a:rPr>
-              <a:t>• </a:t>
+                  <a:srgbClr val="1F2D3A"/>
+                </a:solidFill>
+              </a:rPr>
+              <a:t>An example of the least-privilege principle?</a:t>
+            </a:r>
+          </a:p>
+        </p:txBody>
+      </p:sp>
+      <p:sp>
+        <p:nvSpPr>
+          <p:cNvPr id="8" name="TextBox 7"/>
+          <p:cNvSpPr txBox="1"/>
+          <p:nvPr/>
+        </p:nvSpPr>
+        <p:spPr>
+          <a:xfrm>
+            <a:off x="640080" y="1875536"/>
+            <a:ext cx="10911535" cy="770128"/>
+          </a:xfrm>
+          <a:prstGeom prst="rect">
+            <a:avLst/>
+          </a:prstGeom>
+          <a:noFill/>
+        </p:spPr>
+        <p:txBody>
+          <a:bodyPr wrap="square" lIns="45720" rIns="45720">
+            <a:spAutoFit/>
+          </a:bodyPr>
+          <a:lstStyle/>
+          <a:p>
+            <a:pPr algn="l"/>
+            <a:r>
+              <a:rPr sz="2000" b="1">
+                <a:solidFill>
+                  <a:srgbClr val="1F2D3A"/>
+                </a:solidFill>
+              </a:rPr>
+              <a:t>Answer:</a:t>
             </a:r>
             <a:r>
               <a:rPr sz="2000" b="0">
@@ -7092,76 +6640,41 @@
                   <a:srgbClr val="1F2D3A"/>
                 </a:solidFill>
               </a:rPr>
-              <a:t>The three states of data.</a:t>
-            </a:r>
-          </a:p>
-          <a:p>
-            <a:pPr>
-              <a:spcAft>
-                <a:spcPts val="300"/>
-              </a:spcAft>
-            </a:pPr>
-            <a:r>
-              <a:rPr sz="2000" b="1">
-                <a:solidFill>
-                  <a:srgbClr val="006D77"/>
-                </a:solidFill>
-              </a:rPr>
-              <a:t>• </a:t>
+              <a:t> The application's DB user should only be able to </a:t>
             </a:r>
             <a:r>
               <a:rPr sz="2000" b="0">
                 <a:solidFill>
+                  <a:srgbClr val="A1123F"/>
+                </a:solidFill>
+                <a:latin typeface="Consolas"/>
+              </a:rPr>
+              <a:t>SELECT</a:t>
+            </a:r>
+            <a:r>
+              <a:rPr sz="2000" b="0">
+                <a:solidFill>
                   <a:srgbClr val="1F2D3A"/>
                 </a:solidFill>
               </a:rPr>
-              <a:t>AEAD; nonce reuse is catastrophic.</a:t>
-            </a:r>
-          </a:p>
-          <a:p>
-            <a:pPr>
-              <a:spcAft>
-                <a:spcPts val="300"/>
-              </a:spcAft>
-            </a:pPr>
-            <a:r>
-              <a:rPr sz="2000" b="1">
-                <a:solidFill>
-                  <a:srgbClr val="006D77"/>
-                </a:solidFill>
-              </a:rPr>
-              <a:t>• </a:t>
+              <a:t>; it should not have </a:t>
             </a:r>
             <a:r>
               <a:rPr sz="2000" b="0">
                 <a:solidFill>
+                  <a:srgbClr val="A1123F"/>
+                </a:solidFill>
+                <a:latin typeface="Consolas"/>
+              </a:rPr>
+              <a:t>DROP</a:t>
+            </a:r>
+            <a:r>
+              <a:rPr sz="2000" b="0">
+                <a:solidFill>
                   <a:srgbClr val="1F2D3A"/>
                 </a:solidFill>
               </a:rPr>
-              <a:t>CSPRNG; KDF (password → key).</a:t>
-            </a:r>
-          </a:p>
-          <a:p>
-            <a:pPr>
-              <a:spcAft>
-                <a:spcPts val="300"/>
-              </a:spcAft>
-            </a:pPr>
-            <a:r>
-              <a:rPr sz="2000" b="1">
-                <a:solidFill>
-                  <a:srgbClr val="006D77"/>
-                </a:solidFill>
-              </a:rPr>
-              <a:t>• </a:t>
-            </a:r>
-            <a:r>
-              <a:rPr sz="2000" b="0">
-                <a:solidFill>
-                  <a:srgbClr val="1F2D3A"/>
-                </a:solidFill>
-              </a:rPr>
-              <a:t>Key hierarchy; forward secrecy.</a:t>
+              <a:t> privilege. Excess privilege = greater damage.</a:t>
             </a:r>
           </a:p>
         </p:txBody>
@@ -7350,7 +6863,7 @@
         <p:spPr>
           <a:xfrm>
             <a:off x="640080" y="1325880"/>
-            <a:ext cx="10911535" cy="1595120"/>
+            <a:ext cx="10911535" cy="2631440"/>
           </a:xfrm>
           <a:prstGeom prst="rect">
             <a:avLst/>
@@ -7484,7 +6997,7 @@
                   <a:srgbClr val="1F2D3A"/>
                 </a:solidFill>
               </a:rPr>
-              <a:t> question</a:t>
+              <a:t> question — learn frequently confused concepts by their reason too</a:t>
             </a:r>
           </a:p>
           <a:p>
@@ -7507,7 +7020,7 @@
                   <a:srgbClr val="1F2D3A"/>
                 </a:solidFill>
               </a:rPr>
-              <a:t>Best preparation: each week's </a:t>
+              <a:t>Best preparation: work through each week's </a:t>
             </a:r>
             <a:r>
               <a:rPr sz="2000" b="1">
@@ -7523,7 +7036,46 @@
                   <a:srgbClr val="1F2D3A"/>
                 </a:solidFill>
               </a:rPr>
-              <a:t> questions + rerunning the demos</a:t>
+              <a:t> questions without looking at the answers, then rerun the demos</a:t>
+            </a:r>
+          </a:p>
+          <a:p>
+            <a:pPr>
+              <a:spcAft>
+                <a:spcPts val="300"/>
+              </a:spcAft>
+            </a:pPr>
+            <a:r>
+              <a:rPr sz="2000" b="1">
+                <a:solidFill>
+                  <a:srgbClr val="006D77"/>
+                </a:solidFill>
+              </a:rPr>
+              <a:t>• </a:t>
+            </a:r>
+            <a:r>
+              <a:rPr sz="2000" b="0">
+                <a:solidFill>
+                  <a:srgbClr val="1F2D3A"/>
+                </a:solidFill>
+              </a:rPr>
+              <a:t>Review the </a:t>
+            </a:r>
+            <a:r>
+              <a:rPr sz="2000" b="1">
+                <a:solidFill>
+                  <a:srgbClr val="1F2D3A"/>
+                </a:solidFill>
+              </a:rPr>
+              <a:t>Week 3 and Week 4</a:t>
+            </a:r>
+            <a:r>
+              <a:rPr sz="2000" b="0">
+                <a:solidFill>
+                  <a:srgbClr val="1F2D3A"/>
+                </a:solidFill>
+              </a:rPr>
+              <a:t> demos once more in particular</a:t>
             </a:r>
           </a:p>
         </p:txBody>
@@ -7698,7 +7250,7 @@
                   <a:srgbClr val="006D77"/>
                 </a:solidFill>
               </a:rPr>
-              <a:t>Week 4 · Key Points</a:t>
+              <a:t>Question 8</a:t>
             </a:r>
           </a:p>
         </p:txBody>
@@ -7712,7 +7264,7 @@
         <p:spPr>
           <a:xfrm>
             <a:off x="640080" y="1325880"/>
-            <a:ext cx="10911535" cy="1595120"/>
+            <a:ext cx="10911535" cy="439928"/>
           </a:xfrm>
           <a:prstGeom prst="rect">
             <a:avLst/>
@@ -7725,18 +7277,48 @@
           </a:bodyPr>
           <a:lstStyle/>
           <a:p>
-            <a:pPr>
-              <a:spcAft>
-                <a:spcPts val="300"/>
-              </a:spcAft>
-            </a:pPr>
+            <a:pPr algn="l"/>
             <a:r>
               <a:rPr sz="2000" b="1">
                 <a:solidFill>
-                  <a:srgbClr val="006D77"/>
-                </a:solidFill>
-              </a:rPr>
-              <a:t>• </a:t>
+                  <a:srgbClr val="1F2D3A"/>
+                </a:solidFill>
+              </a:rPr>
+              <a:t>What is the "E" in STRIDE, and one control for it?</a:t>
+            </a:r>
+          </a:p>
+        </p:txBody>
+      </p:sp>
+      <p:sp>
+        <p:nvSpPr>
+          <p:cNvPr id="8" name="TextBox 7"/>
+          <p:cNvSpPr txBox="1"/>
+          <p:nvPr/>
+        </p:nvSpPr>
+        <p:spPr>
+          <a:xfrm>
+            <a:off x="640080" y="1875536"/>
+            <a:ext cx="10911535" cy="770128"/>
+          </a:xfrm>
+          <a:prstGeom prst="rect">
+            <a:avLst/>
+          </a:prstGeom>
+          <a:noFill/>
+        </p:spPr>
+        <p:txBody>
+          <a:bodyPr wrap="square" lIns="45720" rIns="45720">
+            <a:spAutoFit/>
+          </a:bodyPr>
+          <a:lstStyle/>
+          <a:p>
+            <a:pPr algn="l"/>
+            <a:r>
+              <a:rPr sz="2000" b="1">
+                <a:solidFill>
+                  <a:srgbClr val="1F2D3A"/>
+                </a:solidFill>
+              </a:rPr>
+              <a:t>Answer:</a:t>
             </a:r>
             <a:r>
               <a:rPr sz="2000" b="0">
@@ -7744,76 +7326,7 @@
                   <a:srgbClr val="1F2D3A"/>
                 </a:solidFill>
               </a:rPr>
-              <a:t>Three layers: code → compiler/OS → obfuscation.</a:t>
-            </a:r>
-          </a:p>
-          <a:p>
-            <a:pPr>
-              <a:spcAft>
-                <a:spcPts val="300"/>
-              </a:spcAft>
-            </a:pPr>
-            <a:r>
-              <a:rPr sz="2000" b="1">
-                <a:solidFill>
-                  <a:srgbClr val="006D77"/>
-                </a:solidFill>
-              </a:rPr>
-              <a:t>• </a:t>
-            </a:r>
-            <a:r>
-              <a:rPr sz="2000" b="0">
-                <a:solidFill>
-                  <a:srgbClr val="1F2D3A"/>
-                </a:solidFill>
-              </a:rPr>
-              <a:t>CERT/CWE; UAF; integer/UB.</a:t>
-            </a:r>
-          </a:p>
-          <a:p>
-            <a:pPr>
-              <a:spcAft>
-                <a:spcPts val="300"/>
-              </a:spcAft>
-            </a:pPr>
-            <a:r>
-              <a:rPr sz="2000" b="1">
-                <a:solidFill>
-                  <a:srgbClr val="006D77"/>
-                </a:solidFill>
-              </a:rPr>
-              <a:t>• </a:t>
-            </a:r>
-            <a:r>
-              <a:rPr sz="2000" b="0">
-                <a:solidFill>
-                  <a:srgbClr val="1F2D3A"/>
-                </a:solidFill>
-              </a:rPr>
-              <a:t>Sanitizers (ASan/UBSan), fuzzing.</a:t>
-            </a:r>
-          </a:p>
-          <a:p>
-            <a:pPr>
-              <a:spcAft>
-                <a:spcPts val="300"/>
-              </a:spcAft>
-            </a:pPr>
-            <a:r>
-              <a:rPr sz="2000" b="1">
-                <a:solidFill>
-                  <a:srgbClr val="006D77"/>
-                </a:solidFill>
-              </a:rPr>
-              <a:t>• </a:t>
-            </a:r>
-            <a:r>
-              <a:rPr sz="2000" b="0">
-                <a:solidFill>
-                  <a:srgbClr val="1F2D3A"/>
-                </a:solidFill>
-              </a:rPr>
-              <a:t>Compiler protections (canary, ASLR, NX).</a:t>
+              <a:t> Elevation of privilege. Control: least privilege, authorization checks, secure defaults.</a:t>
             </a:r>
           </a:p>
         </p:txBody>
@@ -7988,7 +7501,7 @@
                   <a:srgbClr val="006D77"/>
                 </a:solidFill>
               </a:rPr>
-              <a:t>Week 5 · Key Points</a:t>
+              <a:t>Question 9</a:t>
             </a:r>
           </a:p>
         </p:txBody>
@@ -8002,7 +7515,7 @@
         <p:spPr>
           <a:xfrm>
             <a:off x="640080" y="1325880"/>
-            <a:ext cx="10911535" cy="1219200"/>
+            <a:ext cx="10911535" cy="439928"/>
           </a:xfrm>
           <a:prstGeom prst="rect">
             <a:avLst/>
@@ -8015,18 +7528,48 @@
           </a:bodyPr>
           <a:lstStyle/>
           <a:p>
-            <a:pPr>
-              <a:spcAft>
-                <a:spcPts val="300"/>
-              </a:spcAft>
-            </a:pPr>
+            <a:pPr algn="l"/>
             <a:r>
               <a:rPr sz="2000" b="1">
                 <a:solidFill>
-                  <a:srgbClr val="006D77"/>
-                </a:solidFill>
-              </a:rPr>
-              <a:t>• </a:t>
+                  <a:srgbClr val="1F2D3A"/>
+                </a:solidFill>
+              </a:rPr>
+              <a:t>Why is deserialisation dangerous, and what is the fix?</a:t>
+            </a:r>
+          </a:p>
+        </p:txBody>
+      </p:sp>
+      <p:sp>
+        <p:nvSpPr>
+          <p:cNvPr id="8" name="TextBox 7"/>
+          <p:cNvSpPr txBox="1"/>
+          <p:nvPr/>
+        </p:nvSpPr>
+        <p:spPr>
+          <a:xfrm>
+            <a:off x="640080" y="1875536"/>
+            <a:ext cx="10911535" cy="770128"/>
+          </a:xfrm>
+          <a:prstGeom prst="rect">
+            <a:avLst/>
+          </a:prstGeom>
+          <a:noFill/>
+        </p:spPr>
+        <p:txBody>
+          <a:bodyPr wrap="square" lIns="45720" rIns="45720">
+            <a:spAutoFit/>
+          </a:bodyPr>
+          <a:lstStyle/>
+          <a:p>
+            <a:pPr algn="l"/>
+            <a:r>
+              <a:rPr sz="2000" b="1">
+                <a:solidFill>
+                  <a:srgbClr val="1F2D3A"/>
+                </a:solidFill>
+              </a:rPr>
+              <a:t>Answer:</a:t>
             </a:r>
             <a:r>
               <a:rPr sz="2000" b="0">
@@ -8034,53 +7577,7 @@
                   <a:srgbClr val="1F2D3A"/>
                 </a:solidFill>
               </a:rPr>
-              <a:t>A managed language solves memory errors, not injection.</a:t>
-            </a:r>
-          </a:p>
-          <a:p>
-            <a:pPr>
-              <a:spcAft>
-                <a:spcPts val="300"/>
-              </a:spcAft>
-            </a:pPr>
-            <a:r>
-              <a:rPr sz="2000" b="1">
-                <a:solidFill>
-                  <a:srgbClr val="006D77"/>
-                </a:solidFill>
-              </a:rPr>
-              <a:t>• </a:t>
-            </a:r>
-            <a:r>
-              <a:rPr sz="2000" b="0">
-                <a:solidFill>
-                  <a:srgbClr val="1F2D3A"/>
-                </a:solidFill>
-              </a:rPr>
-              <a:t>SQL/command/path injection → parameterization/argument array.</a:t>
-            </a:r>
-          </a:p>
-          <a:p>
-            <a:pPr>
-              <a:spcAft>
-                <a:spcPts val="300"/>
-              </a:spcAft>
-            </a:pPr>
-            <a:r>
-              <a:rPr sz="2000" b="1">
-                <a:solidFill>
-                  <a:srgbClr val="006D77"/>
-                </a:solidFill>
-              </a:rPr>
-              <a:t>• </a:t>
-            </a:r>
-            <a:r>
-              <a:rPr sz="2000" b="0">
-                <a:solidFill>
-                  <a:srgbClr val="1F2D3A"/>
-                </a:solidFill>
-              </a:rPr>
-              <a:t>Deserialisation; ProGuard/R8; SBOM.</a:t>
+              <a:t> Code can execute during extraction (a gadget chain). Fix: a data format + schema; an allowlist filter if unavoidable.</a:t>
             </a:r>
           </a:p>
         </p:txBody>
@@ -8255,7 +7752,7 @@
                   <a:srgbClr val="006D77"/>
                 </a:solidFill>
               </a:rPr>
-              <a:t>Week 6 · Key Points</a:t>
+              <a:t>Example · Multiple Choice</a:t>
             </a:r>
           </a:p>
         </p:txBody>
@@ -8269,7 +7766,7 @@
         <p:spPr>
           <a:xfrm>
             <a:off x="640080" y="1325880"/>
-            <a:ext cx="10911535" cy="1219200"/>
+            <a:ext cx="10911535" cy="439928"/>
           </a:xfrm>
           <a:prstGeom prst="rect">
             <a:avLst/>
@@ -8282,41 +7779,56 @@
           </a:bodyPr>
           <a:lstStyle/>
           <a:p>
-            <a:pPr>
-              <a:spcAft>
-                <a:spcPts val="300"/>
-              </a:spcAft>
-            </a:pPr>
+            <a:pPr algn="l"/>
             <a:r>
               <a:rPr sz="2000" b="1">
                 <a:solidFill>
-                  <a:srgbClr val="006D77"/>
-                </a:solidFill>
-              </a:rPr>
-              <a:t>• </a:t>
-            </a:r>
+                  <a:srgbClr val="1F2D3A"/>
+                </a:solidFill>
+              </a:rPr>
+              <a:t>Which of the following is an AEAD mode?</a:t>
+            </a:r>
+          </a:p>
+        </p:txBody>
+      </p:sp>
+      <p:sp>
+        <p:nvSpPr>
+          <p:cNvPr id="8" name="TextBox 7"/>
+          <p:cNvSpPr txBox="1"/>
+          <p:nvPr/>
+        </p:nvSpPr>
+        <p:spPr>
+          <a:xfrm>
+            <a:off x="640080" y="1875536"/>
+            <a:ext cx="10911535" cy="439928"/>
+          </a:xfrm>
+          <a:prstGeom prst="rect">
+            <a:avLst/>
+          </a:prstGeom>
+          <a:noFill/>
+        </p:spPr>
+        <p:txBody>
+          <a:bodyPr wrap="square" lIns="45720" rIns="45720">
+            <a:spAutoFit/>
+          </a:bodyPr>
+          <a:lstStyle/>
+          <a:p>
+            <a:pPr algn="l"/>
             <a:r>
               <a:rPr sz="2000" b="0">
                 <a:solidFill>
                   <a:srgbClr val="1F2D3A"/>
                 </a:solidFill>
               </a:rPr>
-              <a:t>RASP: detect, defend, deter.</a:t>
-            </a:r>
-          </a:p>
-          <a:p>
-            <a:pPr>
-              <a:spcAft>
-                <a:spcPts val="300"/>
-              </a:spcAft>
-            </a:pPr>
+              <a:t>A) ECB B) CBC C) </a:t>
+            </a:r>
             <a:r>
               <a:rPr sz="2000" b="1">
                 <a:solidFill>
-                  <a:srgbClr val="006D77"/>
-                </a:solidFill>
-              </a:rPr>
-              <a:t>• </a:t>
+                  <a:srgbClr val="1F2D3A"/>
+                </a:solidFill>
+              </a:rPr>
+              <a:t>GCM</a:t>
             </a:r>
             <a:r>
               <a:rPr sz="2000" b="0">
@@ -8324,30 +7836,7 @@
                   <a:srgbClr val="1F2D3A"/>
                 </a:solidFill>
               </a:rPr>
-              <a:t>Integrity (self-hashing), anti-debug, hook detection.</a:t>
-            </a:r>
-          </a:p>
-          <a:p>
-            <a:pPr>
-              <a:spcAft>
-                <a:spcPts val="300"/>
-              </a:spcAft>
-            </a:pPr>
-            <a:r>
-              <a:rPr sz="2000" b="1">
-                <a:solidFill>
-                  <a:srgbClr val="006D77"/>
-                </a:solidFill>
-              </a:rPr>
-              <a:t>• </a:t>
-            </a:r>
-            <a:r>
-              <a:rPr sz="2000" b="0">
-                <a:solidFill>
-                  <a:srgbClr val="1F2D3A"/>
-                </a:solidFill>
-              </a:rPr>
-              <a:t>Cross-checking; response policy; device binding.</a:t>
+              <a:t> ✓ D) Raw RSA</a:t>
             </a:r>
           </a:p>
         </p:txBody>
@@ -8522,428 +8011,127 @@
                   <a:srgbClr val="006D77"/>
                 </a:solidFill>
               </a:rPr>
-              <a:t>Frequently Confused</a:t>
-            </a:r>
-          </a:p>
-        </p:txBody>
-      </p:sp>
-      <p:graphicFrame>
-        <p:nvGraphicFramePr>
-          <p:cNvPr id="7" name="Table 6"/>
-          <p:cNvGraphicFramePr>
-            <a:graphicFrameLocks noGrp="1"/>
-          </p:cNvGraphicFramePr>
-          <p:nvPr/>
-        </p:nvGraphicFramePr>
-        <p:xfrm>
-          <a:off x="640080" y="1325880"/>
-          <a:ext cx="10729674" cy="2221991"/>
-        </p:xfrm>
-        <a:graphic>
-          <a:graphicData uri="http://schemas.openxmlformats.org/drawingml/2006/table">
-            <a:tbl>
-              <a:tblPr firstRow="1" bandRow="1">
-                <a:tableStyleId>{5C22544A-7EE6-4342-B048-85BDC9FD1C3A}</a:tableStyleId>
-              </a:tblPr>
-              <a:tblGrid>
-                <a:gridCol w="2727883"/>
-                <a:gridCol w="3637178"/>
-                <a:gridCol w="4364613"/>
-              </a:tblGrid>
-              <a:tr h="370331">
-                <a:tc>
-                  <a:txBody>
-                    <a:bodyPr wrap="square"/>
-                    <a:lstStyle/>
-                    <a:p>
-                      <a:r>
-                        <a:rPr sz="1439" b="1">
-                          <a:solidFill>
-                            <a:srgbClr val="FFFFFF"/>
-                          </a:solidFill>
-                        </a:rPr>
-                        <a:t>A</a:t>
-                      </a:r>
-                    </a:p>
-                  </a:txBody>
-                  <a:tcPr marL="54864" marR="54864" marT="27432" marB="27432" anchor="ctr">
-                    <a:solidFill>
-                      <a:srgbClr val="006D77"/>
-                    </a:solidFill>
-                  </a:tcPr>
-                </a:tc>
-                <a:tc>
-                  <a:txBody>
-                    <a:bodyPr wrap="square"/>
-                    <a:lstStyle/>
-                    <a:p>
-                      <a:r>
-                        <a:rPr sz="1439" b="1">
-                          <a:solidFill>
-                            <a:srgbClr val="FFFFFF"/>
-                          </a:solidFill>
-                        </a:rPr>
-                        <a:t>B</a:t>
-                      </a:r>
-                    </a:p>
-                  </a:txBody>
-                  <a:tcPr marL="54864" marR="54864" marT="27432" marB="27432" anchor="ctr">
-                    <a:solidFill>
-                      <a:srgbClr val="006D77"/>
-                    </a:solidFill>
-                  </a:tcPr>
-                </a:tc>
-                <a:tc>
-                  <a:txBody>
-                    <a:bodyPr wrap="square"/>
-                    <a:lstStyle/>
-                    <a:p>
-                      <a:r>
-                        <a:rPr sz="1439" b="1">
-                          <a:solidFill>
-                            <a:srgbClr val="FFFFFF"/>
-                          </a:solidFill>
-                        </a:rPr>
-                        <a:t>Difference</a:t>
-                      </a:r>
-                    </a:p>
-                  </a:txBody>
-                  <a:tcPr marL="54864" marR="54864" marT="27432" marB="27432" anchor="ctr">
-                    <a:solidFill>
-                      <a:srgbClr val="006D77"/>
-                    </a:solidFill>
-                  </a:tcPr>
-                </a:tc>
-              </a:tr>
-              <a:tr h="370331">
-                <a:tc>
-                  <a:txBody>
-                    <a:bodyPr wrap="square"/>
-                    <a:lstStyle/>
-                    <a:p>
-                      <a:r>
-                        <a:rPr sz="1439" b="0">
-                          <a:solidFill>
-                            <a:srgbClr val="1F2D3A"/>
-                          </a:solidFill>
-                        </a:rPr>
-                        <a:t>Bug</a:t>
-                      </a:r>
-                    </a:p>
-                  </a:txBody>
-                  <a:tcPr marL="54864" marR="54864" marT="27432" marB="27432" anchor="ctr">
-                    <a:solidFill>
-                      <a:srgbClr val="FFFFFF"/>
-                    </a:solidFill>
-                  </a:tcPr>
-                </a:tc>
-                <a:tc>
-                  <a:txBody>
-                    <a:bodyPr wrap="square"/>
-                    <a:lstStyle/>
-                    <a:p>
-                      <a:r>
-                        <a:rPr sz="1439" b="0">
-                          <a:solidFill>
-                            <a:srgbClr val="1F2D3A"/>
-                          </a:solidFill>
-                        </a:rPr>
-                        <a:t>Vulnerability</a:t>
-                      </a:r>
-                    </a:p>
-                  </a:txBody>
-                  <a:tcPr marL="54864" marR="54864" marT="27432" marB="27432" anchor="ctr">
-                    <a:solidFill>
-                      <a:srgbClr val="FFFFFF"/>
-                    </a:solidFill>
-                  </a:tcPr>
-                </a:tc>
-                <a:tc>
-                  <a:txBody>
-                    <a:bodyPr wrap="square"/>
-                    <a:lstStyle/>
-                    <a:p>
-                      <a:r>
-                        <a:rPr sz="1439" b="0">
-                          <a:solidFill>
-                            <a:srgbClr val="1F2D3A"/>
-                          </a:solidFill>
-                        </a:rPr>
-                        <a:t>An exploitable bug</a:t>
-                      </a:r>
-                    </a:p>
-                  </a:txBody>
-                  <a:tcPr marL="54864" marR="54864" marT="27432" marB="27432" anchor="ctr">
-                    <a:solidFill>
-                      <a:srgbClr val="FFFFFF"/>
-                    </a:solidFill>
-                  </a:tcPr>
-                </a:tc>
-              </a:tr>
-              <a:tr h="370331">
-                <a:tc>
-                  <a:txBody>
-                    <a:bodyPr wrap="square"/>
-                    <a:lstStyle/>
-                    <a:p>
-                      <a:r>
-                        <a:rPr sz="1439" b="0">
-                          <a:solidFill>
-                            <a:srgbClr val="1F2D3A"/>
-                          </a:solidFill>
-                        </a:rPr>
-                        <a:t>Black-box</a:t>
-                      </a:r>
-                    </a:p>
-                  </a:txBody>
-                  <a:tcPr marL="54864" marR="54864" marT="27432" marB="27432" anchor="ctr">
-                    <a:solidFill>
-                      <a:srgbClr val="EEF7F8"/>
-                    </a:solidFill>
-                  </a:tcPr>
-                </a:tc>
-                <a:tc>
-                  <a:txBody>
-                    <a:bodyPr wrap="square"/>
-                    <a:lstStyle/>
-                    <a:p>
-                      <a:r>
-                        <a:rPr sz="1439" b="0">
-                          <a:solidFill>
-                            <a:srgbClr val="1F2D3A"/>
-                          </a:solidFill>
-                        </a:rPr>
-                        <a:t>White-box (MATE)</a:t>
-                      </a:r>
-                    </a:p>
-                  </a:txBody>
-                  <a:tcPr marL="54864" marR="54864" marT="27432" marB="27432" anchor="ctr">
-                    <a:solidFill>
-                      <a:srgbClr val="EEF7F8"/>
-                    </a:solidFill>
-                  </a:tcPr>
-                </a:tc>
-                <a:tc>
-                  <a:txBody>
-                    <a:bodyPr wrap="square"/>
-                    <a:lstStyle/>
-                    <a:p>
-                      <a:r>
-                        <a:rPr sz="1439" b="0">
-                          <a:solidFill>
-                            <a:srgbClr val="1F2D3A"/>
-                          </a:solidFill>
-                        </a:rPr>
-                        <a:t>Has the program</a:t>
-                      </a:r>
-                    </a:p>
-                  </a:txBody>
-                  <a:tcPr marL="54864" marR="54864" marT="27432" marB="27432" anchor="ctr">
-                    <a:solidFill>
-                      <a:srgbClr val="EEF7F8"/>
-                    </a:solidFill>
-                  </a:tcPr>
-                </a:tc>
-              </a:tr>
-              <a:tr h="370331">
-                <a:tc>
-                  <a:txBody>
-                    <a:bodyPr wrap="square"/>
-                    <a:lstStyle/>
-                    <a:p>
-                      <a:r>
-                        <a:rPr sz="1439" b="0">
-                          <a:solidFill>
-                            <a:srgbClr val="1F2D3A"/>
-                          </a:solidFill>
-                        </a:rPr>
-                        <a:t>Symmetric</a:t>
-                      </a:r>
-                    </a:p>
-                  </a:txBody>
-                  <a:tcPr marL="54864" marR="54864" marT="27432" marB="27432" anchor="ctr">
-                    <a:solidFill>
-                      <a:srgbClr val="FFFFFF"/>
-                    </a:solidFill>
-                  </a:tcPr>
-                </a:tc>
-                <a:tc>
-                  <a:txBody>
-                    <a:bodyPr wrap="square"/>
-                    <a:lstStyle/>
-                    <a:p>
-                      <a:r>
-                        <a:rPr sz="1439" b="0">
-                          <a:solidFill>
-                            <a:srgbClr val="1F2D3A"/>
-                          </a:solidFill>
-                        </a:rPr>
-                        <a:t>Asymmetric</a:t>
-                      </a:r>
-                    </a:p>
-                  </a:txBody>
-                  <a:tcPr marL="54864" marR="54864" marT="27432" marB="27432" anchor="ctr">
-                    <a:solidFill>
-                      <a:srgbClr val="FFFFFF"/>
-                    </a:solidFill>
-                  </a:tcPr>
-                </a:tc>
-                <a:tc>
-                  <a:txBody>
-                    <a:bodyPr wrap="square"/>
-                    <a:lstStyle/>
-                    <a:p>
-                      <a:r>
-                        <a:rPr sz="1439" b="0">
-                          <a:solidFill>
-                            <a:srgbClr val="1F2D3A"/>
-                          </a:solidFill>
-                        </a:rPr>
-                        <a:t>Single / paired key</a:t>
-                      </a:r>
-                    </a:p>
-                  </a:txBody>
-                  <a:tcPr marL="54864" marR="54864" marT="27432" marB="27432" anchor="ctr">
-                    <a:solidFill>
-                      <a:srgbClr val="FFFFFF"/>
-                    </a:solidFill>
-                  </a:tcPr>
-                </a:tc>
-              </a:tr>
-              <a:tr h="370331">
-                <a:tc>
-                  <a:txBody>
-                    <a:bodyPr wrap="square"/>
-                    <a:lstStyle/>
-                    <a:p>
-                      <a:r>
-                        <a:rPr sz="1439" b="0">
-                          <a:solidFill>
-                            <a:srgbClr val="1F2D3A"/>
-                          </a:solidFill>
-                        </a:rPr>
-                        <a:t>AEAD</a:t>
-                      </a:r>
-                    </a:p>
-                  </a:txBody>
-                  <a:tcPr marL="54864" marR="54864" marT="27432" marB="27432" anchor="ctr">
-                    <a:solidFill>
-                      <a:srgbClr val="EEF7F8"/>
-                    </a:solidFill>
-                  </a:tcPr>
-                </a:tc>
-                <a:tc>
-                  <a:txBody>
-                    <a:bodyPr wrap="square"/>
-                    <a:lstStyle/>
-                    <a:p>
-                      <a:r>
-                        <a:rPr sz="1439" b="0">
-                          <a:solidFill>
-                            <a:srgbClr val="1F2D3A"/>
-                          </a:solidFill>
-                        </a:rPr>
-                        <a:t>Encryption only</a:t>
-                      </a:r>
-                    </a:p>
-                  </a:txBody>
-                  <a:tcPr marL="54864" marR="54864" marT="27432" marB="27432" anchor="ctr">
-                    <a:solidFill>
-                      <a:srgbClr val="EEF7F8"/>
-                    </a:solidFill>
-                  </a:tcPr>
-                </a:tc>
-                <a:tc>
-                  <a:txBody>
-                    <a:bodyPr wrap="square"/>
-                    <a:lstStyle/>
-                    <a:p>
-                      <a:r>
-                        <a:rPr sz="1439" b="0">
-                          <a:solidFill>
-                            <a:srgbClr val="1F2D3A"/>
-                          </a:solidFill>
-                        </a:rPr>
-                        <a:t>+ integrity</a:t>
-                      </a:r>
-                    </a:p>
-                  </a:txBody>
-                  <a:tcPr marL="54864" marR="54864" marT="27432" marB="27432" anchor="ctr">
-                    <a:solidFill>
-                      <a:srgbClr val="EEF7F8"/>
-                    </a:solidFill>
-                  </a:tcPr>
-                </a:tc>
-              </a:tr>
-              <a:tr h="370336">
-                <a:tc>
-                  <a:txBody>
-                    <a:bodyPr wrap="square"/>
-                    <a:lstStyle/>
-                    <a:p>
-                      <a:r>
-                        <a:rPr sz="1439" b="0">
-                          <a:solidFill>
-                            <a:srgbClr val="1F2D3A"/>
-                          </a:solidFill>
-                        </a:rPr>
-                        <a:t>Obfuscation</a:t>
-                      </a:r>
-                    </a:p>
-                  </a:txBody>
-                  <a:tcPr marL="54864" marR="54864" marT="27432" marB="27432" anchor="ctr">
-                    <a:solidFill>
-                      <a:srgbClr val="FFFFFF"/>
-                    </a:solidFill>
-                  </a:tcPr>
-                </a:tc>
-                <a:tc>
-                  <a:txBody>
-                    <a:bodyPr wrap="square"/>
-                    <a:lstStyle/>
-                    <a:p>
-                      <a:r>
-                        <a:rPr sz="1439" b="0">
-                          <a:solidFill>
-                            <a:srgbClr val="1F2D3A"/>
-                          </a:solidFill>
-                        </a:rPr>
-                        <a:t>Secure code</a:t>
-                      </a:r>
-                    </a:p>
-                  </a:txBody>
-                  <a:tcPr marL="54864" marR="54864" marT="27432" marB="27432" anchor="ctr">
-                    <a:solidFill>
-                      <a:srgbClr val="FFFFFF"/>
-                    </a:solidFill>
-                  </a:tcPr>
-                </a:tc>
-                <a:tc>
-                  <a:txBody>
-                    <a:bodyPr wrap="square"/>
-                    <a:lstStyle/>
-                    <a:p>
-                      <a:r>
-                        <a:rPr sz="1439" b="0">
-                          <a:solidFill>
-                            <a:srgbClr val="1F2D3A"/>
-                          </a:solidFill>
-                        </a:rPr>
-                        <a:t>Does not fix the bug</a:t>
-                      </a:r>
-                    </a:p>
-                  </a:txBody>
-                  <a:tcPr marL="54864" marR="54864" marT="27432" marB="27432" anchor="ctr">
-                    <a:solidFill>
-                      <a:srgbClr val="FFFFFF"/>
-                    </a:solidFill>
-                  </a:tcPr>
-                </a:tc>
-              </a:tr>
-            </a:tbl>
-          </a:graphicData>
-        </a:graphic>
-      </p:graphicFrame>
+              <a:t>Example · True/False</a:t>
+            </a:r>
+          </a:p>
+        </p:txBody>
+      </p:sp>
+      <p:sp>
+        <p:nvSpPr>
+          <p:cNvPr id="7" name="TextBox 6"/>
+          <p:cNvSpPr txBox="1"/>
+          <p:nvPr/>
+        </p:nvSpPr>
+        <p:spPr>
+          <a:xfrm>
+            <a:off x="640080" y="1325880"/>
+            <a:ext cx="10911535" cy="1219200"/>
+          </a:xfrm>
+          <a:prstGeom prst="rect">
+            <a:avLst/>
+          </a:prstGeom>
+          <a:noFill/>
+        </p:spPr>
+        <p:txBody>
+          <a:bodyPr wrap="square" lIns="45720" rIns="45720">
+            <a:spAutoFit/>
+          </a:bodyPr>
+          <a:lstStyle/>
+          <a:p>
+            <a:pPr>
+              <a:spcAft>
+                <a:spcPts val="300"/>
+              </a:spcAft>
+            </a:pPr>
+            <a:r>
+              <a:rPr sz="2000" b="1">
+                <a:solidFill>
+                  <a:srgbClr val="006D77"/>
+                </a:solidFill>
+              </a:rPr>
+              <a:t>• </a:t>
+            </a:r>
+            <a:r>
+              <a:rPr sz="2000" b="0">
+                <a:solidFill>
+                  <a:srgbClr val="1F2D3A"/>
+                </a:solidFill>
+              </a:rPr>
+              <a:t>Obfuscation fixes the bug. </a:t>
+            </a:r>
+            <a:r>
+              <a:rPr sz="2000" b="1">
+                <a:solidFill>
+                  <a:srgbClr val="1F2D3A"/>
+                </a:solidFill>
+              </a:rPr>
+              <a:t>(F)</a:t>
+            </a:r>
+          </a:p>
+          <a:p>
+            <a:pPr>
+              <a:spcAft>
+                <a:spcPts val="300"/>
+              </a:spcAft>
+            </a:pPr>
+            <a:r>
+              <a:rPr sz="2000" b="1">
+                <a:solidFill>
+                  <a:srgbClr val="006D77"/>
+                </a:solidFill>
+              </a:rPr>
+              <a:t>• </a:t>
+            </a:r>
+            <a:r>
+              <a:rPr sz="2000" b="0">
+                <a:solidFill>
+                  <a:srgbClr val="1F2D3A"/>
+                </a:solidFill>
+              </a:rPr>
+              <a:t>The nonce must be secret. </a:t>
+            </a:r>
+            <a:r>
+              <a:rPr sz="2000" b="1">
+                <a:solidFill>
+                  <a:srgbClr val="1F2D3A"/>
+                </a:solidFill>
+              </a:rPr>
+              <a:t>(F — must be unique, not secret)</a:t>
+            </a:r>
+          </a:p>
+          <a:p>
+            <a:pPr>
+              <a:spcAft>
+                <a:spcPts val="300"/>
+              </a:spcAft>
+            </a:pPr>
+            <a:r>
+              <a:rPr sz="2000" b="1">
+                <a:solidFill>
+                  <a:srgbClr val="006D77"/>
+                </a:solidFill>
+              </a:rPr>
+              <a:t>• </a:t>
+            </a:r>
+            <a:r>
+              <a:rPr sz="2000" b="0">
+                <a:solidFill>
+                  <a:srgbClr val="1F2D3A"/>
+                </a:solidFill>
+              </a:rPr>
+              <a:t>A parameterised query prevents SQL injection. </a:t>
+            </a:r>
+            <a:r>
+              <a:rPr sz="2000" b="1">
+                <a:solidFill>
+                  <a:srgbClr val="1F2D3A"/>
+                </a:solidFill>
+              </a:rPr>
+              <a:t>(T)</a:t>
+            </a:r>
+          </a:p>
+        </p:txBody>
+      </p:sp>
     </p:spTree>
   </p:cSld>
   <p:clrMapOvr>
@@ -8955,14 +8143,6 @@
 <file path=ppt/slides/slide24.xml><?xml version="1.0" encoding="utf-8"?>
 <p:sld xmlns:a="http://schemas.openxmlformats.org/drawingml/2006/main" xmlns:p="http://schemas.openxmlformats.org/presentationml/2006/main" xmlns:r="http://schemas.openxmlformats.org/officeDocument/2006/relationships">
   <p:cSld>
-    <p:bg>
-      <p:bgPr>
-        <a:solidFill>
-          <a:srgbClr val="006D77"/>
-        </a:solidFill>
-        <a:effectLst/>
-      </p:bgPr>
-    </p:bg>
     <p:spTree>
       <p:nvGrpSpPr>
         <p:cNvPr id="1" name=""/>
@@ -8970,9 +8150,33 @@
         <p:nvPr/>
       </p:nvGrpSpPr>
       <p:grpSpPr/>
-      <p:sp>
-        <p:nvSpPr>
-          <p:cNvPr id="2" name="TextBox 1"/>
+      <p:pic>
+        <p:nvPicPr>
+          <p:cNvPr id="2" name="Picture 1" descr="rteu_logo_kucuk.jpg"/>
+          <p:cNvPicPr>
+            <a:picLocks noChangeAspect="1"/>
+          </p:cNvPicPr>
+          <p:nvPr/>
+        </p:nvPicPr>
+        <p:blipFill>
+          <a:blip r:embed="rId2"/>
+          <a:stretch>
+            <a:fillRect/>
+          </a:stretch>
+        </p:blipFill>
+        <p:spPr>
+          <a:xfrm>
+            <a:off x="640080" y="164592"/>
+            <a:ext cx="242773" cy="329184"/>
+          </a:xfrm>
+          <a:prstGeom prst="rect">
+            <a:avLst/>
+          </a:prstGeom>
+        </p:spPr>
+      </p:pic>
+      <p:sp>
+        <p:nvSpPr>
+          <p:cNvPr id="3" name="TextBox 2"/>
           <p:cNvSpPr txBox="1"/>
           <p:nvPr/>
         </p:nvSpPr>
@@ -8995,7 +8199,7 @@
             <a:r>
               <a:rPr sz="1100" b="0">
                 <a:solidFill>
-                  <a:srgbClr val="D8F0F2"/>
+                  <a:srgbClr val="5B6770"/>
                 </a:solidFill>
               </a:rPr>
               <a:t>CEN429 Secure Programming · Week 8</a:t>
@@ -9005,7 +8209,7 @@
       </p:sp>
       <p:sp>
         <p:nvSpPr>
-          <p:cNvPr id="3" name="TextBox 2"/>
+          <p:cNvPr id="4" name="TextBox 3"/>
           <p:cNvSpPr txBox="1"/>
           <p:nvPr/>
         </p:nvSpPr>
@@ -9028,7 +8232,7 @@
             <a:r>
               <a:rPr sz="1000" b="0">
                 <a:solidFill>
-                  <a:srgbClr val="D8F0F2"/>
+                  <a:srgbClr val="5B6770"/>
                 </a:solidFill>
               </a:rPr>
               <a:t>RTEU Computer Engineering · 2026-2027 Fall</a:t>
@@ -9038,7 +8242,7 @@
       </p:sp>
       <p:sp>
         <p:nvSpPr>
-          <p:cNvPr id="4" name="TextBox 3"/>
+          <p:cNvPr id="5" name="TextBox 4"/>
           <p:cNvSpPr txBox="1"/>
           <p:nvPr/>
         </p:nvSpPr>
@@ -9062,7 +8266,7 @@
             <a:r>
               <a:rPr sz="1000" b="0">
                 <a:solidFill>
-                  <a:srgbClr val="D8F0F2"/>
+                  <a:srgbClr val="5B6770"/>
                 </a:solidFill>
               </a:rPr>
               <a:t>24</a:t>
@@ -9072,34 +8276,201 @@
       </p:sp>
       <p:sp>
         <p:nvSpPr>
-          <p:cNvPr id="5" name="TextBox 4"/>
-          <p:cNvSpPr txBox="1"/>
-          <p:nvPr/>
-        </p:nvSpPr>
-        <p:spPr>
-          <a:xfrm>
-            <a:off x="640080" y="2743200"/>
-            <a:ext cx="10911535" cy="1280160"/>
-          </a:xfrm>
-          <a:prstGeom prst="rect">
-            <a:avLst/>
-          </a:prstGeom>
-          <a:noFill/>
-        </p:spPr>
-        <p:txBody>
-          <a:bodyPr wrap="square" lIns="45720" rIns="45720">
-            <a:spAutoFit/>
-          </a:bodyPr>
+          <p:cNvPr id="6" name="TextBox 5"/>
+          <p:cNvSpPr txBox="1"/>
+          <p:nvPr/>
+        </p:nvSpPr>
+        <p:spPr>
+          <a:xfrm>
+            <a:off x="640080" y="548640"/>
+            <a:ext cx="10911535" cy="731520"/>
+          </a:xfrm>
+          <a:prstGeom prst="rect">
+            <a:avLst/>
+          </a:prstGeom>
+          <a:noFill/>
+        </p:spPr>
+        <p:txBody>
+          <a:bodyPr wrap="square" lIns="45720" rIns="45720" anchor="ctr">
+            <a:spAutoFit/>
+          </a:bodyPr>
+          <a:lstStyle/>
+          <a:p>
+            <a:r>
+              <a:rPr sz="2600" b="1">
+                <a:solidFill>
+                  <a:srgbClr val="006D77"/>
+                </a:solidFill>
+              </a:rPr>
+              <a:t>Example: Find the Bug (1)</a:t>
+            </a:r>
+          </a:p>
+        </p:txBody>
+      </p:sp>
+      <p:sp>
+        <p:nvSpPr>
+          <p:cNvPr id="7" name="Rectangle 6"/>
+          <p:cNvSpPr/>
+          <p:nvPr/>
+        </p:nvSpPr>
+        <p:spPr>
+          <a:xfrm>
+            <a:off x="640080" y="1325880"/>
+            <a:ext cx="10911535" cy="1124712"/>
+          </a:xfrm>
+          <a:prstGeom prst="rect">
+            <a:avLst/>
+          </a:prstGeom>
+          <a:solidFill>
+            <a:srgbClr val="F3F4F6"/>
+          </a:solidFill>
+          <a:ln>
+            <a:solidFill>
+              <a:srgbClr val="D9DEE3"/>
+            </a:solidFill>
+          </a:ln>
+        </p:spPr>
+        <p:style>
+          <a:lnRef idx="1">
+            <a:schemeClr val="accent1"/>
+          </a:lnRef>
+          <a:fillRef idx="3">
+            <a:schemeClr val="accent1"/>
+          </a:fillRef>
+          <a:effectRef idx="2">
+            <a:schemeClr val="accent1"/>
+          </a:effectRef>
+          <a:fontRef idx="minor">
+            <a:schemeClr val="lt1"/>
+          </a:fontRef>
+        </p:style>
+        <p:txBody>
+          <a:bodyPr rtlCol="0" anchor="t" wrap="none" lIns="137160" rIns="137160" tIns="91440" bIns="91440"/>
           <a:lstStyle/>
           <a:p>
             <a:pPr algn="l"/>
             <a:r>
-              <a:rPr sz="4000" b="1">
-                <a:solidFill>
-                  <a:srgbClr val="FFFFFF"/>
-                </a:solidFill>
-              </a:rPr>
-              <a:t>Appendix · Solved Practice Questions</a:t>
+              <a:rPr sz="1116">
+                <a:solidFill>
+                  <a:srgbClr val="1F2D3A"/>
+                </a:solidFill>
+                <a:latin typeface="Consolas"/>
+              </a:rPr>
+              <a:t>void kaydet(const char *ad) {</a:t>
+            </a:r>
+          </a:p>
+          <a:p>
+            <a:pPr algn="l"/>
+            <a:r>
+              <a:rPr sz="1116">
+                <a:solidFill>
+                  <a:srgbClr val="1F2D3A"/>
+                </a:solidFill>
+                <a:latin typeface="Consolas"/>
+              </a:rPr>
+              <a:t>    char tampon[32];</a:t>
+            </a:r>
+          </a:p>
+          <a:p>
+            <a:pPr algn="l"/>
+            <a:r>
+              <a:rPr sz="1116">
+                <a:solidFill>
+                  <a:srgbClr val="1F2D3A"/>
+                </a:solidFill>
+                <a:latin typeface="Consolas"/>
+              </a:rPr>
+              <a:t>    sprintf(tampon, "kullanici=%s", ad);</a:t>
+            </a:r>
+          </a:p>
+          <a:p>
+            <a:pPr algn="l"/>
+            <a:r>
+              <a:rPr sz="1116">
+                <a:solidFill>
+                  <a:srgbClr val="1F2D3A"/>
+                </a:solidFill>
+                <a:latin typeface="Consolas"/>
+              </a:rPr>
+              <a:t>    syslog(LOG_INFO, tampon);</a:t>
+            </a:r>
+          </a:p>
+          <a:p>
+            <a:pPr algn="l"/>
+            <a:r>
+              <a:rPr sz="1116">
+                <a:solidFill>
+                  <a:srgbClr val="1F2D3A"/>
+                </a:solidFill>
+                <a:latin typeface="Consolas"/>
+              </a:rPr>
+              <a:t>}</a:t>
+            </a:r>
+          </a:p>
+        </p:txBody>
+      </p:sp>
+      <p:sp>
+        <p:nvSpPr>
+          <p:cNvPr id="8" name="Rectangle 7"/>
+          <p:cNvSpPr/>
+          <p:nvPr/>
+        </p:nvSpPr>
+        <p:spPr>
+          <a:xfrm>
+            <a:off x="640080" y="2560320"/>
+            <a:ext cx="10911535" cy="614476"/>
+          </a:xfrm>
+          <a:prstGeom prst="rect">
+            <a:avLst/>
+          </a:prstGeom>
+          <a:solidFill>
+            <a:srgbClr val="F3F4F6"/>
+          </a:solidFill>
+          <a:ln>
+            <a:solidFill>
+              <a:srgbClr val="D9DEE3"/>
+            </a:solidFill>
+          </a:ln>
+        </p:spPr>
+        <p:style>
+          <a:lnRef idx="1">
+            <a:schemeClr val="accent1"/>
+          </a:lnRef>
+          <a:fillRef idx="3">
+            <a:schemeClr val="accent1"/>
+          </a:fillRef>
+          <a:effectRef idx="2">
+            <a:schemeClr val="accent1"/>
+          </a:effectRef>
+          <a:fontRef idx="minor">
+            <a:schemeClr val="lt1"/>
+          </a:fontRef>
+        </p:style>
+        <p:txBody>
+          <a:bodyPr rtlCol="0" anchor="t" wrap="none" lIns="137160" rIns="137160" tIns="91440" bIns="91440"/>
+          <a:lstStyle/>
+          <a:p>
+            <a:pPr algn="l"/>
+            <a:r>
+              <a:rPr sz="1116">
+                <a:solidFill>
+                  <a:srgbClr val="1F2D3A"/>
+                </a:solidFill>
+                <a:latin typeface="Consolas"/>
+              </a:rPr>
+              <a:t>char parola[64];  oku(parola, sizeof parola);  dogrula(parola);</a:t>
+            </a:r>
+          </a:p>
+          <a:p>
+            <a:pPr algn="l"/>
+            <a:r>
+              <a:rPr sz="1116">
+                <a:solidFill>
+                  <a:srgbClr val="1F2D3A"/>
+                </a:solidFill>
+                <a:latin typeface="Consolas"/>
+              </a:rPr>
+              <a:t>memset(parola, 0, sizeof parola);  return;</a:t>
             </a:r>
           </a:p>
         </p:txBody>
@@ -9269,88 +8640,198 @@
           <a:lstStyle/>
           <a:p>
             <a:r>
-              <a:rPr sz="3000" b="1">
+              <a:rPr sz="2600" b="1">
                 <a:solidFill>
                   <a:srgbClr val="006D77"/>
                 </a:solidFill>
               </a:rPr>
-              <a:t>Question 1</a:t>
-            </a:r>
-          </a:p>
-        </p:txBody>
-      </p:sp>
-      <p:sp>
-        <p:nvSpPr>
-          <p:cNvPr id="7" name="TextBox 6"/>
-          <p:cNvSpPr txBox="1"/>
+              <a:t>Example: Find the Bug (2)</a:t>
+            </a:r>
+          </a:p>
+        </p:txBody>
+      </p:sp>
+      <p:sp>
+        <p:nvSpPr>
+          <p:cNvPr id="7" name="Rectangle 6"/>
+          <p:cNvSpPr/>
           <p:nvPr/>
         </p:nvSpPr>
         <p:spPr>
           <a:xfrm>
             <a:off x="640080" y="1325880"/>
-            <a:ext cx="10911535" cy="439928"/>
-          </a:xfrm>
-          <a:prstGeom prst="rect">
-            <a:avLst/>
-          </a:prstGeom>
-          <a:noFill/>
-        </p:spPr>
-        <p:txBody>
-          <a:bodyPr wrap="square" lIns="45720" rIns="45720">
-            <a:spAutoFit/>
-          </a:bodyPr>
+            <a:ext cx="10911535" cy="444398"/>
+          </a:xfrm>
+          <a:prstGeom prst="rect">
+            <a:avLst/>
+          </a:prstGeom>
+          <a:solidFill>
+            <a:srgbClr val="F3F4F6"/>
+          </a:solidFill>
+          <a:ln>
+            <a:solidFill>
+              <a:srgbClr val="D9DEE3"/>
+            </a:solidFill>
+          </a:ln>
+        </p:spPr>
+        <p:style>
+          <a:lnRef idx="1">
+            <a:schemeClr val="accent1"/>
+          </a:lnRef>
+          <a:fillRef idx="3">
+            <a:schemeClr val="accent1"/>
+          </a:fillRef>
+          <a:effectRef idx="2">
+            <a:schemeClr val="accent1"/>
+          </a:effectRef>
+          <a:fontRef idx="minor">
+            <a:schemeClr val="lt1"/>
+          </a:fontRef>
+        </p:style>
+        <p:txBody>
+          <a:bodyPr rtlCol="0" anchor="t" wrap="none" lIns="137160" rIns="137160" tIns="91440" bIns="91440"/>
           <a:lstStyle/>
           <a:p>
             <a:pPr algn="l"/>
             <a:r>
-              <a:rPr sz="2000" b="1">
+              <a:rPr sz="1116">
                 <a:solidFill>
                   <a:srgbClr val="1F2D3A"/>
                 </a:solidFill>
-              </a:rPr>
-              <a:t>Why does a MATE attacker make cryptography alone insufficient?</a:t>
-            </a:r>
-          </a:p>
-        </p:txBody>
-      </p:sp>
-      <p:sp>
-        <p:nvSpPr>
-          <p:cNvPr id="8" name="TextBox 7"/>
-          <p:cNvSpPr txBox="1"/>
-          <p:nvPr/>
-        </p:nvSpPr>
-        <p:spPr>
-          <a:xfrm>
-            <a:off x="640080" y="1875536"/>
-            <a:ext cx="10911535" cy="1100327"/>
-          </a:xfrm>
-          <a:prstGeom prst="rect">
-            <a:avLst/>
-          </a:prstGeom>
-          <a:noFill/>
-        </p:spPr>
-        <p:txBody>
-          <a:bodyPr wrap="square" lIns="45720" rIns="45720">
-            <a:spAutoFit/>
-          </a:bodyPr>
+                <a:latin typeface="Consolas"/>
+              </a:rPr>
+              <a:t>String sql = "SELECT * FROM notlar WHERE ogrenci = '" + no + "'";</a:t>
+            </a:r>
+          </a:p>
+        </p:txBody>
+      </p:sp>
+      <p:sp>
+        <p:nvSpPr>
+          <p:cNvPr id="8" name="Rectangle 7"/>
+          <p:cNvSpPr/>
+          <p:nvPr/>
+        </p:nvSpPr>
+        <p:spPr>
+          <a:xfrm>
+            <a:off x="640080" y="1880006"/>
+            <a:ext cx="10911535" cy="784555"/>
+          </a:xfrm>
+          <a:prstGeom prst="rect">
+            <a:avLst/>
+          </a:prstGeom>
+          <a:solidFill>
+            <a:srgbClr val="F3F4F6"/>
+          </a:solidFill>
+          <a:ln>
+            <a:solidFill>
+              <a:srgbClr val="D9DEE3"/>
+            </a:solidFill>
+          </a:ln>
+        </p:spPr>
+        <p:style>
+          <a:lnRef idx="1">
+            <a:schemeClr val="accent1"/>
+          </a:lnRef>
+          <a:fillRef idx="3">
+            <a:schemeClr val="accent1"/>
+          </a:fillRef>
+          <a:effectRef idx="2">
+            <a:schemeClr val="accent1"/>
+          </a:effectRef>
+          <a:fontRef idx="minor">
+            <a:schemeClr val="lt1"/>
+          </a:fontRef>
+        </p:style>
+        <p:txBody>
+          <a:bodyPr rtlCol="0" anchor="t" wrap="none" lIns="137160" rIns="137160" tIns="91440" bIns="91440"/>
           <a:lstStyle/>
           <a:p>
             <a:pPr algn="l"/>
             <a:r>
-              <a:rPr sz="2000" b="1">
+              <a:rPr sz="1116">
                 <a:solidFill>
                   <a:srgbClr val="1F2D3A"/>
                 </a:solidFill>
-              </a:rPr>
-              <a:t>Answer:</a:t>
-            </a:r>
-            <a:r>
-              <a:rPr sz="2000" b="0">
+                <a:latin typeface="Consolas"/>
+              </a:rPr>
+              <a:t>EVP_DecryptUpdate(ctx, acik, &amp;n, sifreli, sifreli_n);</a:t>
+            </a:r>
+          </a:p>
+          <a:p>
+            <a:pPr algn="l"/>
+            <a:r>
+              <a:rPr sz="1116">
                 <a:solidFill>
                   <a:srgbClr val="1F2D3A"/>
                 </a:solidFill>
-              </a:rPr>
-              <a:t> The key sits in memory; the attacker can run the program and read it. Cryptography provides confidentiality, but in a white-box setting the key is not protected; RASP/obfuscation/white-box cryptography is needed.</a:t>
+                <a:latin typeface="Consolas"/>
+              </a:rPr>
+              <a:t>kullan(acik, n);</a:t>
+            </a:r>
+          </a:p>
+          <a:p>
+            <a:pPr algn="l"/>
+            <a:r>
+              <a:rPr sz="1116">
+                <a:solidFill>
+                  <a:srgbClr val="1F2D3A"/>
+                </a:solidFill>
+                <a:latin typeface="Consolas"/>
+              </a:rPr>
+              <a:t>EVP_DecryptFinal_ex(ctx, acik + n, &amp;m);</a:t>
+            </a:r>
+          </a:p>
+        </p:txBody>
+      </p:sp>
+      <p:sp>
+        <p:nvSpPr>
+          <p:cNvPr id="9" name="Rectangle 8"/>
+          <p:cNvSpPr/>
+          <p:nvPr/>
+        </p:nvSpPr>
+        <p:spPr>
+          <a:xfrm>
+            <a:off x="640080" y="2774289"/>
+            <a:ext cx="10911535" cy="444398"/>
+          </a:xfrm>
+          <a:prstGeom prst="rect">
+            <a:avLst/>
+          </a:prstGeom>
+          <a:solidFill>
+            <a:srgbClr val="F3F4F6"/>
+          </a:solidFill>
+          <a:ln>
+            <a:solidFill>
+              <a:srgbClr val="D9DEE3"/>
+            </a:solidFill>
+          </a:ln>
+        </p:spPr>
+        <p:style>
+          <a:lnRef idx="1">
+            <a:schemeClr val="accent1"/>
+          </a:lnRef>
+          <a:fillRef idx="3">
+            <a:schemeClr val="accent1"/>
+          </a:fillRef>
+          <a:effectRef idx="2">
+            <a:schemeClr val="accent1"/>
+          </a:effectRef>
+          <a:fontRef idx="minor">
+            <a:schemeClr val="lt1"/>
+          </a:fontRef>
+        </p:style>
+        <p:txBody>
+          <a:bodyPr rtlCol="0" anchor="t" wrap="none" lIns="137160" rIns="137160" tIns="91440" bIns="91440"/>
+          <a:lstStyle/>
+          <a:p>
+            <a:pPr algn="l"/>
+            <a:r>
+              <a:rPr sz="1116">
+                <a:solidFill>
+                  <a:srgbClr val="1F2D3A"/>
+                </a:solidFill>
+                <a:latin typeface="Consolas"/>
+              </a:rPr>
+              <a:t>try { pinDenetle(zincir); } catch (KeyStoreException e) { e.printStackTrace(); }</a:t>
             </a:r>
           </a:p>
         </p:txBody>
@@ -9525,7 +9006,7 @@
                   <a:srgbClr val="006D77"/>
                 </a:solidFill>
               </a:rPr>
-              <a:t>Question 2</a:t>
+              <a:t>Example: Scenarios</a:t>
             </a:r>
           </a:p>
         </p:txBody>
@@ -9539,7 +9020,7 @@
         <p:spPr>
           <a:xfrm>
             <a:off x="640080" y="1325880"/>
-            <a:ext cx="10911535" cy="439928"/>
+            <a:ext cx="10911535" cy="2346960"/>
           </a:xfrm>
           <a:prstGeom prst="rect">
             <a:avLst/>
@@ -9552,48 +9033,34 @@
           </a:bodyPr>
           <a:lstStyle/>
           <a:p>
-            <a:pPr algn="l"/>
+            <a:pPr>
+              <a:spcAft>
+                <a:spcPts val="300"/>
+              </a:spcAft>
+            </a:pPr>
             <a:r>
               <a:rPr sz="2000" b="1">
                 <a:solidFill>
+                  <a:srgbClr val="006D77"/>
+                </a:solidFill>
+              </a:rPr>
+              <a:t>1. </a:t>
+            </a:r>
+            <a:r>
+              <a:rPr sz="2000" b="0">
+                <a:solidFill>
                   <a:srgbClr val="1F2D3A"/>
                 </a:solidFill>
               </a:rPr>
-              <a:t>What happens if the same nonce is used twice in AES-GCM?</a:t>
-            </a:r>
-          </a:p>
-        </p:txBody>
-      </p:sp>
-      <p:sp>
-        <p:nvSpPr>
-          <p:cNvPr id="8" name="TextBox 7"/>
-          <p:cNvSpPr txBox="1"/>
-          <p:nvPr/>
-        </p:nvSpPr>
-        <p:spPr>
-          <a:xfrm>
-            <a:off x="640080" y="1875536"/>
-            <a:ext cx="10911535" cy="770128"/>
-          </a:xfrm>
-          <a:prstGeom prst="rect">
-            <a:avLst/>
-          </a:prstGeom>
-          <a:noFill/>
-        </p:spPr>
-        <p:txBody>
-          <a:bodyPr wrap="square" lIns="45720" rIns="45720">
-            <a:spAutoFit/>
-          </a:bodyPr>
-          <a:lstStyle/>
-          <a:p>
-            <a:pPr algn="l"/>
+              <a:t>The same </a:t>
+            </a:r>
             <a:r>
               <a:rPr sz="2000" b="1">
                 <a:solidFill>
                   <a:srgbClr val="1F2D3A"/>
                 </a:solidFill>
               </a:rPr>
-              <a:t>Answer:</a:t>
+              <a:t>embedded AES key</a:t>
             </a:r>
             <a:r>
               <a:rPr sz="2000" b="0">
@@ -9601,7 +9068,155 @@
                   <a:srgbClr val="1F2D3A"/>
                 </a:solidFill>
               </a:rPr>
-              <a:t> Confidentiality and integrity collapse; the keystream and data can leak. The nonce must always be unique.</a:t>
+              <a:t> on every user's device: risks and recommendation?</a:t>
+            </a:r>
+          </a:p>
+          <a:p>
+            <a:pPr>
+              <a:spcAft>
+                <a:spcPts val="300"/>
+              </a:spcAft>
+            </a:pPr>
+            <a:r>
+              <a:rPr sz="2000" b="1">
+                <a:solidFill>
+                  <a:srgbClr val="006D77"/>
+                </a:solidFill>
+              </a:rPr>
+              <a:t>2. </a:t>
+            </a:r>
+            <a:r>
+              <a:rPr sz="2000" b="0">
+                <a:solidFill>
+                  <a:srgbClr val="1F2D3A"/>
+                </a:solidFill>
+              </a:rPr>
+              <a:t>A shipped package is a </a:t>
+            </a:r>
+            <a:r>
+              <a:rPr sz="2000" b="1">
+                <a:solidFill>
+                  <a:srgbClr val="1F2D3A"/>
+                </a:solidFill>
+              </a:rPr>
+              <a:t>debug build</a:t>
+            </a:r>
+            <a:r>
+              <a:rPr sz="2000" b="0">
+                <a:solidFill>
+                  <a:srgbClr val="1F2D3A"/>
+                </a:solidFill>
+              </a:rPr>
+              <a:t>: which findings?</a:t>
+            </a:r>
+          </a:p>
+          <a:p>
+            <a:pPr>
+              <a:spcAft>
+                <a:spcPts val="300"/>
+              </a:spcAft>
+            </a:pPr>
+            <a:r>
+              <a:rPr sz="2000" b="1">
+                <a:solidFill>
+                  <a:srgbClr val="006D77"/>
+                </a:solidFill>
+              </a:rPr>
+              <a:t>3. </a:t>
+            </a:r>
+            <a:r>
+              <a:rPr sz="2000" b="0">
+                <a:solidFill>
+                  <a:srgbClr val="1F2D3A"/>
+                </a:solidFill>
+              </a:rPr>
+              <a:t>"I did not make this transaction": which STRIDE letter, which evidence?</a:t>
+            </a:r>
+          </a:p>
+          <a:p>
+            <a:pPr>
+              <a:spcAft>
+                <a:spcPts val="300"/>
+              </a:spcAft>
+            </a:pPr>
+            <a:r>
+              <a:rPr sz="2000" b="1">
+                <a:solidFill>
+                  <a:srgbClr val="006D77"/>
+                </a:solidFill>
+              </a:rPr>
+              <a:t>4. </a:t>
+            </a:r>
+            <a:r>
+              <a:rPr sz="2000" b="0">
+                <a:solidFill>
+                  <a:srgbClr val="1F2D3A"/>
+                </a:solidFill>
+              </a:rPr>
+              <a:t>A function that extracts an archive: which bugs do you guard against?</a:t>
+            </a:r>
+          </a:p>
+          <a:p>
+            <a:pPr>
+              <a:spcAft>
+                <a:spcPts val="300"/>
+              </a:spcAft>
+            </a:pPr>
+            <a:r>
+              <a:rPr sz="2000" b="1">
+                <a:solidFill>
+                  <a:srgbClr val="006D77"/>
+                </a:solidFill>
+              </a:rPr>
+              <a:t>5. </a:t>
+            </a:r>
+            <a:r>
+              <a:rPr sz="2000" b="0">
+                <a:solidFill>
+                  <a:srgbClr val="1F2D3A"/>
+                </a:solidFill>
+              </a:rPr>
+              <a:t>What was the real problem in Log4Shell, what would have prevented it?</a:t>
+            </a:r>
+          </a:p>
+          <a:p>
+            <a:pPr>
+              <a:spcAft>
+                <a:spcPts val="300"/>
+              </a:spcAft>
+            </a:pPr>
+            <a:r>
+              <a:rPr sz="2000" b="1">
+                <a:solidFill>
+                  <a:srgbClr val="006D77"/>
+                </a:solidFill>
+              </a:rPr>
+              <a:t>6. </a:t>
+            </a:r>
+            <a:r>
+              <a:rPr sz="2000" b="0">
+                <a:solidFill>
+                  <a:srgbClr val="1F2D3A"/>
+                </a:solidFill>
+              </a:rPr>
+              <a:t>Why shouldn't RASP checks be evaluated with a single </a:t>
+            </a:r>
+            <a:r>
+              <a:rPr sz="2000" b="0">
+                <a:solidFill>
+                  <a:srgbClr val="A1123F"/>
+                </a:solidFill>
+                <a:latin typeface="Consolas"/>
+              </a:rPr>
+              <a:t>if</a:t>
+            </a:r>
+            <a:r>
+              <a:rPr sz="2000" b="0">
+                <a:solidFill>
+                  <a:srgbClr val="1F2D3A"/>
+                </a:solidFill>
+              </a:rPr>
+              <a:t>?</a:t>
             </a:r>
           </a:p>
         </p:txBody>
@@ -9776,20 +9391,89 @@
                   <a:srgbClr val="006D77"/>
                 </a:solidFill>
               </a:rPr>
-              <a:t>Question 3</a:t>
-            </a:r>
-          </a:p>
-        </p:txBody>
-      </p:sp>
-      <p:sp>
-        <p:nvSpPr>
-          <p:cNvPr id="7" name="TextBox 6"/>
-          <p:cNvSpPr txBox="1"/>
+              <a:t>Final Word (Quiz-1 Prep)</a:t>
+            </a:r>
+          </a:p>
+        </p:txBody>
+      </p:sp>
+      <p:sp>
+        <p:nvSpPr>
+          <p:cNvPr id="7" name="Rectangle 6"/>
+          <p:cNvSpPr/>
           <p:nvPr/>
         </p:nvSpPr>
         <p:spPr>
           <a:xfrm>
             <a:off x="640080" y="1325880"/>
+            <a:ext cx="10911535" cy="934719"/>
+          </a:xfrm>
+          <a:prstGeom prst="rect">
+            <a:avLst/>
+          </a:prstGeom>
+          <a:solidFill>
+            <a:srgbClr val="EEF7F8"/>
+          </a:solidFill>
+          <a:ln>
+            <a:solidFill>
+              <a:srgbClr val="006D77"/>
+            </a:solidFill>
+          </a:ln>
+        </p:spPr>
+        <p:style>
+          <a:lnRef idx="1">
+            <a:schemeClr val="accent1"/>
+          </a:lnRef>
+          <a:fillRef idx="3">
+            <a:schemeClr val="accent1"/>
+          </a:fillRef>
+          <a:effectRef idx="2">
+            <a:schemeClr val="accent1"/>
+          </a:effectRef>
+          <a:fontRef idx="minor">
+            <a:schemeClr val="lt1"/>
+          </a:fontRef>
+        </p:style>
+        <p:txBody>
+          <a:bodyPr rtlCol="0" anchor="ctr" wrap="square" lIns="182880"/>
+          <a:lstStyle/>
+          <a:p>
+            <a:pPr algn="l"/>
+            <a:r>
+              <a:rPr sz="2000" b="0">
+                <a:solidFill>
+                  <a:srgbClr val="1F2D3A"/>
+                </a:solidFill>
+              </a:rPr>
+              <a:t>Not memorization — what's measured is the </a:t>
+            </a:r>
+            <a:r>
+              <a:rPr sz="2000" b="1">
+                <a:solidFill>
+                  <a:srgbClr val="1F2D3A"/>
+                </a:solidFill>
+              </a:rPr>
+              <a:t>why</a:t>
+            </a:r>
+            <a:r>
+              <a:rPr sz="2000" b="0">
+                <a:solidFill>
+                  <a:srgbClr val="1F2D3A"/>
+                </a:solidFill>
+              </a:rPr>
+              <a:t>: "why this mode?", "why this check?", "what doesn't it protect?"</a:t>
+            </a:r>
+          </a:p>
+        </p:txBody>
+      </p:sp>
+      <p:sp>
+        <p:nvSpPr>
+          <p:cNvPr id="8" name="TextBox 7"/>
+          <p:cNvSpPr txBox="1"/>
+          <p:nvPr/>
+        </p:nvSpPr>
+        <p:spPr>
+          <a:xfrm>
+            <a:off x="640080" y="2370328"/>
             <a:ext cx="10911535" cy="439928"/>
           </a:xfrm>
           <a:prstGeom prst="rect">
@@ -9805,54 +9489,12 @@
           <a:p>
             <a:pPr algn="l"/>
             <a:r>
-              <a:rPr sz="2000" b="1">
+              <a:rPr sz="2000" b="0">
                 <a:solidFill>
                   <a:srgbClr val="1F2D3A"/>
                 </a:solidFill>
               </a:rPr>
-              <a:t>What definitively prevents SQL injection?</a:t>
-            </a:r>
-          </a:p>
-        </p:txBody>
-      </p:sp>
-      <p:sp>
-        <p:nvSpPr>
-          <p:cNvPr id="8" name="TextBox 7"/>
-          <p:cNvSpPr txBox="1"/>
-          <p:nvPr/>
-        </p:nvSpPr>
-        <p:spPr>
-          <a:xfrm>
-            <a:off x="640080" y="1875536"/>
-            <a:ext cx="10911535" cy="770128"/>
-          </a:xfrm>
-          <a:prstGeom prst="rect">
-            <a:avLst/>
-          </a:prstGeom>
-          <a:noFill/>
-        </p:spPr>
-        <p:txBody>
-          <a:bodyPr wrap="square" lIns="45720" rIns="45720">
-            <a:spAutoFit/>
-          </a:bodyPr>
-          <a:lstStyle/>
-          <a:p>
-            <a:pPr algn="l"/>
-            <a:r>
-              <a:rPr sz="2000" b="1">
-                <a:solidFill>
-                  <a:srgbClr val="1F2D3A"/>
-                </a:solidFill>
-              </a:rPr>
-              <a:t>Answer:</a:t>
-            </a:r>
-            <a:r>
-              <a:rPr sz="2000" b="0">
-                <a:solidFill>
-                  <a:srgbClr val="1F2D3A"/>
-                </a:solidFill>
-              </a:rPr>
-              <a:t> A parameterised query (prepared statement); data is never interpreted as a command. No string concatenation.</a:t>
+              <a:t>Good luck.</a:t>
             </a:r>
           </a:p>
         </p:txBody>
@@ -10027,7 +9669,7 @@
                   <a:srgbClr val="006D77"/>
                 </a:solidFill>
               </a:rPr>
-              <a:t>Question 4</a:t>
+              <a:t>Next Week</a:t>
             </a:r>
           </a:p>
         </p:txBody>
@@ -10061,7 +9703,7 @@
                   <a:srgbClr val="1F2D3A"/>
                 </a:solidFill>
               </a:rPr>
-              <a:t>Which overflow can ASan not see?</a:t>
+              <a:t>Week 9 — Advanced Code Obfuscation and Diversification</a:t>
             </a:r>
           </a:p>
         </p:txBody>
@@ -10075,7 +9717,7 @@
         <p:spPr>
           <a:xfrm>
             <a:off x="640080" y="1875536"/>
-            <a:ext cx="10911535" cy="770128"/>
+            <a:ext cx="10911535" cy="1219200"/>
           </a:xfrm>
           <a:prstGeom prst="rect">
             <a:avLst/>
@@ -10088,14 +9730,41 @@
           </a:bodyPr>
           <a:lstStyle/>
           <a:p>
-            <a:pPr algn="l"/>
+            <a:pPr>
+              <a:spcAft>
+                <a:spcPts val="300"/>
+              </a:spcAft>
+            </a:pPr>
             <a:r>
               <a:rPr sz="2000" b="1">
                 <a:solidFill>
+                  <a:srgbClr val="006D77"/>
+                </a:solidFill>
+              </a:rPr>
+              <a:t>• </a:t>
+            </a:r>
+            <a:r>
+              <a:rPr sz="2000" b="0">
+                <a:solidFill>
                   <a:srgbClr val="1F2D3A"/>
                 </a:solidFill>
               </a:rPr>
-              <a:t>Answer:</a:t>
+              <a:t>Obfuscation taxonomy, opaque predicates, data encoding</a:t>
+            </a:r>
+          </a:p>
+          <a:p>
+            <a:pPr>
+              <a:spcAft>
+                <a:spcPts val="300"/>
+              </a:spcAft>
+            </a:pPr>
+            <a:r>
+              <a:rPr sz="2000" b="1">
+                <a:solidFill>
+                  <a:srgbClr val="006D77"/>
+                </a:solidFill>
+              </a:rPr>
+              <a:t>• </a:t>
             </a:r>
             <a:r>
               <a:rPr sz="2000" b="0">
@@ -10103,258 +9772,30 @@
                   <a:srgbClr val="1F2D3A"/>
                 </a:solidFill>
               </a:rPr>
-              <a:t> A field-to-field overflow within the same structure (there is no poisoned region in between).</a:t>
-            </a:r>
-          </a:p>
-        </p:txBody>
-      </p:sp>
-    </p:spTree>
-  </p:cSld>
-  <p:clrMapOvr>
-    <a:masterClrMapping/>
-  </p:clrMapOvr>
-</p:sld>
-</file>
-
-<file path=ppt/slides/slide29.xml><?xml version="1.0" encoding="utf-8"?>
-<p:sld xmlns:a="http://schemas.openxmlformats.org/drawingml/2006/main" xmlns:p="http://schemas.openxmlformats.org/presentationml/2006/main" xmlns:r="http://schemas.openxmlformats.org/officeDocument/2006/relationships">
-  <p:cSld>
-    <p:spTree>
-      <p:nvGrpSpPr>
-        <p:cNvPr id="1" name=""/>
-        <p:cNvGrpSpPr/>
-        <p:nvPr/>
-      </p:nvGrpSpPr>
-      <p:grpSpPr/>
-      <p:pic>
-        <p:nvPicPr>
-          <p:cNvPr id="2" name="Picture 1" descr="rteu_logo_kucuk.jpg"/>
-          <p:cNvPicPr>
-            <a:picLocks noChangeAspect="1"/>
-          </p:cNvPicPr>
-          <p:nvPr/>
-        </p:nvPicPr>
-        <p:blipFill>
-          <a:blip r:embed="rId2"/>
-          <a:stretch>
-            <a:fillRect/>
-          </a:stretch>
-        </p:blipFill>
-        <p:spPr>
-          <a:xfrm>
-            <a:off x="640080" y="164592"/>
-            <a:ext cx="242773" cy="329184"/>
-          </a:xfrm>
-          <a:prstGeom prst="rect">
-            <a:avLst/>
-          </a:prstGeom>
-        </p:spPr>
-      </p:pic>
-      <p:sp>
-        <p:nvSpPr>
-          <p:cNvPr id="3" name="TextBox 2"/>
-          <p:cNvSpPr txBox="1"/>
-          <p:nvPr/>
-        </p:nvSpPr>
-        <p:spPr>
-          <a:xfrm>
-            <a:off x="1051560" y="182880"/>
-            <a:ext cx="7315200" cy="320040"/>
-          </a:xfrm>
-          <a:prstGeom prst="rect">
-            <a:avLst/>
-          </a:prstGeom>
-          <a:noFill/>
-        </p:spPr>
-        <p:txBody>
-          <a:bodyPr wrap="square" lIns="45720" rIns="45720">
-            <a:spAutoFit/>
-          </a:bodyPr>
-          <a:lstStyle/>
-          <a:p>
-            <a:r>
-              <a:rPr sz="1100" b="0">
-                <a:solidFill>
-                  <a:srgbClr val="5B6770"/>
-                </a:solidFill>
-              </a:rPr>
-              <a:t>CEN429 Secure Programming · Week 8</a:t>
-            </a:r>
-          </a:p>
-        </p:txBody>
-      </p:sp>
-      <p:sp>
-        <p:nvSpPr>
-          <p:cNvPr id="4" name="TextBox 3"/>
-          <p:cNvSpPr txBox="1"/>
-          <p:nvPr/>
-        </p:nvSpPr>
-        <p:spPr>
-          <a:xfrm>
-            <a:off x="640080" y="6446520"/>
-            <a:ext cx="7315200" cy="274320"/>
-          </a:xfrm>
-          <a:prstGeom prst="rect">
-            <a:avLst/>
-          </a:prstGeom>
-          <a:noFill/>
-        </p:spPr>
-        <p:txBody>
-          <a:bodyPr wrap="square" lIns="45720" rIns="45720">
-            <a:spAutoFit/>
-          </a:bodyPr>
-          <a:lstStyle/>
-          <a:p>
-            <a:r>
-              <a:rPr sz="1000" b="0">
-                <a:solidFill>
-                  <a:srgbClr val="5B6770"/>
-                </a:solidFill>
-              </a:rPr>
-              <a:t>RTEU Computer Engineering · 2026-2027 Fall</a:t>
-            </a:r>
-          </a:p>
-        </p:txBody>
-      </p:sp>
-      <p:sp>
-        <p:nvSpPr>
-          <p:cNvPr id="5" name="TextBox 4"/>
-          <p:cNvSpPr txBox="1"/>
-          <p:nvPr/>
-        </p:nvSpPr>
-        <p:spPr>
-          <a:xfrm>
-            <a:off x="10637215" y="6446520"/>
-            <a:ext cx="914400" cy="274320"/>
-          </a:xfrm>
-          <a:prstGeom prst="rect">
-            <a:avLst/>
-          </a:prstGeom>
-          <a:noFill/>
-        </p:spPr>
-        <p:txBody>
-          <a:bodyPr wrap="square" lIns="45720" rIns="45720">
-            <a:spAutoFit/>
-          </a:bodyPr>
-          <a:lstStyle/>
-          <a:p>
-            <a:pPr algn="r"/>
-            <a:r>
-              <a:rPr sz="1000" b="0">
-                <a:solidFill>
-                  <a:srgbClr val="5B6770"/>
-                </a:solidFill>
-              </a:rPr>
-              <a:t>29</a:t>
-            </a:r>
-          </a:p>
-        </p:txBody>
-      </p:sp>
-      <p:sp>
-        <p:nvSpPr>
-          <p:cNvPr id="6" name="TextBox 5"/>
-          <p:cNvSpPr txBox="1"/>
-          <p:nvPr/>
-        </p:nvSpPr>
-        <p:spPr>
-          <a:xfrm>
-            <a:off x="640080" y="548640"/>
-            <a:ext cx="10911535" cy="731520"/>
-          </a:xfrm>
-          <a:prstGeom prst="rect">
-            <a:avLst/>
-          </a:prstGeom>
-          <a:noFill/>
-        </p:spPr>
-        <p:txBody>
-          <a:bodyPr wrap="square" lIns="45720" rIns="45720" anchor="ctr">
-            <a:spAutoFit/>
-          </a:bodyPr>
-          <a:lstStyle/>
-          <a:p>
-            <a:r>
-              <a:rPr sz="3000" b="1">
+              <a:t>Virtualisation and compiler-based obfuscation (concept)</a:t>
+            </a:r>
+          </a:p>
+          <a:p>
+            <a:pPr>
+              <a:spcAft>
+                <a:spcPts val="300"/>
+              </a:spcAft>
+            </a:pPr>
+            <a:r>
+              <a:rPr sz="2000" b="1">
                 <a:solidFill>
                   <a:srgbClr val="006D77"/>
                 </a:solidFill>
               </a:rPr>
-              <a:t>Question 5</a:t>
-            </a:r>
-          </a:p>
-        </p:txBody>
-      </p:sp>
-      <p:sp>
-        <p:nvSpPr>
-          <p:cNvPr id="7" name="TextBox 6"/>
-          <p:cNvSpPr txBox="1"/>
-          <p:nvPr/>
-        </p:nvSpPr>
-        <p:spPr>
-          <a:xfrm>
-            <a:off x="640080" y="1325880"/>
-            <a:ext cx="10911535" cy="439928"/>
-          </a:xfrm>
-          <a:prstGeom prst="rect">
-            <a:avLst/>
-          </a:prstGeom>
-          <a:noFill/>
-        </p:spPr>
-        <p:txBody>
-          <a:bodyPr wrap="square" lIns="45720" rIns="45720">
-            <a:spAutoFit/>
-          </a:bodyPr>
-          <a:lstStyle/>
-          <a:p>
-            <a:pPr algn="l"/>
-            <a:r>
-              <a:rPr sz="2000" b="1">
+              <a:t>• </a:t>
+            </a:r>
+            <a:r>
+              <a:rPr sz="2000" b="0">
                 <a:solidFill>
                   <a:srgbClr val="1F2D3A"/>
                 </a:solidFill>
               </a:rPr>
-              <a:t>What does a canary stop, and what does it not stop?</a:t>
-            </a:r>
-          </a:p>
-        </p:txBody>
-      </p:sp>
-      <p:sp>
-        <p:nvSpPr>
-          <p:cNvPr id="8" name="TextBox 7"/>
-          <p:cNvSpPr txBox="1"/>
-          <p:nvPr/>
-        </p:nvSpPr>
-        <p:spPr>
-          <a:xfrm>
-            <a:off x="640080" y="1875536"/>
-            <a:ext cx="10911535" cy="770128"/>
-          </a:xfrm>
-          <a:prstGeom prst="rect">
-            <a:avLst/>
-          </a:prstGeom>
-          <a:noFill/>
-        </p:spPr>
-        <p:txBody>
-          <a:bodyPr wrap="square" lIns="45720" rIns="45720">
-            <a:spAutoFit/>
-          </a:bodyPr>
-          <a:lstStyle/>
-          <a:p>
-            <a:pPr algn="l"/>
-            <a:r>
-              <a:rPr sz="2000" b="1">
-                <a:solidFill>
-                  <a:srgbClr val="1F2D3A"/>
-                </a:solidFill>
-              </a:rPr>
-              <a:t>Answer:</a:t>
-            </a:r>
-            <a:r>
-              <a:rPr sz="2000" b="0">
-                <a:solidFill>
-                  <a:srgbClr val="1F2D3A"/>
-                </a:solidFill>
-              </a:rPr>
-              <a:t> Stops: a stack overflow that reaches the return address. Does not stop: heap overflow, variables before the canary, a leaked canary.</a:t>
+              <a:t>Measuring obfuscation: potency, resilience, cost</a:t>
             </a:r>
           </a:p>
         </p:txBody>
@@ -10497,2605 +9938,6 @@
                 </a:solidFill>
               </a:rPr>
               <a:t>3</a:t>
-            </a:r>
-          </a:p>
-        </p:txBody>
-      </p:sp>
-      <p:sp>
-        <p:nvSpPr>
-          <p:cNvPr id="6" name="TextBox 5"/>
-          <p:cNvSpPr txBox="1"/>
-          <p:nvPr/>
-        </p:nvSpPr>
-        <p:spPr>
-          <a:xfrm>
-            <a:off x="640080" y="548640"/>
-            <a:ext cx="10911535" cy="731520"/>
-          </a:xfrm>
-          <a:prstGeom prst="rect">
-            <a:avLst/>
-          </a:prstGeom>
-          <a:noFill/>
-        </p:spPr>
-        <p:txBody>
-          <a:bodyPr wrap="square" lIns="45720" rIns="45720" anchor="ctr">
-            <a:spAutoFit/>
-          </a:bodyPr>
-          <a:lstStyle/>
-          <a:p>
-            <a:r>
-              <a:rPr sz="3000" b="1">
-                <a:solidFill>
-                  <a:srgbClr val="006D77"/>
-                </a:solidFill>
-              </a:rPr>
-              <a:t>Midterm Grade Calculation — Diagram</a:t>
-            </a:r>
-          </a:p>
-        </p:txBody>
-      </p:sp>
-      <p:pic>
-        <p:nvPicPr>
-          <p:cNvPr id="7" name="Picture 6" descr="h08-03-vize-hesabi.png"/>
-          <p:cNvPicPr>
-            <a:picLocks noChangeAspect="1"/>
-          </p:cNvPicPr>
-          <p:nvPr/>
-        </p:nvPicPr>
-        <p:blipFill>
-          <a:blip r:embed="rId3"/>
-          <a:stretch>
-            <a:fillRect/>
-          </a:stretch>
-        </p:blipFill>
-        <p:spPr>
-          <a:xfrm>
-            <a:off x="2046645" y="1325880"/>
-            <a:ext cx="8098404" cy="3206099"/>
-          </a:xfrm>
-          <a:prstGeom prst="rect">
-            <a:avLst/>
-          </a:prstGeom>
-        </p:spPr>
-      </p:pic>
-    </p:spTree>
-  </p:cSld>
-  <p:clrMapOvr>
-    <a:masterClrMapping/>
-  </p:clrMapOvr>
-</p:sld>
-</file>
-
-<file path=ppt/slides/slide30.xml><?xml version="1.0" encoding="utf-8"?>
-<p:sld xmlns:a="http://schemas.openxmlformats.org/drawingml/2006/main" xmlns:p="http://schemas.openxmlformats.org/presentationml/2006/main" xmlns:r="http://schemas.openxmlformats.org/officeDocument/2006/relationships">
-  <p:cSld>
-    <p:spTree>
-      <p:nvGrpSpPr>
-        <p:cNvPr id="1" name=""/>
-        <p:cNvGrpSpPr/>
-        <p:nvPr/>
-      </p:nvGrpSpPr>
-      <p:grpSpPr/>
-      <p:pic>
-        <p:nvPicPr>
-          <p:cNvPr id="2" name="Picture 1" descr="rteu_logo_kucuk.jpg"/>
-          <p:cNvPicPr>
-            <a:picLocks noChangeAspect="1"/>
-          </p:cNvPicPr>
-          <p:nvPr/>
-        </p:nvPicPr>
-        <p:blipFill>
-          <a:blip r:embed="rId2"/>
-          <a:stretch>
-            <a:fillRect/>
-          </a:stretch>
-        </p:blipFill>
-        <p:spPr>
-          <a:xfrm>
-            <a:off x="640080" y="164592"/>
-            <a:ext cx="242773" cy="329184"/>
-          </a:xfrm>
-          <a:prstGeom prst="rect">
-            <a:avLst/>
-          </a:prstGeom>
-        </p:spPr>
-      </p:pic>
-      <p:sp>
-        <p:nvSpPr>
-          <p:cNvPr id="3" name="TextBox 2"/>
-          <p:cNvSpPr txBox="1"/>
-          <p:nvPr/>
-        </p:nvSpPr>
-        <p:spPr>
-          <a:xfrm>
-            <a:off x="1051560" y="182880"/>
-            <a:ext cx="7315200" cy="320040"/>
-          </a:xfrm>
-          <a:prstGeom prst="rect">
-            <a:avLst/>
-          </a:prstGeom>
-          <a:noFill/>
-        </p:spPr>
-        <p:txBody>
-          <a:bodyPr wrap="square" lIns="45720" rIns="45720">
-            <a:spAutoFit/>
-          </a:bodyPr>
-          <a:lstStyle/>
-          <a:p>
-            <a:r>
-              <a:rPr sz="1100" b="0">
-                <a:solidFill>
-                  <a:srgbClr val="5B6770"/>
-                </a:solidFill>
-              </a:rPr>
-              <a:t>CEN429 Secure Programming · Week 8</a:t>
-            </a:r>
-          </a:p>
-        </p:txBody>
-      </p:sp>
-      <p:sp>
-        <p:nvSpPr>
-          <p:cNvPr id="4" name="TextBox 3"/>
-          <p:cNvSpPr txBox="1"/>
-          <p:nvPr/>
-        </p:nvSpPr>
-        <p:spPr>
-          <a:xfrm>
-            <a:off x="640080" y="6446520"/>
-            <a:ext cx="7315200" cy="274320"/>
-          </a:xfrm>
-          <a:prstGeom prst="rect">
-            <a:avLst/>
-          </a:prstGeom>
-          <a:noFill/>
-        </p:spPr>
-        <p:txBody>
-          <a:bodyPr wrap="square" lIns="45720" rIns="45720">
-            <a:spAutoFit/>
-          </a:bodyPr>
-          <a:lstStyle/>
-          <a:p>
-            <a:r>
-              <a:rPr sz="1000" b="0">
-                <a:solidFill>
-                  <a:srgbClr val="5B6770"/>
-                </a:solidFill>
-              </a:rPr>
-              <a:t>RTEU Computer Engineering · 2026-2027 Fall</a:t>
-            </a:r>
-          </a:p>
-        </p:txBody>
-      </p:sp>
-      <p:sp>
-        <p:nvSpPr>
-          <p:cNvPr id="5" name="TextBox 4"/>
-          <p:cNvSpPr txBox="1"/>
-          <p:nvPr/>
-        </p:nvSpPr>
-        <p:spPr>
-          <a:xfrm>
-            <a:off x="10637215" y="6446520"/>
-            <a:ext cx="914400" cy="274320"/>
-          </a:xfrm>
-          <a:prstGeom prst="rect">
-            <a:avLst/>
-          </a:prstGeom>
-          <a:noFill/>
-        </p:spPr>
-        <p:txBody>
-          <a:bodyPr wrap="square" lIns="45720" rIns="45720">
-            <a:spAutoFit/>
-          </a:bodyPr>
-          <a:lstStyle/>
-          <a:p>
-            <a:pPr algn="r"/>
-            <a:r>
-              <a:rPr sz="1000" b="0">
-                <a:solidFill>
-                  <a:srgbClr val="5B6770"/>
-                </a:solidFill>
-              </a:rPr>
-              <a:t>30</a:t>
-            </a:r>
-          </a:p>
-        </p:txBody>
-      </p:sp>
-      <p:sp>
-        <p:nvSpPr>
-          <p:cNvPr id="6" name="TextBox 5"/>
-          <p:cNvSpPr txBox="1"/>
-          <p:nvPr/>
-        </p:nvSpPr>
-        <p:spPr>
-          <a:xfrm>
-            <a:off x="640080" y="548640"/>
-            <a:ext cx="10911535" cy="731520"/>
-          </a:xfrm>
-          <a:prstGeom prst="rect">
-            <a:avLst/>
-          </a:prstGeom>
-          <a:noFill/>
-        </p:spPr>
-        <p:txBody>
-          <a:bodyPr wrap="square" lIns="45720" rIns="45720" anchor="ctr">
-            <a:spAutoFit/>
-          </a:bodyPr>
-          <a:lstStyle/>
-          <a:p>
-            <a:r>
-              <a:rPr sz="3000" b="1">
-                <a:solidFill>
-                  <a:srgbClr val="006D77"/>
-                </a:solidFill>
-              </a:rPr>
-              <a:t>Question 6</a:t>
-            </a:r>
-          </a:p>
-        </p:txBody>
-      </p:sp>
-      <p:sp>
-        <p:nvSpPr>
-          <p:cNvPr id="7" name="TextBox 6"/>
-          <p:cNvSpPr txBox="1"/>
-          <p:nvPr/>
-        </p:nvSpPr>
-        <p:spPr>
-          <a:xfrm>
-            <a:off x="640080" y="1325880"/>
-            <a:ext cx="10911535" cy="439928"/>
-          </a:xfrm>
-          <a:prstGeom prst="rect">
-            <a:avLst/>
-          </a:prstGeom>
-          <a:noFill/>
-        </p:spPr>
-        <p:txBody>
-          <a:bodyPr wrap="square" lIns="45720" rIns="45720">
-            <a:spAutoFit/>
-          </a:bodyPr>
-          <a:lstStyle/>
-          <a:p>
-            <a:pPr algn="l"/>
-            <a:r>
-              <a:rPr sz="2000" b="1">
-                <a:solidFill>
-                  <a:srgbClr val="1F2D3A"/>
-                </a:solidFill>
-              </a:rPr>
-              <a:t>Why is RASP self-hashing not enough on its own?</a:t>
-            </a:r>
-          </a:p>
-        </p:txBody>
-      </p:sp>
-      <p:sp>
-        <p:nvSpPr>
-          <p:cNvPr id="8" name="TextBox 7"/>
-          <p:cNvSpPr txBox="1"/>
-          <p:nvPr/>
-        </p:nvSpPr>
-        <p:spPr>
-          <a:xfrm>
-            <a:off x="640080" y="1875536"/>
-            <a:ext cx="10911535" cy="770128"/>
-          </a:xfrm>
-          <a:prstGeom prst="rect">
-            <a:avLst/>
-          </a:prstGeom>
-          <a:noFill/>
-        </p:spPr>
-        <p:txBody>
-          <a:bodyPr wrap="square" lIns="45720" rIns="45720">
-            <a:spAutoFit/>
-          </a:bodyPr>
-          <a:lstStyle/>
-          <a:p>
-            <a:pPr algn="l"/>
-            <a:r>
-              <a:rPr sz="2000" b="1">
-                <a:solidFill>
-                  <a:srgbClr val="1F2D3A"/>
-                </a:solidFill>
-              </a:rPr>
-              <a:t>Answer:</a:t>
-            </a:r>
-            <a:r>
-              <a:rPr sz="2000" b="0">
-                <a:solidFill>
-                  <a:srgbClr val="1F2D3A"/>
-                </a:solidFill>
-              </a:rPr>
-              <a:t> The attacker can find the digest function and bypass it. Obfuscation + cross-checking + overlapping checks are needed.</a:t>
-            </a:r>
-          </a:p>
-        </p:txBody>
-      </p:sp>
-    </p:spTree>
-  </p:cSld>
-  <p:clrMapOvr>
-    <a:masterClrMapping/>
-  </p:clrMapOvr>
-</p:sld>
-</file>
-
-<file path=ppt/slides/slide31.xml><?xml version="1.0" encoding="utf-8"?>
-<p:sld xmlns:a="http://schemas.openxmlformats.org/drawingml/2006/main" xmlns:p="http://schemas.openxmlformats.org/presentationml/2006/main" xmlns:r="http://schemas.openxmlformats.org/officeDocument/2006/relationships">
-  <p:cSld>
-    <p:spTree>
-      <p:nvGrpSpPr>
-        <p:cNvPr id="1" name=""/>
-        <p:cNvGrpSpPr/>
-        <p:nvPr/>
-      </p:nvGrpSpPr>
-      <p:grpSpPr/>
-      <p:pic>
-        <p:nvPicPr>
-          <p:cNvPr id="2" name="Picture 1" descr="rteu_logo_kucuk.jpg"/>
-          <p:cNvPicPr>
-            <a:picLocks noChangeAspect="1"/>
-          </p:cNvPicPr>
-          <p:nvPr/>
-        </p:nvPicPr>
-        <p:blipFill>
-          <a:blip r:embed="rId2"/>
-          <a:stretch>
-            <a:fillRect/>
-          </a:stretch>
-        </p:blipFill>
-        <p:spPr>
-          <a:xfrm>
-            <a:off x="640080" y="164592"/>
-            <a:ext cx="242773" cy="329184"/>
-          </a:xfrm>
-          <a:prstGeom prst="rect">
-            <a:avLst/>
-          </a:prstGeom>
-        </p:spPr>
-      </p:pic>
-      <p:sp>
-        <p:nvSpPr>
-          <p:cNvPr id="3" name="TextBox 2"/>
-          <p:cNvSpPr txBox="1"/>
-          <p:nvPr/>
-        </p:nvSpPr>
-        <p:spPr>
-          <a:xfrm>
-            <a:off x="1051560" y="182880"/>
-            <a:ext cx="7315200" cy="320040"/>
-          </a:xfrm>
-          <a:prstGeom prst="rect">
-            <a:avLst/>
-          </a:prstGeom>
-          <a:noFill/>
-        </p:spPr>
-        <p:txBody>
-          <a:bodyPr wrap="square" lIns="45720" rIns="45720">
-            <a:spAutoFit/>
-          </a:bodyPr>
-          <a:lstStyle/>
-          <a:p>
-            <a:r>
-              <a:rPr sz="1100" b="0">
-                <a:solidFill>
-                  <a:srgbClr val="5B6770"/>
-                </a:solidFill>
-              </a:rPr>
-              <a:t>CEN429 Secure Programming · Week 8</a:t>
-            </a:r>
-          </a:p>
-        </p:txBody>
-      </p:sp>
-      <p:sp>
-        <p:nvSpPr>
-          <p:cNvPr id="4" name="TextBox 3"/>
-          <p:cNvSpPr txBox="1"/>
-          <p:nvPr/>
-        </p:nvSpPr>
-        <p:spPr>
-          <a:xfrm>
-            <a:off x="640080" y="6446520"/>
-            <a:ext cx="7315200" cy="274320"/>
-          </a:xfrm>
-          <a:prstGeom prst="rect">
-            <a:avLst/>
-          </a:prstGeom>
-          <a:noFill/>
-        </p:spPr>
-        <p:txBody>
-          <a:bodyPr wrap="square" lIns="45720" rIns="45720">
-            <a:spAutoFit/>
-          </a:bodyPr>
-          <a:lstStyle/>
-          <a:p>
-            <a:r>
-              <a:rPr sz="1000" b="0">
-                <a:solidFill>
-                  <a:srgbClr val="5B6770"/>
-                </a:solidFill>
-              </a:rPr>
-              <a:t>RTEU Computer Engineering · 2026-2027 Fall</a:t>
-            </a:r>
-          </a:p>
-        </p:txBody>
-      </p:sp>
-      <p:sp>
-        <p:nvSpPr>
-          <p:cNvPr id="5" name="TextBox 4"/>
-          <p:cNvSpPr txBox="1"/>
-          <p:nvPr/>
-        </p:nvSpPr>
-        <p:spPr>
-          <a:xfrm>
-            <a:off x="10637215" y="6446520"/>
-            <a:ext cx="914400" cy="274320"/>
-          </a:xfrm>
-          <a:prstGeom prst="rect">
-            <a:avLst/>
-          </a:prstGeom>
-          <a:noFill/>
-        </p:spPr>
-        <p:txBody>
-          <a:bodyPr wrap="square" lIns="45720" rIns="45720">
-            <a:spAutoFit/>
-          </a:bodyPr>
-          <a:lstStyle/>
-          <a:p>
-            <a:pPr algn="r"/>
-            <a:r>
-              <a:rPr sz="1000" b="0">
-                <a:solidFill>
-                  <a:srgbClr val="5B6770"/>
-                </a:solidFill>
-              </a:rPr>
-              <a:t>31</a:t>
-            </a:r>
-          </a:p>
-        </p:txBody>
-      </p:sp>
-      <p:sp>
-        <p:nvSpPr>
-          <p:cNvPr id="6" name="TextBox 5"/>
-          <p:cNvSpPr txBox="1"/>
-          <p:nvPr/>
-        </p:nvSpPr>
-        <p:spPr>
-          <a:xfrm>
-            <a:off x="640080" y="548640"/>
-            <a:ext cx="10911535" cy="731520"/>
-          </a:xfrm>
-          <a:prstGeom prst="rect">
-            <a:avLst/>
-          </a:prstGeom>
-          <a:noFill/>
-        </p:spPr>
-        <p:txBody>
-          <a:bodyPr wrap="square" lIns="45720" rIns="45720" anchor="ctr">
-            <a:spAutoFit/>
-          </a:bodyPr>
-          <a:lstStyle/>
-          <a:p>
-            <a:r>
-              <a:rPr sz="3000" b="1">
-                <a:solidFill>
-                  <a:srgbClr val="006D77"/>
-                </a:solidFill>
-              </a:rPr>
-              <a:t>Question 7</a:t>
-            </a:r>
-          </a:p>
-        </p:txBody>
-      </p:sp>
-      <p:sp>
-        <p:nvSpPr>
-          <p:cNvPr id="7" name="TextBox 6"/>
-          <p:cNvSpPr txBox="1"/>
-          <p:nvPr/>
-        </p:nvSpPr>
-        <p:spPr>
-          <a:xfrm>
-            <a:off x="640080" y="1325880"/>
-            <a:ext cx="10911535" cy="439928"/>
-          </a:xfrm>
-          <a:prstGeom prst="rect">
-            <a:avLst/>
-          </a:prstGeom>
-          <a:noFill/>
-        </p:spPr>
-        <p:txBody>
-          <a:bodyPr wrap="square" lIns="45720" rIns="45720">
-            <a:spAutoFit/>
-          </a:bodyPr>
-          <a:lstStyle/>
-          <a:p>
-            <a:pPr algn="l"/>
-            <a:r>
-              <a:rPr sz="2000" b="1">
-                <a:solidFill>
-                  <a:srgbClr val="1F2D3A"/>
-                </a:solidFill>
-              </a:rPr>
-              <a:t>Why a KDF and a salt when deriving a key from a password?</a:t>
-            </a:r>
-          </a:p>
-        </p:txBody>
-      </p:sp>
-      <p:sp>
-        <p:nvSpPr>
-          <p:cNvPr id="8" name="TextBox 7"/>
-          <p:cNvSpPr txBox="1"/>
-          <p:nvPr/>
-        </p:nvSpPr>
-        <p:spPr>
-          <a:xfrm>
-            <a:off x="640080" y="1875536"/>
-            <a:ext cx="10911535" cy="770128"/>
-          </a:xfrm>
-          <a:prstGeom prst="rect">
-            <a:avLst/>
-          </a:prstGeom>
-          <a:noFill/>
-        </p:spPr>
-        <p:txBody>
-          <a:bodyPr wrap="square" lIns="45720" rIns="45720">
-            <a:spAutoFit/>
-          </a:bodyPr>
-          <a:lstStyle/>
-          <a:p>
-            <a:pPr algn="l"/>
-            <a:r>
-              <a:rPr sz="2000" b="1">
-                <a:solidFill>
-                  <a:srgbClr val="1F2D3A"/>
-                </a:solidFill>
-              </a:rPr>
-              <a:t>Answer:</a:t>
-            </a:r>
-            <a:r>
-              <a:rPr sz="2000" b="0">
-                <a:solidFill>
-                  <a:srgbClr val="1F2D3A"/>
-                </a:solidFill>
-              </a:rPr>
-              <a:t> A password has low entropy; the KDF slows down guessing, and the salt stops identical passwords from producing the same key (rainbow table).</a:t>
-            </a:r>
-          </a:p>
-        </p:txBody>
-      </p:sp>
-    </p:spTree>
-  </p:cSld>
-  <p:clrMapOvr>
-    <a:masterClrMapping/>
-  </p:clrMapOvr>
-</p:sld>
-</file>
-
-<file path=ppt/slides/slide32.xml><?xml version="1.0" encoding="utf-8"?>
-<p:sld xmlns:a="http://schemas.openxmlformats.org/drawingml/2006/main" xmlns:p="http://schemas.openxmlformats.org/presentationml/2006/main" xmlns:r="http://schemas.openxmlformats.org/officeDocument/2006/relationships">
-  <p:cSld>
-    <p:spTree>
-      <p:nvGrpSpPr>
-        <p:cNvPr id="1" name=""/>
-        <p:cNvGrpSpPr/>
-        <p:nvPr/>
-      </p:nvGrpSpPr>
-      <p:grpSpPr/>
-      <p:pic>
-        <p:nvPicPr>
-          <p:cNvPr id="2" name="Picture 1" descr="rteu_logo_kucuk.jpg"/>
-          <p:cNvPicPr>
-            <a:picLocks noChangeAspect="1"/>
-          </p:cNvPicPr>
-          <p:nvPr/>
-        </p:nvPicPr>
-        <p:blipFill>
-          <a:blip r:embed="rId2"/>
-          <a:stretch>
-            <a:fillRect/>
-          </a:stretch>
-        </p:blipFill>
-        <p:spPr>
-          <a:xfrm>
-            <a:off x="640080" y="164592"/>
-            <a:ext cx="242773" cy="329184"/>
-          </a:xfrm>
-          <a:prstGeom prst="rect">
-            <a:avLst/>
-          </a:prstGeom>
-        </p:spPr>
-      </p:pic>
-      <p:sp>
-        <p:nvSpPr>
-          <p:cNvPr id="3" name="TextBox 2"/>
-          <p:cNvSpPr txBox="1"/>
-          <p:nvPr/>
-        </p:nvSpPr>
-        <p:spPr>
-          <a:xfrm>
-            <a:off x="1051560" y="182880"/>
-            <a:ext cx="7315200" cy="320040"/>
-          </a:xfrm>
-          <a:prstGeom prst="rect">
-            <a:avLst/>
-          </a:prstGeom>
-          <a:noFill/>
-        </p:spPr>
-        <p:txBody>
-          <a:bodyPr wrap="square" lIns="45720" rIns="45720">
-            <a:spAutoFit/>
-          </a:bodyPr>
-          <a:lstStyle/>
-          <a:p>
-            <a:r>
-              <a:rPr sz="1100" b="0">
-                <a:solidFill>
-                  <a:srgbClr val="5B6770"/>
-                </a:solidFill>
-              </a:rPr>
-              <a:t>CEN429 Secure Programming · Week 8</a:t>
-            </a:r>
-          </a:p>
-        </p:txBody>
-      </p:sp>
-      <p:sp>
-        <p:nvSpPr>
-          <p:cNvPr id="4" name="TextBox 3"/>
-          <p:cNvSpPr txBox="1"/>
-          <p:nvPr/>
-        </p:nvSpPr>
-        <p:spPr>
-          <a:xfrm>
-            <a:off x="640080" y="6446520"/>
-            <a:ext cx="7315200" cy="274320"/>
-          </a:xfrm>
-          <a:prstGeom prst="rect">
-            <a:avLst/>
-          </a:prstGeom>
-          <a:noFill/>
-        </p:spPr>
-        <p:txBody>
-          <a:bodyPr wrap="square" lIns="45720" rIns="45720">
-            <a:spAutoFit/>
-          </a:bodyPr>
-          <a:lstStyle/>
-          <a:p>
-            <a:r>
-              <a:rPr sz="1000" b="0">
-                <a:solidFill>
-                  <a:srgbClr val="5B6770"/>
-                </a:solidFill>
-              </a:rPr>
-              <a:t>RTEU Computer Engineering · 2026-2027 Fall</a:t>
-            </a:r>
-          </a:p>
-        </p:txBody>
-      </p:sp>
-      <p:sp>
-        <p:nvSpPr>
-          <p:cNvPr id="5" name="TextBox 4"/>
-          <p:cNvSpPr txBox="1"/>
-          <p:nvPr/>
-        </p:nvSpPr>
-        <p:spPr>
-          <a:xfrm>
-            <a:off x="10637215" y="6446520"/>
-            <a:ext cx="914400" cy="274320"/>
-          </a:xfrm>
-          <a:prstGeom prst="rect">
-            <a:avLst/>
-          </a:prstGeom>
-          <a:noFill/>
-        </p:spPr>
-        <p:txBody>
-          <a:bodyPr wrap="square" lIns="45720" rIns="45720">
-            <a:spAutoFit/>
-          </a:bodyPr>
-          <a:lstStyle/>
-          <a:p>
-            <a:pPr algn="r"/>
-            <a:r>
-              <a:rPr sz="1000" b="0">
-                <a:solidFill>
-                  <a:srgbClr val="5B6770"/>
-                </a:solidFill>
-              </a:rPr>
-              <a:t>32</a:t>
-            </a:r>
-          </a:p>
-        </p:txBody>
-      </p:sp>
-      <p:sp>
-        <p:nvSpPr>
-          <p:cNvPr id="6" name="TextBox 5"/>
-          <p:cNvSpPr txBox="1"/>
-          <p:nvPr/>
-        </p:nvSpPr>
-        <p:spPr>
-          <a:xfrm>
-            <a:off x="640080" y="548640"/>
-            <a:ext cx="10911535" cy="731520"/>
-          </a:xfrm>
-          <a:prstGeom prst="rect">
-            <a:avLst/>
-          </a:prstGeom>
-          <a:noFill/>
-        </p:spPr>
-        <p:txBody>
-          <a:bodyPr wrap="square" lIns="45720" rIns="45720" anchor="ctr">
-            <a:spAutoFit/>
-          </a:bodyPr>
-          <a:lstStyle/>
-          <a:p>
-            <a:r>
-              <a:rPr sz="3000" b="1">
-                <a:solidFill>
-                  <a:srgbClr val="006D77"/>
-                </a:solidFill>
-              </a:rPr>
-              <a:t>Question 8</a:t>
-            </a:r>
-          </a:p>
-        </p:txBody>
-      </p:sp>
-      <p:sp>
-        <p:nvSpPr>
-          <p:cNvPr id="7" name="TextBox 6"/>
-          <p:cNvSpPr txBox="1"/>
-          <p:nvPr/>
-        </p:nvSpPr>
-        <p:spPr>
-          <a:xfrm>
-            <a:off x="640080" y="1325880"/>
-            <a:ext cx="10911535" cy="439928"/>
-          </a:xfrm>
-          <a:prstGeom prst="rect">
-            <a:avLst/>
-          </a:prstGeom>
-          <a:noFill/>
-        </p:spPr>
-        <p:txBody>
-          <a:bodyPr wrap="square" lIns="45720" rIns="45720">
-            <a:spAutoFit/>
-          </a:bodyPr>
-          <a:lstStyle/>
-          <a:p>
-            <a:pPr algn="l"/>
-            <a:r>
-              <a:rPr sz="2000" b="1">
-                <a:solidFill>
-                  <a:srgbClr val="1F2D3A"/>
-                </a:solidFill>
-              </a:rPr>
-              <a:t>An example of the least-privilege principle?</a:t>
-            </a:r>
-          </a:p>
-        </p:txBody>
-      </p:sp>
-      <p:sp>
-        <p:nvSpPr>
-          <p:cNvPr id="8" name="TextBox 7"/>
-          <p:cNvSpPr txBox="1"/>
-          <p:nvPr/>
-        </p:nvSpPr>
-        <p:spPr>
-          <a:xfrm>
-            <a:off x="640080" y="1875536"/>
-            <a:ext cx="10911535" cy="770128"/>
-          </a:xfrm>
-          <a:prstGeom prst="rect">
-            <a:avLst/>
-          </a:prstGeom>
-          <a:noFill/>
-        </p:spPr>
-        <p:txBody>
-          <a:bodyPr wrap="square" lIns="45720" rIns="45720">
-            <a:spAutoFit/>
-          </a:bodyPr>
-          <a:lstStyle/>
-          <a:p>
-            <a:pPr algn="l"/>
-            <a:r>
-              <a:rPr sz="2000" b="1">
-                <a:solidFill>
-                  <a:srgbClr val="1F2D3A"/>
-                </a:solidFill>
-              </a:rPr>
-              <a:t>Answer:</a:t>
-            </a:r>
-            <a:r>
-              <a:rPr sz="2000" b="0">
-                <a:solidFill>
-                  <a:srgbClr val="1F2D3A"/>
-                </a:solidFill>
-              </a:rPr>
-              <a:t> The application's DB user should only be able to </a:t>
-            </a:r>
-            <a:r>
-              <a:rPr sz="2000" b="0">
-                <a:solidFill>
-                  <a:srgbClr val="A1123F"/>
-                </a:solidFill>
-                <a:latin typeface="Consolas"/>
-              </a:rPr>
-              <a:t>SELECT</a:t>
-            </a:r>
-            <a:r>
-              <a:rPr sz="2000" b="0">
-                <a:solidFill>
-                  <a:srgbClr val="1F2D3A"/>
-                </a:solidFill>
-              </a:rPr>
-              <a:t>; it should not have </a:t>
-            </a:r>
-            <a:r>
-              <a:rPr sz="2000" b="0">
-                <a:solidFill>
-                  <a:srgbClr val="A1123F"/>
-                </a:solidFill>
-                <a:latin typeface="Consolas"/>
-              </a:rPr>
-              <a:t>DROP</a:t>
-            </a:r>
-            <a:r>
-              <a:rPr sz="2000" b="0">
-                <a:solidFill>
-                  <a:srgbClr val="1F2D3A"/>
-                </a:solidFill>
-              </a:rPr>
-              <a:t> privilege. Excess privilege = greater damage.</a:t>
-            </a:r>
-          </a:p>
-        </p:txBody>
-      </p:sp>
-    </p:spTree>
-  </p:cSld>
-  <p:clrMapOvr>
-    <a:masterClrMapping/>
-  </p:clrMapOvr>
-</p:sld>
-</file>
-
-<file path=ppt/slides/slide33.xml><?xml version="1.0" encoding="utf-8"?>
-<p:sld xmlns:a="http://schemas.openxmlformats.org/drawingml/2006/main" xmlns:p="http://schemas.openxmlformats.org/presentationml/2006/main" xmlns:r="http://schemas.openxmlformats.org/officeDocument/2006/relationships">
-  <p:cSld>
-    <p:spTree>
-      <p:nvGrpSpPr>
-        <p:cNvPr id="1" name=""/>
-        <p:cNvGrpSpPr/>
-        <p:nvPr/>
-      </p:nvGrpSpPr>
-      <p:grpSpPr/>
-      <p:pic>
-        <p:nvPicPr>
-          <p:cNvPr id="2" name="Picture 1" descr="rteu_logo_kucuk.jpg"/>
-          <p:cNvPicPr>
-            <a:picLocks noChangeAspect="1"/>
-          </p:cNvPicPr>
-          <p:nvPr/>
-        </p:nvPicPr>
-        <p:blipFill>
-          <a:blip r:embed="rId2"/>
-          <a:stretch>
-            <a:fillRect/>
-          </a:stretch>
-        </p:blipFill>
-        <p:spPr>
-          <a:xfrm>
-            <a:off x="640080" y="164592"/>
-            <a:ext cx="242773" cy="329184"/>
-          </a:xfrm>
-          <a:prstGeom prst="rect">
-            <a:avLst/>
-          </a:prstGeom>
-        </p:spPr>
-      </p:pic>
-      <p:sp>
-        <p:nvSpPr>
-          <p:cNvPr id="3" name="TextBox 2"/>
-          <p:cNvSpPr txBox="1"/>
-          <p:nvPr/>
-        </p:nvSpPr>
-        <p:spPr>
-          <a:xfrm>
-            <a:off x="1051560" y="182880"/>
-            <a:ext cx="7315200" cy="320040"/>
-          </a:xfrm>
-          <a:prstGeom prst="rect">
-            <a:avLst/>
-          </a:prstGeom>
-          <a:noFill/>
-        </p:spPr>
-        <p:txBody>
-          <a:bodyPr wrap="square" lIns="45720" rIns="45720">
-            <a:spAutoFit/>
-          </a:bodyPr>
-          <a:lstStyle/>
-          <a:p>
-            <a:r>
-              <a:rPr sz="1100" b="0">
-                <a:solidFill>
-                  <a:srgbClr val="5B6770"/>
-                </a:solidFill>
-              </a:rPr>
-              <a:t>CEN429 Secure Programming · Week 8</a:t>
-            </a:r>
-          </a:p>
-        </p:txBody>
-      </p:sp>
-      <p:sp>
-        <p:nvSpPr>
-          <p:cNvPr id="4" name="TextBox 3"/>
-          <p:cNvSpPr txBox="1"/>
-          <p:nvPr/>
-        </p:nvSpPr>
-        <p:spPr>
-          <a:xfrm>
-            <a:off x="640080" y="6446520"/>
-            <a:ext cx="7315200" cy="274320"/>
-          </a:xfrm>
-          <a:prstGeom prst="rect">
-            <a:avLst/>
-          </a:prstGeom>
-          <a:noFill/>
-        </p:spPr>
-        <p:txBody>
-          <a:bodyPr wrap="square" lIns="45720" rIns="45720">
-            <a:spAutoFit/>
-          </a:bodyPr>
-          <a:lstStyle/>
-          <a:p>
-            <a:r>
-              <a:rPr sz="1000" b="0">
-                <a:solidFill>
-                  <a:srgbClr val="5B6770"/>
-                </a:solidFill>
-              </a:rPr>
-              <a:t>RTEU Computer Engineering · 2026-2027 Fall</a:t>
-            </a:r>
-          </a:p>
-        </p:txBody>
-      </p:sp>
-      <p:sp>
-        <p:nvSpPr>
-          <p:cNvPr id="5" name="TextBox 4"/>
-          <p:cNvSpPr txBox="1"/>
-          <p:nvPr/>
-        </p:nvSpPr>
-        <p:spPr>
-          <a:xfrm>
-            <a:off x="10637215" y="6446520"/>
-            <a:ext cx="914400" cy="274320"/>
-          </a:xfrm>
-          <a:prstGeom prst="rect">
-            <a:avLst/>
-          </a:prstGeom>
-          <a:noFill/>
-        </p:spPr>
-        <p:txBody>
-          <a:bodyPr wrap="square" lIns="45720" rIns="45720">
-            <a:spAutoFit/>
-          </a:bodyPr>
-          <a:lstStyle/>
-          <a:p>
-            <a:pPr algn="r"/>
-            <a:r>
-              <a:rPr sz="1000" b="0">
-                <a:solidFill>
-                  <a:srgbClr val="5B6770"/>
-                </a:solidFill>
-              </a:rPr>
-              <a:t>33</a:t>
-            </a:r>
-          </a:p>
-        </p:txBody>
-      </p:sp>
-      <p:sp>
-        <p:nvSpPr>
-          <p:cNvPr id="6" name="TextBox 5"/>
-          <p:cNvSpPr txBox="1"/>
-          <p:nvPr/>
-        </p:nvSpPr>
-        <p:spPr>
-          <a:xfrm>
-            <a:off x="640080" y="548640"/>
-            <a:ext cx="10911535" cy="731520"/>
-          </a:xfrm>
-          <a:prstGeom prst="rect">
-            <a:avLst/>
-          </a:prstGeom>
-          <a:noFill/>
-        </p:spPr>
-        <p:txBody>
-          <a:bodyPr wrap="square" lIns="45720" rIns="45720" anchor="ctr">
-            <a:spAutoFit/>
-          </a:bodyPr>
-          <a:lstStyle/>
-          <a:p>
-            <a:r>
-              <a:rPr sz="3000" b="1">
-                <a:solidFill>
-                  <a:srgbClr val="006D77"/>
-                </a:solidFill>
-              </a:rPr>
-              <a:t>Question 9</a:t>
-            </a:r>
-          </a:p>
-        </p:txBody>
-      </p:sp>
-      <p:sp>
-        <p:nvSpPr>
-          <p:cNvPr id="7" name="TextBox 6"/>
-          <p:cNvSpPr txBox="1"/>
-          <p:nvPr/>
-        </p:nvSpPr>
-        <p:spPr>
-          <a:xfrm>
-            <a:off x="640080" y="1325880"/>
-            <a:ext cx="10911535" cy="439928"/>
-          </a:xfrm>
-          <a:prstGeom prst="rect">
-            <a:avLst/>
-          </a:prstGeom>
-          <a:noFill/>
-        </p:spPr>
-        <p:txBody>
-          <a:bodyPr wrap="square" lIns="45720" rIns="45720">
-            <a:spAutoFit/>
-          </a:bodyPr>
-          <a:lstStyle/>
-          <a:p>
-            <a:pPr algn="l"/>
-            <a:r>
-              <a:rPr sz="2000" b="1">
-                <a:solidFill>
-                  <a:srgbClr val="1F2D3A"/>
-                </a:solidFill>
-              </a:rPr>
-              <a:t>What is the "E" in STRIDE, and one control for it?</a:t>
-            </a:r>
-          </a:p>
-        </p:txBody>
-      </p:sp>
-      <p:sp>
-        <p:nvSpPr>
-          <p:cNvPr id="8" name="TextBox 7"/>
-          <p:cNvSpPr txBox="1"/>
-          <p:nvPr/>
-        </p:nvSpPr>
-        <p:spPr>
-          <a:xfrm>
-            <a:off x="640080" y="1875536"/>
-            <a:ext cx="10911535" cy="770128"/>
-          </a:xfrm>
-          <a:prstGeom prst="rect">
-            <a:avLst/>
-          </a:prstGeom>
-          <a:noFill/>
-        </p:spPr>
-        <p:txBody>
-          <a:bodyPr wrap="square" lIns="45720" rIns="45720">
-            <a:spAutoFit/>
-          </a:bodyPr>
-          <a:lstStyle/>
-          <a:p>
-            <a:pPr algn="l"/>
-            <a:r>
-              <a:rPr sz="2000" b="1">
-                <a:solidFill>
-                  <a:srgbClr val="1F2D3A"/>
-                </a:solidFill>
-              </a:rPr>
-              <a:t>Answer:</a:t>
-            </a:r>
-            <a:r>
-              <a:rPr sz="2000" b="0">
-                <a:solidFill>
-                  <a:srgbClr val="1F2D3A"/>
-                </a:solidFill>
-              </a:rPr>
-              <a:t> Elevation of privilege. Control: least privilege, authorization checks, secure defaults.</a:t>
-            </a:r>
-          </a:p>
-        </p:txBody>
-      </p:sp>
-    </p:spTree>
-  </p:cSld>
-  <p:clrMapOvr>
-    <a:masterClrMapping/>
-  </p:clrMapOvr>
-</p:sld>
-</file>
-
-<file path=ppt/slides/slide34.xml><?xml version="1.0" encoding="utf-8"?>
-<p:sld xmlns:a="http://schemas.openxmlformats.org/drawingml/2006/main" xmlns:p="http://schemas.openxmlformats.org/presentationml/2006/main" xmlns:r="http://schemas.openxmlformats.org/officeDocument/2006/relationships">
-  <p:cSld>
-    <p:spTree>
-      <p:nvGrpSpPr>
-        <p:cNvPr id="1" name=""/>
-        <p:cNvGrpSpPr/>
-        <p:nvPr/>
-      </p:nvGrpSpPr>
-      <p:grpSpPr/>
-      <p:pic>
-        <p:nvPicPr>
-          <p:cNvPr id="2" name="Picture 1" descr="rteu_logo_kucuk.jpg"/>
-          <p:cNvPicPr>
-            <a:picLocks noChangeAspect="1"/>
-          </p:cNvPicPr>
-          <p:nvPr/>
-        </p:nvPicPr>
-        <p:blipFill>
-          <a:blip r:embed="rId2"/>
-          <a:stretch>
-            <a:fillRect/>
-          </a:stretch>
-        </p:blipFill>
-        <p:spPr>
-          <a:xfrm>
-            <a:off x="640080" y="164592"/>
-            <a:ext cx="242773" cy="329184"/>
-          </a:xfrm>
-          <a:prstGeom prst="rect">
-            <a:avLst/>
-          </a:prstGeom>
-        </p:spPr>
-      </p:pic>
-      <p:sp>
-        <p:nvSpPr>
-          <p:cNvPr id="3" name="TextBox 2"/>
-          <p:cNvSpPr txBox="1"/>
-          <p:nvPr/>
-        </p:nvSpPr>
-        <p:spPr>
-          <a:xfrm>
-            <a:off x="1051560" y="182880"/>
-            <a:ext cx="7315200" cy="320040"/>
-          </a:xfrm>
-          <a:prstGeom prst="rect">
-            <a:avLst/>
-          </a:prstGeom>
-          <a:noFill/>
-        </p:spPr>
-        <p:txBody>
-          <a:bodyPr wrap="square" lIns="45720" rIns="45720">
-            <a:spAutoFit/>
-          </a:bodyPr>
-          <a:lstStyle/>
-          <a:p>
-            <a:r>
-              <a:rPr sz="1100" b="0">
-                <a:solidFill>
-                  <a:srgbClr val="5B6770"/>
-                </a:solidFill>
-              </a:rPr>
-              <a:t>CEN429 Secure Programming · Week 8</a:t>
-            </a:r>
-          </a:p>
-        </p:txBody>
-      </p:sp>
-      <p:sp>
-        <p:nvSpPr>
-          <p:cNvPr id="4" name="TextBox 3"/>
-          <p:cNvSpPr txBox="1"/>
-          <p:nvPr/>
-        </p:nvSpPr>
-        <p:spPr>
-          <a:xfrm>
-            <a:off x="640080" y="6446520"/>
-            <a:ext cx="7315200" cy="274320"/>
-          </a:xfrm>
-          <a:prstGeom prst="rect">
-            <a:avLst/>
-          </a:prstGeom>
-          <a:noFill/>
-        </p:spPr>
-        <p:txBody>
-          <a:bodyPr wrap="square" lIns="45720" rIns="45720">
-            <a:spAutoFit/>
-          </a:bodyPr>
-          <a:lstStyle/>
-          <a:p>
-            <a:r>
-              <a:rPr sz="1000" b="0">
-                <a:solidFill>
-                  <a:srgbClr val="5B6770"/>
-                </a:solidFill>
-              </a:rPr>
-              <a:t>RTEU Computer Engineering · 2026-2027 Fall</a:t>
-            </a:r>
-          </a:p>
-        </p:txBody>
-      </p:sp>
-      <p:sp>
-        <p:nvSpPr>
-          <p:cNvPr id="5" name="TextBox 4"/>
-          <p:cNvSpPr txBox="1"/>
-          <p:nvPr/>
-        </p:nvSpPr>
-        <p:spPr>
-          <a:xfrm>
-            <a:off x="10637215" y="6446520"/>
-            <a:ext cx="914400" cy="274320"/>
-          </a:xfrm>
-          <a:prstGeom prst="rect">
-            <a:avLst/>
-          </a:prstGeom>
-          <a:noFill/>
-        </p:spPr>
-        <p:txBody>
-          <a:bodyPr wrap="square" lIns="45720" rIns="45720">
-            <a:spAutoFit/>
-          </a:bodyPr>
-          <a:lstStyle/>
-          <a:p>
-            <a:pPr algn="r"/>
-            <a:r>
-              <a:rPr sz="1000" b="0">
-                <a:solidFill>
-                  <a:srgbClr val="5B6770"/>
-                </a:solidFill>
-              </a:rPr>
-              <a:t>34</a:t>
-            </a:r>
-          </a:p>
-        </p:txBody>
-      </p:sp>
-      <p:sp>
-        <p:nvSpPr>
-          <p:cNvPr id="6" name="TextBox 5"/>
-          <p:cNvSpPr txBox="1"/>
-          <p:nvPr/>
-        </p:nvSpPr>
-        <p:spPr>
-          <a:xfrm>
-            <a:off x="640080" y="548640"/>
-            <a:ext cx="10911535" cy="731520"/>
-          </a:xfrm>
-          <a:prstGeom prst="rect">
-            <a:avLst/>
-          </a:prstGeom>
-          <a:noFill/>
-        </p:spPr>
-        <p:txBody>
-          <a:bodyPr wrap="square" lIns="45720" rIns="45720" anchor="ctr">
-            <a:spAutoFit/>
-          </a:bodyPr>
-          <a:lstStyle/>
-          <a:p>
-            <a:r>
-              <a:rPr sz="3000" b="1">
-                <a:solidFill>
-                  <a:srgbClr val="006D77"/>
-                </a:solidFill>
-              </a:rPr>
-              <a:t>Question 10</a:t>
-            </a:r>
-          </a:p>
-        </p:txBody>
-      </p:sp>
-      <p:sp>
-        <p:nvSpPr>
-          <p:cNvPr id="7" name="TextBox 6"/>
-          <p:cNvSpPr txBox="1"/>
-          <p:nvPr/>
-        </p:nvSpPr>
-        <p:spPr>
-          <a:xfrm>
-            <a:off x="640080" y="1325880"/>
-            <a:ext cx="10911535" cy="439928"/>
-          </a:xfrm>
-          <a:prstGeom prst="rect">
-            <a:avLst/>
-          </a:prstGeom>
-          <a:noFill/>
-        </p:spPr>
-        <p:txBody>
-          <a:bodyPr wrap="square" lIns="45720" rIns="45720">
-            <a:spAutoFit/>
-          </a:bodyPr>
-          <a:lstStyle/>
-          <a:p>
-            <a:pPr algn="l"/>
-            <a:r>
-              <a:rPr sz="2000" b="1">
-                <a:solidFill>
-                  <a:srgbClr val="1F2D3A"/>
-                </a:solidFill>
-              </a:rPr>
-              <a:t>Why is deserialisation dangerous, and what is the fix?</a:t>
-            </a:r>
-          </a:p>
-        </p:txBody>
-      </p:sp>
-      <p:sp>
-        <p:nvSpPr>
-          <p:cNvPr id="8" name="TextBox 7"/>
-          <p:cNvSpPr txBox="1"/>
-          <p:nvPr/>
-        </p:nvSpPr>
-        <p:spPr>
-          <a:xfrm>
-            <a:off x="640080" y="1875536"/>
-            <a:ext cx="10911535" cy="770128"/>
-          </a:xfrm>
-          <a:prstGeom prst="rect">
-            <a:avLst/>
-          </a:prstGeom>
-          <a:noFill/>
-        </p:spPr>
-        <p:txBody>
-          <a:bodyPr wrap="square" lIns="45720" rIns="45720">
-            <a:spAutoFit/>
-          </a:bodyPr>
-          <a:lstStyle/>
-          <a:p>
-            <a:pPr algn="l"/>
-            <a:r>
-              <a:rPr sz="2000" b="1">
-                <a:solidFill>
-                  <a:srgbClr val="1F2D3A"/>
-                </a:solidFill>
-              </a:rPr>
-              <a:t>Answer:</a:t>
-            </a:r>
-            <a:r>
-              <a:rPr sz="2000" b="0">
-                <a:solidFill>
-                  <a:srgbClr val="1F2D3A"/>
-                </a:solidFill>
-              </a:rPr>
-              <a:t> Code can execute during extraction (a gadget chain). Fix: a data format + schema; an allowlist filter if unavoidable.</a:t>
-            </a:r>
-          </a:p>
-        </p:txBody>
-      </p:sp>
-    </p:spTree>
-  </p:cSld>
-  <p:clrMapOvr>
-    <a:masterClrMapping/>
-  </p:clrMapOvr>
-</p:sld>
-</file>
-
-<file path=ppt/slides/slide35.xml><?xml version="1.0" encoding="utf-8"?>
-<p:sld xmlns:a="http://schemas.openxmlformats.org/drawingml/2006/main" xmlns:p="http://schemas.openxmlformats.org/presentationml/2006/main" xmlns:r="http://schemas.openxmlformats.org/officeDocument/2006/relationships">
-  <p:cSld>
-    <p:spTree>
-      <p:nvGrpSpPr>
-        <p:cNvPr id="1" name=""/>
-        <p:cNvGrpSpPr/>
-        <p:nvPr/>
-      </p:nvGrpSpPr>
-      <p:grpSpPr/>
-      <p:pic>
-        <p:nvPicPr>
-          <p:cNvPr id="2" name="Picture 1" descr="rteu_logo_kucuk.jpg"/>
-          <p:cNvPicPr>
-            <a:picLocks noChangeAspect="1"/>
-          </p:cNvPicPr>
-          <p:nvPr/>
-        </p:nvPicPr>
-        <p:blipFill>
-          <a:blip r:embed="rId2"/>
-          <a:stretch>
-            <a:fillRect/>
-          </a:stretch>
-        </p:blipFill>
-        <p:spPr>
-          <a:xfrm>
-            <a:off x="640080" y="164592"/>
-            <a:ext cx="242773" cy="329184"/>
-          </a:xfrm>
-          <a:prstGeom prst="rect">
-            <a:avLst/>
-          </a:prstGeom>
-        </p:spPr>
-      </p:pic>
-      <p:sp>
-        <p:nvSpPr>
-          <p:cNvPr id="3" name="TextBox 2"/>
-          <p:cNvSpPr txBox="1"/>
-          <p:nvPr/>
-        </p:nvSpPr>
-        <p:spPr>
-          <a:xfrm>
-            <a:off x="1051560" y="182880"/>
-            <a:ext cx="7315200" cy="320040"/>
-          </a:xfrm>
-          <a:prstGeom prst="rect">
-            <a:avLst/>
-          </a:prstGeom>
-          <a:noFill/>
-        </p:spPr>
-        <p:txBody>
-          <a:bodyPr wrap="square" lIns="45720" rIns="45720">
-            <a:spAutoFit/>
-          </a:bodyPr>
-          <a:lstStyle/>
-          <a:p>
-            <a:r>
-              <a:rPr sz="1100" b="0">
-                <a:solidFill>
-                  <a:srgbClr val="5B6770"/>
-                </a:solidFill>
-              </a:rPr>
-              <a:t>CEN429 Secure Programming · Week 8</a:t>
-            </a:r>
-          </a:p>
-        </p:txBody>
-      </p:sp>
-      <p:sp>
-        <p:nvSpPr>
-          <p:cNvPr id="4" name="TextBox 3"/>
-          <p:cNvSpPr txBox="1"/>
-          <p:nvPr/>
-        </p:nvSpPr>
-        <p:spPr>
-          <a:xfrm>
-            <a:off x="640080" y="6446520"/>
-            <a:ext cx="7315200" cy="274320"/>
-          </a:xfrm>
-          <a:prstGeom prst="rect">
-            <a:avLst/>
-          </a:prstGeom>
-          <a:noFill/>
-        </p:spPr>
-        <p:txBody>
-          <a:bodyPr wrap="square" lIns="45720" rIns="45720">
-            <a:spAutoFit/>
-          </a:bodyPr>
-          <a:lstStyle/>
-          <a:p>
-            <a:r>
-              <a:rPr sz="1000" b="0">
-                <a:solidFill>
-                  <a:srgbClr val="5B6770"/>
-                </a:solidFill>
-              </a:rPr>
-              <a:t>RTEU Computer Engineering · 2026-2027 Fall</a:t>
-            </a:r>
-          </a:p>
-        </p:txBody>
-      </p:sp>
-      <p:sp>
-        <p:nvSpPr>
-          <p:cNvPr id="5" name="TextBox 4"/>
-          <p:cNvSpPr txBox="1"/>
-          <p:nvPr/>
-        </p:nvSpPr>
-        <p:spPr>
-          <a:xfrm>
-            <a:off x="10637215" y="6446520"/>
-            <a:ext cx="914400" cy="274320"/>
-          </a:xfrm>
-          <a:prstGeom prst="rect">
-            <a:avLst/>
-          </a:prstGeom>
-          <a:noFill/>
-        </p:spPr>
-        <p:txBody>
-          <a:bodyPr wrap="square" lIns="45720" rIns="45720">
-            <a:spAutoFit/>
-          </a:bodyPr>
-          <a:lstStyle/>
-          <a:p>
-            <a:pPr algn="r"/>
-            <a:r>
-              <a:rPr sz="1000" b="0">
-                <a:solidFill>
-                  <a:srgbClr val="5B6770"/>
-                </a:solidFill>
-              </a:rPr>
-              <a:t>35</a:t>
-            </a:r>
-          </a:p>
-        </p:txBody>
-      </p:sp>
-      <p:sp>
-        <p:nvSpPr>
-          <p:cNvPr id="6" name="TextBox 5"/>
-          <p:cNvSpPr txBox="1"/>
-          <p:nvPr/>
-        </p:nvSpPr>
-        <p:spPr>
-          <a:xfrm>
-            <a:off x="640080" y="548640"/>
-            <a:ext cx="10911535" cy="731520"/>
-          </a:xfrm>
-          <a:prstGeom prst="rect">
-            <a:avLst/>
-          </a:prstGeom>
-          <a:noFill/>
-        </p:spPr>
-        <p:txBody>
-          <a:bodyPr wrap="square" lIns="45720" rIns="45720" anchor="ctr">
-            <a:spAutoFit/>
-          </a:bodyPr>
-          <a:lstStyle/>
-          <a:p>
-            <a:r>
-              <a:rPr sz="3000" b="1">
-                <a:solidFill>
-                  <a:srgbClr val="006D77"/>
-                </a:solidFill>
-              </a:rPr>
-              <a:t>Example · Multiple Choice</a:t>
-            </a:r>
-          </a:p>
-        </p:txBody>
-      </p:sp>
-      <p:sp>
-        <p:nvSpPr>
-          <p:cNvPr id="7" name="TextBox 6"/>
-          <p:cNvSpPr txBox="1"/>
-          <p:nvPr/>
-        </p:nvSpPr>
-        <p:spPr>
-          <a:xfrm>
-            <a:off x="640080" y="1325880"/>
-            <a:ext cx="10911535" cy="439928"/>
-          </a:xfrm>
-          <a:prstGeom prst="rect">
-            <a:avLst/>
-          </a:prstGeom>
-          <a:noFill/>
-        </p:spPr>
-        <p:txBody>
-          <a:bodyPr wrap="square" lIns="45720" rIns="45720">
-            <a:spAutoFit/>
-          </a:bodyPr>
-          <a:lstStyle/>
-          <a:p>
-            <a:pPr algn="l"/>
-            <a:r>
-              <a:rPr sz="2000" b="1">
-                <a:solidFill>
-                  <a:srgbClr val="1F2D3A"/>
-                </a:solidFill>
-              </a:rPr>
-              <a:t>Which of the following is an AEAD mode?</a:t>
-            </a:r>
-          </a:p>
-        </p:txBody>
-      </p:sp>
-      <p:sp>
-        <p:nvSpPr>
-          <p:cNvPr id="8" name="TextBox 7"/>
-          <p:cNvSpPr txBox="1"/>
-          <p:nvPr/>
-        </p:nvSpPr>
-        <p:spPr>
-          <a:xfrm>
-            <a:off x="640080" y="1875536"/>
-            <a:ext cx="10911535" cy="439928"/>
-          </a:xfrm>
-          <a:prstGeom prst="rect">
-            <a:avLst/>
-          </a:prstGeom>
-          <a:noFill/>
-        </p:spPr>
-        <p:txBody>
-          <a:bodyPr wrap="square" lIns="45720" rIns="45720">
-            <a:spAutoFit/>
-          </a:bodyPr>
-          <a:lstStyle/>
-          <a:p>
-            <a:pPr algn="l"/>
-            <a:r>
-              <a:rPr sz="2000" b="0">
-                <a:solidFill>
-                  <a:srgbClr val="1F2D3A"/>
-                </a:solidFill>
-              </a:rPr>
-              <a:t>A) ECB B) CBC C) </a:t>
-            </a:r>
-            <a:r>
-              <a:rPr sz="2000" b="1">
-                <a:solidFill>
-                  <a:srgbClr val="1F2D3A"/>
-                </a:solidFill>
-              </a:rPr>
-              <a:t>GCM</a:t>
-            </a:r>
-            <a:r>
-              <a:rPr sz="2000" b="0">
-                <a:solidFill>
-                  <a:srgbClr val="1F2D3A"/>
-                </a:solidFill>
-              </a:rPr>
-              <a:t> ✓ D) Raw RSA</a:t>
-            </a:r>
-          </a:p>
-        </p:txBody>
-      </p:sp>
-    </p:spTree>
-  </p:cSld>
-  <p:clrMapOvr>
-    <a:masterClrMapping/>
-  </p:clrMapOvr>
-</p:sld>
-</file>
-
-<file path=ppt/slides/slide36.xml><?xml version="1.0" encoding="utf-8"?>
-<p:sld xmlns:a="http://schemas.openxmlformats.org/drawingml/2006/main" xmlns:p="http://schemas.openxmlformats.org/presentationml/2006/main" xmlns:r="http://schemas.openxmlformats.org/officeDocument/2006/relationships">
-  <p:cSld>
-    <p:spTree>
-      <p:nvGrpSpPr>
-        <p:cNvPr id="1" name=""/>
-        <p:cNvGrpSpPr/>
-        <p:nvPr/>
-      </p:nvGrpSpPr>
-      <p:grpSpPr/>
-      <p:pic>
-        <p:nvPicPr>
-          <p:cNvPr id="2" name="Picture 1" descr="rteu_logo_kucuk.jpg"/>
-          <p:cNvPicPr>
-            <a:picLocks noChangeAspect="1"/>
-          </p:cNvPicPr>
-          <p:nvPr/>
-        </p:nvPicPr>
-        <p:blipFill>
-          <a:blip r:embed="rId2"/>
-          <a:stretch>
-            <a:fillRect/>
-          </a:stretch>
-        </p:blipFill>
-        <p:spPr>
-          <a:xfrm>
-            <a:off x="640080" y="164592"/>
-            <a:ext cx="242773" cy="329184"/>
-          </a:xfrm>
-          <a:prstGeom prst="rect">
-            <a:avLst/>
-          </a:prstGeom>
-        </p:spPr>
-      </p:pic>
-      <p:sp>
-        <p:nvSpPr>
-          <p:cNvPr id="3" name="TextBox 2"/>
-          <p:cNvSpPr txBox="1"/>
-          <p:nvPr/>
-        </p:nvSpPr>
-        <p:spPr>
-          <a:xfrm>
-            <a:off x="1051560" y="182880"/>
-            <a:ext cx="7315200" cy="320040"/>
-          </a:xfrm>
-          <a:prstGeom prst="rect">
-            <a:avLst/>
-          </a:prstGeom>
-          <a:noFill/>
-        </p:spPr>
-        <p:txBody>
-          <a:bodyPr wrap="square" lIns="45720" rIns="45720">
-            <a:spAutoFit/>
-          </a:bodyPr>
-          <a:lstStyle/>
-          <a:p>
-            <a:r>
-              <a:rPr sz="1100" b="0">
-                <a:solidFill>
-                  <a:srgbClr val="5B6770"/>
-                </a:solidFill>
-              </a:rPr>
-              <a:t>CEN429 Secure Programming · Week 8</a:t>
-            </a:r>
-          </a:p>
-        </p:txBody>
-      </p:sp>
-      <p:sp>
-        <p:nvSpPr>
-          <p:cNvPr id="4" name="TextBox 3"/>
-          <p:cNvSpPr txBox="1"/>
-          <p:nvPr/>
-        </p:nvSpPr>
-        <p:spPr>
-          <a:xfrm>
-            <a:off x="640080" y="6446520"/>
-            <a:ext cx="7315200" cy="274320"/>
-          </a:xfrm>
-          <a:prstGeom prst="rect">
-            <a:avLst/>
-          </a:prstGeom>
-          <a:noFill/>
-        </p:spPr>
-        <p:txBody>
-          <a:bodyPr wrap="square" lIns="45720" rIns="45720">
-            <a:spAutoFit/>
-          </a:bodyPr>
-          <a:lstStyle/>
-          <a:p>
-            <a:r>
-              <a:rPr sz="1000" b="0">
-                <a:solidFill>
-                  <a:srgbClr val="5B6770"/>
-                </a:solidFill>
-              </a:rPr>
-              <a:t>RTEU Computer Engineering · 2026-2027 Fall</a:t>
-            </a:r>
-          </a:p>
-        </p:txBody>
-      </p:sp>
-      <p:sp>
-        <p:nvSpPr>
-          <p:cNvPr id="5" name="TextBox 4"/>
-          <p:cNvSpPr txBox="1"/>
-          <p:nvPr/>
-        </p:nvSpPr>
-        <p:spPr>
-          <a:xfrm>
-            <a:off x="10637215" y="6446520"/>
-            <a:ext cx="914400" cy="274320"/>
-          </a:xfrm>
-          <a:prstGeom prst="rect">
-            <a:avLst/>
-          </a:prstGeom>
-          <a:noFill/>
-        </p:spPr>
-        <p:txBody>
-          <a:bodyPr wrap="square" lIns="45720" rIns="45720">
-            <a:spAutoFit/>
-          </a:bodyPr>
-          <a:lstStyle/>
-          <a:p>
-            <a:pPr algn="r"/>
-            <a:r>
-              <a:rPr sz="1000" b="0">
-                <a:solidFill>
-                  <a:srgbClr val="5B6770"/>
-                </a:solidFill>
-              </a:rPr>
-              <a:t>36</a:t>
-            </a:r>
-          </a:p>
-        </p:txBody>
-      </p:sp>
-      <p:sp>
-        <p:nvSpPr>
-          <p:cNvPr id="6" name="TextBox 5"/>
-          <p:cNvSpPr txBox="1"/>
-          <p:nvPr/>
-        </p:nvSpPr>
-        <p:spPr>
-          <a:xfrm>
-            <a:off x="640080" y="548640"/>
-            <a:ext cx="10911535" cy="731520"/>
-          </a:xfrm>
-          <a:prstGeom prst="rect">
-            <a:avLst/>
-          </a:prstGeom>
-          <a:noFill/>
-        </p:spPr>
-        <p:txBody>
-          <a:bodyPr wrap="square" lIns="45720" rIns="45720" anchor="ctr">
-            <a:spAutoFit/>
-          </a:bodyPr>
-          <a:lstStyle/>
-          <a:p>
-            <a:r>
-              <a:rPr sz="3000" b="1">
-                <a:solidFill>
-                  <a:srgbClr val="006D77"/>
-                </a:solidFill>
-              </a:rPr>
-              <a:t>Example · True/False</a:t>
-            </a:r>
-          </a:p>
-        </p:txBody>
-      </p:sp>
-      <p:sp>
-        <p:nvSpPr>
-          <p:cNvPr id="7" name="TextBox 6"/>
-          <p:cNvSpPr txBox="1"/>
-          <p:nvPr/>
-        </p:nvSpPr>
-        <p:spPr>
-          <a:xfrm>
-            <a:off x="640080" y="1325880"/>
-            <a:ext cx="10911535" cy="1219200"/>
-          </a:xfrm>
-          <a:prstGeom prst="rect">
-            <a:avLst/>
-          </a:prstGeom>
-          <a:noFill/>
-        </p:spPr>
-        <p:txBody>
-          <a:bodyPr wrap="square" lIns="45720" rIns="45720">
-            <a:spAutoFit/>
-          </a:bodyPr>
-          <a:lstStyle/>
-          <a:p>
-            <a:pPr>
-              <a:spcAft>
-                <a:spcPts val="300"/>
-              </a:spcAft>
-            </a:pPr>
-            <a:r>
-              <a:rPr sz="2000" b="1">
-                <a:solidFill>
-                  <a:srgbClr val="006D77"/>
-                </a:solidFill>
-              </a:rPr>
-              <a:t>• </a:t>
-            </a:r>
-            <a:r>
-              <a:rPr sz="2000" b="0">
-                <a:solidFill>
-                  <a:srgbClr val="1F2D3A"/>
-                </a:solidFill>
-              </a:rPr>
-              <a:t>Obfuscation fixes the bug. </a:t>
-            </a:r>
-            <a:r>
-              <a:rPr sz="2000" b="1">
-                <a:solidFill>
-                  <a:srgbClr val="1F2D3A"/>
-                </a:solidFill>
-              </a:rPr>
-              <a:t>(F)</a:t>
-            </a:r>
-          </a:p>
-          <a:p>
-            <a:pPr>
-              <a:spcAft>
-                <a:spcPts val="300"/>
-              </a:spcAft>
-            </a:pPr>
-            <a:r>
-              <a:rPr sz="2000" b="1">
-                <a:solidFill>
-                  <a:srgbClr val="006D77"/>
-                </a:solidFill>
-              </a:rPr>
-              <a:t>• </a:t>
-            </a:r>
-            <a:r>
-              <a:rPr sz="2000" b="0">
-                <a:solidFill>
-                  <a:srgbClr val="1F2D3A"/>
-                </a:solidFill>
-              </a:rPr>
-              <a:t>The nonce must be secret. </a:t>
-            </a:r>
-            <a:r>
-              <a:rPr sz="2000" b="1">
-                <a:solidFill>
-                  <a:srgbClr val="1F2D3A"/>
-                </a:solidFill>
-              </a:rPr>
-              <a:t>(F — must be unique, not secret)</a:t>
-            </a:r>
-          </a:p>
-          <a:p>
-            <a:pPr>
-              <a:spcAft>
-                <a:spcPts val="300"/>
-              </a:spcAft>
-            </a:pPr>
-            <a:r>
-              <a:rPr sz="2000" b="1">
-                <a:solidFill>
-                  <a:srgbClr val="006D77"/>
-                </a:solidFill>
-              </a:rPr>
-              <a:t>• </a:t>
-            </a:r>
-            <a:r>
-              <a:rPr sz="2000" b="0">
-                <a:solidFill>
-                  <a:srgbClr val="1F2D3A"/>
-                </a:solidFill>
-              </a:rPr>
-              <a:t>A parameterised query prevents SQL injection. </a:t>
-            </a:r>
-            <a:r>
-              <a:rPr sz="2000" b="1">
-                <a:solidFill>
-                  <a:srgbClr val="1F2D3A"/>
-                </a:solidFill>
-              </a:rPr>
-              <a:t>(T)</a:t>
-            </a:r>
-          </a:p>
-        </p:txBody>
-      </p:sp>
-    </p:spTree>
-  </p:cSld>
-  <p:clrMapOvr>
-    <a:masterClrMapping/>
-  </p:clrMapOvr>
-</p:sld>
-</file>
-
-<file path=ppt/slides/slide37.xml><?xml version="1.0" encoding="utf-8"?>
-<p:sld xmlns:a="http://schemas.openxmlformats.org/drawingml/2006/main" xmlns:p="http://schemas.openxmlformats.org/presentationml/2006/main" xmlns:r="http://schemas.openxmlformats.org/officeDocument/2006/relationships">
-  <p:cSld>
-    <p:spTree>
-      <p:nvGrpSpPr>
-        <p:cNvPr id="1" name=""/>
-        <p:cNvGrpSpPr/>
-        <p:nvPr/>
-      </p:nvGrpSpPr>
-      <p:grpSpPr/>
-      <p:pic>
-        <p:nvPicPr>
-          <p:cNvPr id="2" name="Picture 1" descr="rteu_logo_kucuk.jpg"/>
-          <p:cNvPicPr>
-            <a:picLocks noChangeAspect="1"/>
-          </p:cNvPicPr>
-          <p:nvPr/>
-        </p:nvPicPr>
-        <p:blipFill>
-          <a:blip r:embed="rId2"/>
-          <a:stretch>
-            <a:fillRect/>
-          </a:stretch>
-        </p:blipFill>
-        <p:spPr>
-          <a:xfrm>
-            <a:off x="640080" y="164592"/>
-            <a:ext cx="242773" cy="329184"/>
-          </a:xfrm>
-          <a:prstGeom prst="rect">
-            <a:avLst/>
-          </a:prstGeom>
-        </p:spPr>
-      </p:pic>
-      <p:sp>
-        <p:nvSpPr>
-          <p:cNvPr id="3" name="TextBox 2"/>
-          <p:cNvSpPr txBox="1"/>
-          <p:nvPr/>
-        </p:nvSpPr>
-        <p:spPr>
-          <a:xfrm>
-            <a:off x="1051560" y="182880"/>
-            <a:ext cx="7315200" cy="320040"/>
-          </a:xfrm>
-          <a:prstGeom prst="rect">
-            <a:avLst/>
-          </a:prstGeom>
-          <a:noFill/>
-        </p:spPr>
-        <p:txBody>
-          <a:bodyPr wrap="square" lIns="45720" rIns="45720">
-            <a:spAutoFit/>
-          </a:bodyPr>
-          <a:lstStyle/>
-          <a:p>
-            <a:r>
-              <a:rPr sz="1100" b="0">
-                <a:solidFill>
-                  <a:srgbClr val="5B6770"/>
-                </a:solidFill>
-              </a:rPr>
-              <a:t>CEN429 Secure Programming · Week 8</a:t>
-            </a:r>
-          </a:p>
-        </p:txBody>
-      </p:sp>
-      <p:sp>
-        <p:nvSpPr>
-          <p:cNvPr id="4" name="TextBox 3"/>
-          <p:cNvSpPr txBox="1"/>
-          <p:nvPr/>
-        </p:nvSpPr>
-        <p:spPr>
-          <a:xfrm>
-            <a:off x="640080" y="6446520"/>
-            <a:ext cx="7315200" cy="274320"/>
-          </a:xfrm>
-          <a:prstGeom prst="rect">
-            <a:avLst/>
-          </a:prstGeom>
-          <a:noFill/>
-        </p:spPr>
-        <p:txBody>
-          <a:bodyPr wrap="square" lIns="45720" rIns="45720">
-            <a:spAutoFit/>
-          </a:bodyPr>
-          <a:lstStyle/>
-          <a:p>
-            <a:r>
-              <a:rPr sz="1000" b="0">
-                <a:solidFill>
-                  <a:srgbClr val="5B6770"/>
-                </a:solidFill>
-              </a:rPr>
-              <a:t>RTEU Computer Engineering · 2026-2027 Fall</a:t>
-            </a:r>
-          </a:p>
-        </p:txBody>
-      </p:sp>
-      <p:sp>
-        <p:nvSpPr>
-          <p:cNvPr id="5" name="TextBox 4"/>
-          <p:cNvSpPr txBox="1"/>
-          <p:nvPr/>
-        </p:nvSpPr>
-        <p:spPr>
-          <a:xfrm>
-            <a:off x="10637215" y="6446520"/>
-            <a:ext cx="914400" cy="274320"/>
-          </a:xfrm>
-          <a:prstGeom prst="rect">
-            <a:avLst/>
-          </a:prstGeom>
-          <a:noFill/>
-        </p:spPr>
-        <p:txBody>
-          <a:bodyPr wrap="square" lIns="45720" rIns="45720">
-            <a:spAutoFit/>
-          </a:bodyPr>
-          <a:lstStyle/>
-          <a:p>
-            <a:pPr algn="r"/>
-            <a:r>
-              <a:rPr sz="1000" b="0">
-                <a:solidFill>
-                  <a:srgbClr val="5B6770"/>
-                </a:solidFill>
-              </a:rPr>
-              <a:t>37</a:t>
-            </a:r>
-          </a:p>
-        </p:txBody>
-      </p:sp>
-      <p:sp>
-        <p:nvSpPr>
-          <p:cNvPr id="6" name="TextBox 5"/>
-          <p:cNvSpPr txBox="1"/>
-          <p:nvPr/>
-        </p:nvSpPr>
-        <p:spPr>
-          <a:xfrm>
-            <a:off x="640080" y="548640"/>
-            <a:ext cx="10911535" cy="731520"/>
-          </a:xfrm>
-          <a:prstGeom prst="rect">
-            <a:avLst/>
-          </a:prstGeom>
-          <a:noFill/>
-        </p:spPr>
-        <p:txBody>
-          <a:bodyPr wrap="square" lIns="45720" rIns="45720" anchor="ctr">
-            <a:spAutoFit/>
-          </a:bodyPr>
-          <a:lstStyle/>
-          <a:p>
-            <a:r>
-              <a:rPr sz="3000" b="1">
-                <a:solidFill>
-                  <a:srgbClr val="006D77"/>
-                </a:solidFill>
-              </a:rPr>
-              <a:t>Study Plan</a:t>
-            </a:r>
-          </a:p>
-        </p:txBody>
-      </p:sp>
-      <p:sp>
-        <p:nvSpPr>
-          <p:cNvPr id="7" name="TextBox 6"/>
-          <p:cNvSpPr txBox="1"/>
-          <p:nvPr/>
-        </p:nvSpPr>
-        <p:spPr>
-          <a:xfrm>
-            <a:off x="640080" y="1325880"/>
-            <a:ext cx="10911535" cy="1219200"/>
-          </a:xfrm>
-          <a:prstGeom prst="rect">
-            <a:avLst/>
-          </a:prstGeom>
-          <a:noFill/>
-        </p:spPr>
-        <p:txBody>
-          <a:bodyPr wrap="square" lIns="45720" rIns="45720">
-            <a:spAutoFit/>
-          </a:bodyPr>
-          <a:lstStyle/>
-          <a:p>
-            <a:pPr>
-              <a:spcAft>
-                <a:spcPts val="300"/>
-              </a:spcAft>
-            </a:pPr>
-            <a:r>
-              <a:rPr sz="2000" b="1">
-                <a:solidFill>
-                  <a:srgbClr val="006D77"/>
-                </a:solidFill>
-              </a:rPr>
-              <a:t>• </a:t>
-            </a:r>
-            <a:r>
-              <a:rPr sz="2000" b="0">
-                <a:solidFill>
-                  <a:srgbClr val="1F2D3A"/>
-                </a:solidFill>
-              </a:rPr>
-              <a:t>Do each week's "Self-check" without looking at the answers.</a:t>
-            </a:r>
-          </a:p>
-          <a:p>
-            <a:pPr>
-              <a:spcAft>
-                <a:spcPts val="300"/>
-              </a:spcAft>
-            </a:pPr>
-            <a:r>
-              <a:rPr sz="2000" b="1">
-                <a:solidFill>
-                  <a:srgbClr val="006D77"/>
-                </a:solidFill>
-              </a:rPr>
-              <a:t>• </a:t>
-            </a:r>
-            <a:r>
-              <a:rPr sz="2000" b="0">
-                <a:solidFill>
-                  <a:srgbClr val="1F2D3A"/>
-                </a:solidFill>
-              </a:rPr>
-              <a:t>Learn frequently confused pairs by their </a:t>
-            </a:r>
-            <a:r>
-              <a:rPr sz="2000" b="1">
-                <a:solidFill>
-                  <a:srgbClr val="1F2D3A"/>
-                </a:solidFill>
-              </a:rPr>
-              <a:t>reason</a:t>
-            </a:r>
-            <a:r>
-              <a:rPr sz="2000" b="0">
-                <a:solidFill>
-                  <a:srgbClr val="1F2D3A"/>
-                </a:solidFill>
-              </a:rPr>
-              <a:t>, not by rote.</a:t>
-            </a:r>
-          </a:p>
-          <a:p>
-            <a:pPr>
-              <a:spcAft>
-                <a:spcPts val="300"/>
-              </a:spcAft>
-            </a:pPr>
-            <a:r>
-              <a:rPr sz="2000" b="1">
-                <a:solidFill>
-                  <a:srgbClr val="006D77"/>
-                </a:solidFill>
-              </a:rPr>
-              <a:t>• </a:t>
-            </a:r>
-            <a:r>
-              <a:rPr sz="2000" b="0">
-                <a:solidFill>
-                  <a:srgbClr val="1F2D3A"/>
-                </a:solidFill>
-              </a:rPr>
-              <a:t>Review the Week 3 and Week 4 demos once more.</a:t>
-            </a:r>
-          </a:p>
-        </p:txBody>
-      </p:sp>
-    </p:spTree>
-  </p:cSld>
-  <p:clrMapOvr>
-    <a:masterClrMapping/>
-  </p:clrMapOvr>
-</p:sld>
-</file>
-
-<file path=ppt/slides/slide38.xml><?xml version="1.0" encoding="utf-8"?>
-<p:sld xmlns:a="http://schemas.openxmlformats.org/drawingml/2006/main" xmlns:p="http://schemas.openxmlformats.org/presentationml/2006/main" xmlns:r="http://schemas.openxmlformats.org/officeDocument/2006/relationships">
-  <p:cSld>
-    <p:spTree>
-      <p:nvGrpSpPr>
-        <p:cNvPr id="1" name=""/>
-        <p:cNvGrpSpPr/>
-        <p:nvPr/>
-      </p:nvGrpSpPr>
-      <p:grpSpPr/>
-      <p:pic>
-        <p:nvPicPr>
-          <p:cNvPr id="2" name="Picture 1" descr="rteu_logo_kucuk.jpg"/>
-          <p:cNvPicPr>
-            <a:picLocks noChangeAspect="1"/>
-          </p:cNvPicPr>
-          <p:nvPr/>
-        </p:nvPicPr>
-        <p:blipFill>
-          <a:blip r:embed="rId2"/>
-          <a:stretch>
-            <a:fillRect/>
-          </a:stretch>
-        </p:blipFill>
-        <p:spPr>
-          <a:xfrm>
-            <a:off x="640080" y="164592"/>
-            <a:ext cx="242773" cy="329184"/>
-          </a:xfrm>
-          <a:prstGeom prst="rect">
-            <a:avLst/>
-          </a:prstGeom>
-        </p:spPr>
-      </p:pic>
-      <p:sp>
-        <p:nvSpPr>
-          <p:cNvPr id="3" name="TextBox 2"/>
-          <p:cNvSpPr txBox="1"/>
-          <p:nvPr/>
-        </p:nvSpPr>
-        <p:spPr>
-          <a:xfrm>
-            <a:off x="1051560" y="182880"/>
-            <a:ext cx="7315200" cy="320040"/>
-          </a:xfrm>
-          <a:prstGeom prst="rect">
-            <a:avLst/>
-          </a:prstGeom>
-          <a:noFill/>
-        </p:spPr>
-        <p:txBody>
-          <a:bodyPr wrap="square" lIns="45720" rIns="45720">
-            <a:spAutoFit/>
-          </a:bodyPr>
-          <a:lstStyle/>
-          <a:p>
-            <a:r>
-              <a:rPr sz="1100" b="0">
-                <a:solidFill>
-                  <a:srgbClr val="5B6770"/>
-                </a:solidFill>
-              </a:rPr>
-              <a:t>CEN429 Secure Programming · Week 8</a:t>
-            </a:r>
-          </a:p>
-        </p:txBody>
-      </p:sp>
-      <p:sp>
-        <p:nvSpPr>
-          <p:cNvPr id="4" name="TextBox 3"/>
-          <p:cNvSpPr txBox="1"/>
-          <p:nvPr/>
-        </p:nvSpPr>
-        <p:spPr>
-          <a:xfrm>
-            <a:off x="640080" y="6446520"/>
-            <a:ext cx="7315200" cy="274320"/>
-          </a:xfrm>
-          <a:prstGeom prst="rect">
-            <a:avLst/>
-          </a:prstGeom>
-          <a:noFill/>
-        </p:spPr>
-        <p:txBody>
-          <a:bodyPr wrap="square" lIns="45720" rIns="45720">
-            <a:spAutoFit/>
-          </a:bodyPr>
-          <a:lstStyle/>
-          <a:p>
-            <a:r>
-              <a:rPr sz="1000" b="0">
-                <a:solidFill>
-                  <a:srgbClr val="5B6770"/>
-                </a:solidFill>
-              </a:rPr>
-              <a:t>RTEU Computer Engineering · 2026-2027 Fall</a:t>
-            </a:r>
-          </a:p>
-        </p:txBody>
-      </p:sp>
-      <p:sp>
-        <p:nvSpPr>
-          <p:cNvPr id="5" name="TextBox 4"/>
-          <p:cNvSpPr txBox="1"/>
-          <p:nvPr/>
-        </p:nvSpPr>
-        <p:spPr>
-          <a:xfrm>
-            <a:off x="10637215" y="6446520"/>
-            <a:ext cx="914400" cy="274320"/>
-          </a:xfrm>
-          <a:prstGeom prst="rect">
-            <a:avLst/>
-          </a:prstGeom>
-          <a:noFill/>
-        </p:spPr>
-        <p:txBody>
-          <a:bodyPr wrap="square" lIns="45720" rIns="45720">
-            <a:spAutoFit/>
-          </a:bodyPr>
-          <a:lstStyle/>
-          <a:p>
-            <a:pPr algn="r"/>
-            <a:r>
-              <a:rPr sz="1000" b="0">
-                <a:solidFill>
-                  <a:srgbClr val="5B6770"/>
-                </a:solidFill>
-              </a:rPr>
-              <a:t>38</a:t>
-            </a:r>
-          </a:p>
-        </p:txBody>
-      </p:sp>
-      <p:sp>
-        <p:nvSpPr>
-          <p:cNvPr id="6" name="TextBox 5"/>
-          <p:cNvSpPr txBox="1"/>
-          <p:nvPr/>
-        </p:nvSpPr>
-        <p:spPr>
-          <a:xfrm>
-            <a:off x="640080" y="548640"/>
-            <a:ext cx="10911535" cy="731520"/>
-          </a:xfrm>
-          <a:prstGeom prst="rect">
-            <a:avLst/>
-          </a:prstGeom>
-          <a:noFill/>
-        </p:spPr>
-        <p:txBody>
-          <a:bodyPr wrap="square" lIns="45720" rIns="45720" anchor="ctr">
-            <a:spAutoFit/>
-          </a:bodyPr>
-          <a:lstStyle/>
-          <a:p>
-            <a:r>
-              <a:rPr sz="3000" b="1">
-                <a:solidFill>
-                  <a:srgbClr val="006D77"/>
-                </a:solidFill>
-              </a:rPr>
-              <a:t>Final Word (Quiz-1 Prep)</a:t>
-            </a:r>
-          </a:p>
-        </p:txBody>
-      </p:sp>
-      <p:sp>
-        <p:nvSpPr>
-          <p:cNvPr id="7" name="Rectangle 6"/>
-          <p:cNvSpPr/>
-          <p:nvPr/>
-        </p:nvSpPr>
-        <p:spPr>
-          <a:xfrm>
-            <a:off x="640080" y="1325880"/>
-            <a:ext cx="10911535" cy="934719"/>
-          </a:xfrm>
-          <a:prstGeom prst="rect">
-            <a:avLst/>
-          </a:prstGeom>
-          <a:solidFill>
-            <a:srgbClr val="EEF7F8"/>
-          </a:solidFill>
-          <a:ln>
-            <a:solidFill>
-              <a:srgbClr val="006D77"/>
-            </a:solidFill>
-          </a:ln>
-        </p:spPr>
-        <p:style>
-          <a:lnRef idx="1">
-            <a:schemeClr val="accent1"/>
-          </a:lnRef>
-          <a:fillRef idx="3">
-            <a:schemeClr val="accent1"/>
-          </a:fillRef>
-          <a:effectRef idx="2">
-            <a:schemeClr val="accent1"/>
-          </a:effectRef>
-          <a:fontRef idx="minor">
-            <a:schemeClr val="lt1"/>
-          </a:fontRef>
-        </p:style>
-        <p:txBody>
-          <a:bodyPr rtlCol="0" anchor="ctr" wrap="square" lIns="182880"/>
-          <a:lstStyle/>
-          <a:p>
-            <a:pPr algn="l"/>
-            <a:r>
-              <a:rPr sz="2000" b="0">
-                <a:solidFill>
-                  <a:srgbClr val="1F2D3A"/>
-                </a:solidFill>
-              </a:rPr>
-              <a:t>Not memorization — what's measured is the </a:t>
-            </a:r>
-            <a:r>
-              <a:rPr sz="2000" b="1">
-                <a:solidFill>
-                  <a:srgbClr val="1F2D3A"/>
-                </a:solidFill>
-              </a:rPr>
-              <a:t>why</a:t>
-            </a:r>
-            <a:r>
-              <a:rPr sz="2000" b="0">
-                <a:solidFill>
-                  <a:srgbClr val="1F2D3A"/>
-                </a:solidFill>
-              </a:rPr>
-              <a:t>: "why this mode?", "why this check?", "what doesn't it protect?"</a:t>
-            </a:r>
-          </a:p>
-        </p:txBody>
-      </p:sp>
-      <p:sp>
-        <p:nvSpPr>
-          <p:cNvPr id="8" name="TextBox 7"/>
-          <p:cNvSpPr txBox="1"/>
-          <p:nvPr/>
-        </p:nvSpPr>
-        <p:spPr>
-          <a:xfrm>
-            <a:off x="640080" y="2370328"/>
-            <a:ext cx="10911535" cy="439928"/>
-          </a:xfrm>
-          <a:prstGeom prst="rect">
-            <a:avLst/>
-          </a:prstGeom>
-          <a:noFill/>
-        </p:spPr>
-        <p:txBody>
-          <a:bodyPr wrap="square" lIns="45720" rIns="45720">
-            <a:spAutoFit/>
-          </a:bodyPr>
-          <a:lstStyle/>
-          <a:p>
-            <a:pPr algn="l"/>
-            <a:r>
-              <a:rPr sz="2000" b="0">
-                <a:solidFill>
-                  <a:srgbClr val="1F2D3A"/>
-                </a:solidFill>
-              </a:rPr>
-              <a:t>Good luck.</a:t>
-            </a:r>
-          </a:p>
-        </p:txBody>
-      </p:sp>
-    </p:spTree>
-  </p:cSld>
-  <p:clrMapOvr>
-    <a:masterClrMapping/>
-  </p:clrMapOvr>
-</p:sld>
-</file>
-
-<file path=ppt/slides/slide4.xml><?xml version="1.0" encoding="utf-8"?>
-<p:sld xmlns:a="http://schemas.openxmlformats.org/drawingml/2006/main" xmlns:p="http://schemas.openxmlformats.org/presentationml/2006/main" xmlns:r="http://schemas.openxmlformats.org/officeDocument/2006/relationships">
-  <p:cSld>
-    <p:spTree>
-      <p:nvGrpSpPr>
-        <p:cNvPr id="1" name=""/>
-        <p:cNvGrpSpPr/>
-        <p:nvPr/>
-      </p:nvGrpSpPr>
-      <p:grpSpPr/>
-      <p:pic>
-        <p:nvPicPr>
-          <p:cNvPr id="2" name="Picture 1" descr="rteu_logo_kucuk.jpg"/>
-          <p:cNvPicPr>
-            <a:picLocks noChangeAspect="1"/>
-          </p:cNvPicPr>
-          <p:nvPr/>
-        </p:nvPicPr>
-        <p:blipFill>
-          <a:blip r:embed="rId2"/>
-          <a:stretch>
-            <a:fillRect/>
-          </a:stretch>
-        </p:blipFill>
-        <p:spPr>
-          <a:xfrm>
-            <a:off x="640080" y="164592"/>
-            <a:ext cx="242773" cy="329184"/>
-          </a:xfrm>
-          <a:prstGeom prst="rect">
-            <a:avLst/>
-          </a:prstGeom>
-        </p:spPr>
-      </p:pic>
-      <p:sp>
-        <p:nvSpPr>
-          <p:cNvPr id="3" name="TextBox 2"/>
-          <p:cNvSpPr txBox="1"/>
-          <p:nvPr/>
-        </p:nvSpPr>
-        <p:spPr>
-          <a:xfrm>
-            <a:off x="1051560" y="182880"/>
-            <a:ext cx="7315200" cy="320040"/>
-          </a:xfrm>
-          <a:prstGeom prst="rect">
-            <a:avLst/>
-          </a:prstGeom>
-          <a:noFill/>
-        </p:spPr>
-        <p:txBody>
-          <a:bodyPr wrap="square" lIns="45720" rIns="45720">
-            <a:spAutoFit/>
-          </a:bodyPr>
-          <a:lstStyle/>
-          <a:p>
-            <a:r>
-              <a:rPr sz="1100" b="0">
-                <a:solidFill>
-                  <a:srgbClr val="5B6770"/>
-                </a:solidFill>
-              </a:rPr>
-              <a:t>CEN429 Secure Programming · Week 8</a:t>
-            </a:r>
-          </a:p>
-        </p:txBody>
-      </p:sp>
-      <p:sp>
-        <p:nvSpPr>
-          <p:cNvPr id="4" name="TextBox 3"/>
-          <p:cNvSpPr txBox="1"/>
-          <p:nvPr/>
-        </p:nvSpPr>
-        <p:spPr>
-          <a:xfrm>
-            <a:off x="640080" y="6446520"/>
-            <a:ext cx="7315200" cy="274320"/>
-          </a:xfrm>
-          <a:prstGeom prst="rect">
-            <a:avLst/>
-          </a:prstGeom>
-          <a:noFill/>
-        </p:spPr>
-        <p:txBody>
-          <a:bodyPr wrap="square" lIns="45720" rIns="45720">
-            <a:spAutoFit/>
-          </a:bodyPr>
-          <a:lstStyle/>
-          <a:p>
-            <a:r>
-              <a:rPr sz="1000" b="0">
-                <a:solidFill>
-                  <a:srgbClr val="5B6770"/>
-                </a:solidFill>
-              </a:rPr>
-              <a:t>RTEU Computer Engineering · 2026-2027 Fall</a:t>
-            </a:r>
-          </a:p>
-        </p:txBody>
-      </p:sp>
-      <p:sp>
-        <p:nvSpPr>
-          <p:cNvPr id="5" name="TextBox 4"/>
-          <p:cNvSpPr txBox="1"/>
-          <p:nvPr/>
-        </p:nvSpPr>
-        <p:spPr>
-          <a:xfrm>
-            <a:off x="10637215" y="6446520"/>
-            <a:ext cx="914400" cy="274320"/>
-          </a:xfrm>
-          <a:prstGeom prst="rect">
-            <a:avLst/>
-          </a:prstGeom>
-          <a:noFill/>
-        </p:spPr>
-        <p:txBody>
-          <a:bodyPr wrap="square" lIns="45720" rIns="45720">
-            <a:spAutoFit/>
-          </a:bodyPr>
-          <a:lstStyle/>
-          <a:p>
-            <a:pPr algn="r"/>
-            <a:r>
-              <a:rPr sz="1000" b="0">
-                <a:solidFill>
-                  <a:srgbClr val="5B6770"/>
-                </a:solidFill>
-              </a:rPr>
-              <a:t>4</a:t>
             </a:r>
           </a:p>
         </p:txBody>
@@ -13335,6 +10177,40 @@
           </a:graphicData>
         </a:graphic>
       </p:graphicFrame>
+      <p:sp>
+        <p:nvSpPr>
+          <p:cNvPr id="8" name="TextBox 7"/>
+          <p:cNvSpPr txBox="1"/>
+          <p:nvPr/>
+        </p:nvSpPr>
+        <p:spPr>
+          <a:xfrm>
+            <a:off x="640080" y="4365345"/>
+            <a:ext cx="10911535" cy="406908"/>
+          </a:xfrm>
+          <a:prstGeom prst="rect">
+            <a:avLst/>
+          </a:prstGeom>
+          <a:noFill/>
+        </p:spPr>
+        <p:txBody>
+          <a:bodyPr wrap="square" lIns="45720" rIns="45720">
+            <a:spAutoFit/>
+          </a:bodyPr>
+          <a:lstStyle/>
+          <a:p>
+            <a:pPr algn="l"/>
+            <a:r>
+              <a:rPr sz="1800" b="0" i="1">
+                <a:solidFill>
+                  <a:srgbClr val="1F2D3A"/>
+                </a:solidFill>
+              </a:rPr>
+              <a:t>Note: Week 2 — trust boundary and the least-privilege principle.</a:t>
+            </a:r>
+          </a:p>
+        </p:txBody>
+      </p:sp>
     </p:spTree>
   </p:cSld>
   <p:clrMapOvr>
@@ -13343,7 +10219,7 @@
 </p:sld>
 </file>
 
-<file path=ppt/slides/slide5.xml><?xml version="1.0" encoding="utf-8"?>
+<file path=ppt/slides/slide4.xml><?xml version="1.0" encoding="utf-8"?>
 <p:sld xmlns:a="http://schemas.openxmlformats.org/drawingml/2006/main" xmlns:p="http://schemas.openxmlformats.org/presentationml/2006/main" xmlns:r="http://schemas.openxmlformats.org/officeDocument/2006/relationships">
   <p:cSld>
     <p:spTree>
@@ -13472,206 +10348,7 @@
                   <a:srgbClr val="5B6770"/>
                 </a:solidFill>
               </a:rPr>
-              <a:t>5</a:t>
-            </a:r>
-          </a:p>
-        </p:txBody>
-      </p:sp>
-      <p:sp>
-        <p:nvSpPr>
-          <p:cNvPr id="6" name="TextBox 5"/>
-          <p:cNvSpPr txBox="1"/>
-          <p:nvPr/>
-        </p:nvSpPr>
-        <p:spPr>
-          <a:xfrm>
-            <a:off x="640080" y="548640"/>
-            <a:ext cx="10911535" cy="731520"/>
-          </a:xfrm>
-          <a:prstGeom prst="rect">
-            <a:avLst/>
-          </a:prstGeom>
-          <a:noFill/>
-        </p:spPr>
-        <p:txBody>
-          <a:bodyPr wrap="square" lIns="45720" rIns="45720" anchor="ctr">
-            <a:spAutoFit/>
-          </a:bodyPr>
-          <a:lstStyle/>
-          <a:p>
-            <a:r>
-              <a:rPr sz="3000" b="1">
-                <a:solidFill>
-                  <a:srgbClr val="006D77"/>
-                </a:solidFill>
-              </a:rPr>
-              <a:t>Quiz-1 Scope — Diagram</a:t>
-            </a:r>
-          </a:p>
-        </p:txBody>
-      </p:sp>
-      <p:pic>
-        <p:nvPicPr>
-          <p:cNvPr id="7" name="Picture 6" descr="h08-01-kapsam.png"/>
-          <p:cNvPicPr>
-            <a:picLocks noChangeAspect="1"/>
-          </p:cNvPicPr>
-          <p:nvPr/>
-        </p:nvPicPr>
-        <p:blipFill>
-          <a:blip r:embed="rId3"/>
-          <a:stretch>
-            <a:fillRect/>
-          </a:stretch>
-        </p:blipFill>
-        <p:spPr>
-          <a:xfrm>
-            <a:off x="2046645" y="1325880"/>
-            <a:ext cx="8098404" cy="4060751"/>
-          </a:xfrm>
-          <a:prstGeom prst="rect">
-            <a:avLst/>
-          </a:prstGeom>
-        </p:spPr>
-      </p:pic>
-    </p:spTree>
-  </p:cSld>
-  <p:clrMapOvr>
-    <a:masterClrMapping/>
-  </p:clrMapOvr>
-</p:sld>
-</file>
-
-<file path=ppt/slides/slide6.xml><?xml version="1.0" encoding="utf-8"?>
-<p:sld xmlns:a="http://schemas.openxmlformats.org/drawingml/2006/main" xmlns:p="http://schemas.openxmlformats.org/presentationml/2006/main" xmlns:r="http://schemas.openxmlformats.org/officeDocument/2006/relationships">
-  <p:cSld>
-    <p:spTree>
-      <p:nvGrpSpPr>
-        <p:cNvPr id="1" name=""/>
-        <p:cNvGrpSpPr/>
-        <p:nvPr/>
-      </p:nvGrpSpPr>
-      <p:grpSpPr/>
-      <p:pic>
-        <p:nvPicPr>
-          <p:cNvPr id="2" name="Picture 1" descr="rteu_logo_kucuk.jpg"/>
-          <p:cNvPicPr>
-            <a:picLocks noChangeAspect="1"/>
-          </p:cNvPicPr>
-          <p:nvPr/>
-        </p:nvPicPr>
-        <p:blipFill>
-          <a:blip r:embed="rId2"/>
-          <a:stretch>
-            <a:fillRect/>
-          </a:stretch>
-        </p:blipFill>
-        <p:spPr>
-          <a:xfrm>
-            <a:off x="640080" y="164592"/>
-            <a:ext cx="242773" cy="329184"/>
-          </a:xfrm>
-          <a:prstGeom prst="rect">
-            <a:avLst/>
-          </a:prstGeom>
-        </p:spPr>
-      </p:pic>
-      <p:sp>
-        <p:nvSpPr>
-          <p:cNvPr id="3" name="TextBox 2"/>
-          <p:cNvSpPr txBox="1"/>
-          <p:nvPr/>
-        </p:nvSpPr>
-        <p:spPr>
-          <a:xfrm>
-            <a:off x="1051560" y="182880"/>
-            <a:ext cx="7315200" cy="320040"/>
-          </a:xfrm>
-          <a:prstGeom prst="rect">
-            <a:avLst/>
-          </a:prstGeom>
-          <a:noFill/>
-        </p:spPr>
-        <p:txBody>
-          <a:bodyPr wrap="square" lIns="45720" rIns="45720">
-            <a:spAutoFit/>
-          </a:bodyPr>
-          <a:lstStyle/>
-          <a:p>
-            <a:r>
-              <a:rPr sz="1100" b="0">
-                <a:solidFill>
-                  <a:srgbClr val="5B6770"/>
-                </a:solidFill>
-              </a:rPr>
-              <a:t>CEN429 Secure Programming · Week 8</a:t>
-            </a:r>
-          </a:p>
-        </p:txBody>
-      </p:sp>
-      <p:sp>
-        <p:nvSpPr>
-          <p:cNvPr id="4" name="TextBox 3"/>
-          <p:cNvSpPr txBox="1"/>
-          <p:nvPr/>
-        </p:nvSpPr>
-        <p:spPr>
-          <a:xfrm>
-            <a:off x="640080" y="6446520"/>
-            <a:ext cx="7315200" cy="274320"/>
-          </a:xfrm>
-          <a:prstGeom prst="rect">
-            <a:avLst/>
-          </a:prstGeom>
-          <a:noFill/>
-        </p:spPr>
-        <p:txBody>
-          <a:bodyPr wrap="square" lIns="45720" rIns="45720">
-            <a:spAutoFit/>
-          </a:bodyPr>
-          <a:lstStyle/>
-          <a:p>
-            <a:r>
-              <a:rPr sz="1000" b="0">
-                <a:solidFill>
-                  <a:srgbClr val="5B6770"/>
-                </a:solidFill>
-              </a:rPr>
-              <a:t>RTEU Computer Engineering · 2026-2027 Fall</a:t>
-            </a:r>
-          </a:p>
-        </p:txBody>
-      </p:sp>
-      <p:sp>
-        <p:nvSpPr>
-          <p:cNvPr id="5" name="TextBox 4"/>
-          <p:cNvSpPr txBox="1"/>
-          <p:nvPr/>
-        </p:nvSpPr>
-        <p:spPr>
-          <a:xfrm>
-            <a:off x="10637215" y="6446520"/>
-            <a:ext cx="914400" cy="274320"/>
-          </a:xfrm>
-          <a:prstGeom prst="rect">
-            <a:avLst/>
-          </a:prstGeom>
-          <a:noFill/>
-        </p:spPr>
-        <p:txBody>
-          <a:bodyPr wrap="square" lIns="45720" rIns="45720">
-            <a:spAutoFit/>
-          </a:bodyPr>
-          <a:lstStyle/>
-          <a:p>
-            <a:pPr algn="r"/>
-            <a:r>
-              <a:rPr sz="1000" b="0">
-                <a:solidFill>
-                  <a:srgbClr val="5B6770"/>
-                </a:solidFill>
-              </a:rPr>
-              <a:t>6</a:t>
+              <a:t>4</a:t>
             </a:r>
           </a:p>
         </p:txBody>
@@ -13911,6 +10588,40 @@
           </a:graphicData>
         </a:graphic>
       </p:graphicFrame>
+      <p:sp>
+        <p:nvSpPr>
+          <p:cNvPr id="8" name="TextBox 7"/>
+          <p:cNvSpPr txBox="1"/>
+          <p:nvPr/>
+        </p:nvSpPr>
+        <p:spPr>
+          <a:xfrm>
+            <a:off x="640080" y="4365345"/>
+            <a:ext cx="10911535" cy="704088"/>
+          </a:xfrm>
+          <a:prstGeom prst="rect">
+            <a:avLst/>
+          </a:prstGeom>
+          <a:noFill/>
+        </p:spPr>
+        <p:txBody>
+          <a:bodyPr wrap="square" lIns="45720" rIns="45720">
+            <a:spAutoFit/>
+          </a:bodyPr>
+          <a:lstStyle/>
+          <a:p>
+            <a:pPr algn="l"/>
+            <a:r>
+              <a:rPr sz="1800" b="0" i="1">
+                <a:solidFill>
+                  <a:srgbClr val="1F2D3A"/>
+                </a:solidFill>
+              </a:rPr>
+              <a:t>Note: Week 4 — three layers (code → compiler/OS → obfuscation); Week 5 — a managed language solves memory errors, not injection.</a:t>
+            </a:r>
+          </a:p>
+        </p:txBody>
+      </p:sp>
     </p:spTree>
   </p:cSld>
   <p:clrMapOvr>
@@ -13919,7 +10630,7 @@
 </p:sld>
 </file>
 
-<file path=ppt/slides/slide7.xml><?xml version="1.0" encoding="utf-8"?>
+<file path=ppt/slides/slide5.xml><?xml version="1.0" encoding="utf-8"?>
 <p:sld xmlns:a="http://schemas.openxmlformats.org/drawingml/2006/main" xmlns:p="http://schemas.openxmlformats.org/presentationml/2006/main" xmlns:r="http://schemas.openxmlformats.org/officeDocument/2006/relationships">
   <p:cSld>
     <p:spTree>
@@ -14048,7 +10759,7 @@
                   <a:srgbClr val="5B6770"/>
                 </a:solidFill>
               </a:rPr>
-              <a:t>7</a:t>
+              <a:t>5</a:t>
             </a:r>
           </a:p>
         </p:txBody>
@@ -14081,14 +10792,14 @@
                   <a:srgbClr val="006D77"/>
                 </a:solidFill>
               </a:rPr>
-              <a:t>Question Types — Diagram</a:t>
+              <a:t>Quiz-1 Scope — Diagram</a:t>
             </a:r>
           </a:p>
         </p:txBody>
       </p:sp>
       <p:pic>
         <p:nvPicPr>
-          <p:cNvPr id="7" name="Picture 6" descr="h08-02-soru-tipleri.png"/>
+          <p:cNvPr id="7" name="Picture 6" descr="h08-01-kapsam.png"/>
           <p:cNvPicPr>
             <a:picLocks noChangeAspect="1"/>
           </p:cNvPicPr>
@@ -14102,8 +10813,8 @@
         </p:blipFill>
         <p:spPr>
           <a:xfrm>
-            <a:off x="2046645" y="1325880"/>
-            <a:ext cx="8098404" cy="3210484"/>
+            <a:off x="1971189" y="1325880"/>
+            <a:ext cx="8249317" cy="4828032"/>
           </a:xfrm>
           <a:prstGeom prst="rect">
             <a:avLst/>
@@ -14118,7 +10829,7 @@
 </p:sld>
 </file>
 
-<file path=ppt/slides/slide8.xml><?xml version="1.0" encoding="utf-8"?>
+<file path=ppt/slides/slide6.xml><?xml version="1.0" encoding="utf-8"?>
 <p:sld xmlns:a="http://schemas.openxmlformats.org/drawingml/2006/main" xmlns:p="http://schemas.openxmlformats.org/presentationml/2006/main" xmlns:r="http://schemas.openxmlformats.org/officeDocument/2006/relationships">
   <p:cSld>
     <p:spTree>
@@ -14247,7 +10958,7 @@
                   <a:srgbClr val="5B6770"/>
                 </a:solidFill>
               </a:rPr>
-              <a:t>8</a:t>
+              <a:t>6</a:t>
             </a:r>
           </a:p>
         </p:txBody>
@@ -14840,7 +11551,7 @@
 </p:sld>
 </file>
 
-<file path=ppt/slides/slide9.xml><?xml version="1.0" encoding="utf-8"?>
+<file path=ppt/slides/slide7.xml><?xml version="1.0" encoding="utf-8"?>
 <p:sld xmlns:a="http://schemas.openxmlformats.org/drawingml/2006/main" xmlns:p="http://schemas.openxmlformats.org/presentationml/2006/main" xmlns:r="http://schemas.openxmlformats.org/officeDocument/2006/relationships">
   <p:cSld>
     <p:spTree>
@@ -14969,7 +11680,7 @@
                   <a:srgbClr val="5B6770"/>
                 </a:solidFill>
               </a:rPr>
-              <a:t>9</a:t>
+              <a:t>7</a:t>
             </a:r>
           </a:p>
         </p:txBody>
@@ -15627,6 +12338,732 @@
           </a:graphicData>
         </a:graphic>
       </p:graphicFrame>
+    </p:spTree>
+  </p:cSld>
+  <p:clrMapOvr>
+    <a:masterClrMapping/>
+  </p:clrMapOvr>
+</p:sld>
+</file>
+
+<file path=ppt/slides/slide8.xml><?xml version="1.0" encoding="utf-8"?>
+<p:sld xmlns:a="http://schemas.openxmlformats.org/drawingml/2006/main" xmlns:p="http://schemas.openxmlformats.org/presentationml/2006/main" xmlns:r="http://schemas.openxmlformats.org/officeDocument/2006/relationships">
+  <p:cSld>
+    <p:spTree>
+      <p:nvGrpSpPr>
+        <p:cNvPr id="1" name=""/>
+        <p:cNvGrpSpPr/>
+        <p:nvPr/>
+      </p:nvGrpSpPr>
+      <p:grpSpPr/>
+      <p:pic>
+        <p:nvPicPr>
+          <p:cNvPr id="2" name="Picture 1" descr="rteu_logo_kucuk.jpg"/>
+          <p:cNvPicPr>
+            <a:picLocks noChangeAspect="1"/>
+          </p:cNvPicPr>
+          <p:nvPr/>
+        </p:nvPicPr>
+        <p:blipFill>
+          <a:blip r:embed="rId2"/>
+          <a:stretch>
+            <a:fillRect/>
+          </a:stretch>
+        </p:blipFill>
+        <p:spPr>
+          <a:xfrm>
+            <a:off x="640080" y="164592"/>
+            <a:ext cx="242773" cy="329184"/>
+          </a:xfrm>
+          <a:prstGeom prst="rect">
+            <a:avLst/>
+          </a:prstGeom>
+        </p:spPr>
+      </p:pic>
+      <p:sp>
+        <p:nvSpPr>
+          <p:cNvPr id="3" name="TextBox 2"/>
+          <p:cNvSpPr txBox="1"/>
+          <p:nvPr/>
+        </p:nvSpPr>
+        <p:spPr>
+          <a:xfrm>
+            <a:off x="1051560" y="182880"/>
+            <a:ext cx="7315200" cy="320040"/>
+          </a:xfrm>
+          <a:prstGeom prst="rect">
+            <a:avLst/>
+          </a:prstGeom>
+          <a:noFill/>
+        </p:spPr>
+        <p:txBody>
+          <a:bodyPr wrap="square" lIns="45720" rIns="45720">
+            <a:spAutoFit/>
+          </a:bodyPr>
+          <a:lstStyle/>
+          <a:p>
+            <a:r>
+              <a:rPr sz="1100" b="0">
+                <a:solidFill>
+                  <a:srgbClr val="5B6770"/>
+                </a:solidFill>
+              </a:rPr>
+              <a:t>CEN429 Secure Programming · Week 8</a:t>
+            </a:r>
+          </a:p>
+        </p:txBody>
+      </p:sp>
+      <p:sp>
+        <p:nvSpPr>
+          <p:cNvPr id="4" name="TextBox 3"/>
+          <p:cNvSpPr txBox="1"/>
+          <p:nvPr/>
+        </p:nvSpPr>
+        <p:spPr>
+          <a:xfrm>
+            <a:off x="640080" y="6446520"/>
+            <a:ext cx="7315200" cy="274320"/>
+          </a:xfrm>
+          <a:prstGeom prst="rect">
+            <a:avLst/>
+          </a:prstGeom>
+          <a:noFill/>
+        </p:spPr>
+        <p:txBody>
+          <a:bodyPr wrap="square" lIns="45720" rIns="45720">
+            <a:spAutoFit/>
+          </a:bodyPr>
+          <a:lstStyle/>
+          <a:p>
+            <a:r>
+              <a:rPr sz="1000" b="0">
+                <a:solidFill>
+                  <a:srgbClr val="5B6770"/>
+                </a:solidFill>
+              </a:rPr>
+              <a:t>RTEU Computer Engineering · 2026-2027 Fall</a:t>
+            </a:r>
+          </a:p>
+        </p:txBody>
+      </p:sp>
+      <p:sp>
+        <p:nvSpPr>
+          <p:cNvPr id="5" name="TextBox 4"/>
+          <p:cNvSpPr txBox="1"/>
+          <p:nvPr/>
+        </p:nvSpPr>
+        <p:spPr>
+          <a:xfrm>
+            <a:off x="10637215" y="6446520"/>
+            <a:ext cx="914400" cy="274320"/>
+          </a:xfrm>
+          <a:prstGeom prst="rect">
+            <a:avLst/>
+          </a:prstGeom>
+          <a:noFill/>
+        </p:spPr>
+        <p:txBody>
+          <a:bodyPr wrap="square" lIns="45720" rIns="45720">
+            <a:spAutoFit/>
+          </a:bodyPr>
+          <a:lstStyle/>
+          <a:p>
+            <a:pPr algn="r"/>
+            <a:r>
+              <a:rPr sz="1000" b="0">
+                <a:solidFill>
+                  <a:srgbClr val="5B6770"/>
+                </a:solidFill>
+              </a:rPr>
+              <a:t>8</a:t>
+            </a:r>
+          </a:p>
+        </p:txBody>
+      </p:sp>
+      <p:sp>
+        <p:nvSpPr>
+          <p:cNvPr id="6" name="TextBox 5"/>
+          <p:cNvSpPr txBox="1"/>
+          <p:nvPr/>
+        </p:nvSpPr>
+        <p:spPr>
+          <a:xfrm>
+            <a:off x="640080" y="548640"/>
+            <a:ext cx="10911535" cy="731520"/>
+          </a:xfrm>
+          <a:prstGeom prst="rect">
+            <a:avLst/>
+          </a:prstGeom>
+          <a:noFill/>
+        </p:spPr>
+        <p:txBody>
+          <a:bodyPr wrap="square" lIns="45720" rIns="45720" anchor="ctr">
+            <a:spAutoFit/>
+          </a:bodyPr>
+          <a:lstStyle/>
+          <a:p>
+            <a:r>
+              <a:rPr sz="2600" b="1">
+                <a:solidFill>
+                  <a:srgbClr val="006D77"/>
+                </a:solidFill>
+              </a:rPr>
+              <a:t>Frequently Confused (3)</a:t>
+            </a:r>
+          </a:p>
+        </p:txBody>
+      </p:sp>
+      <p:graphicFrame>
+        <p:nvGraphicFramePr>
+          <p:cNvPr id="7" name="Table 6"/>
+          <p:cNvGraphicFramePr>
+            <a:graphicFrameLocks noGrp="1"/>
+          </p:cNvGraphicFramePr>
+          <p:nvPr/>
+        </p:nvGraphicFramePr>
+        <p:xfrm>
+          <a:off x="640080" y="1325880"/>
+          <a:ext cx="10184097" cy="1755648"/>
+        </p:xfrm>
+        <a:graphic>
+          <a:graphicData uri="http://schemas.openxmlformats.org/drawingml/2006/table">
+            <a:tbl>
+              <a:tblPr firstRow="1" bandRow="1">
+                <a:tableStyleId>{5C22544A-7EE6-4342-B048-85BDC9FD1C3A}</a:tableStyleId>
+              </a:tblPr>
+              <a:tblGrid>
+                <a:gridCol w="2364165"/>
+                <a:gridCol w="3637178"/>
+                <a:gridCol w="4182754"/>
+              </a:tblGrid>
+              <a:tr h="351129">
+                <a:tc>
+                  <a:txBody>
+                    <a:bodyPr wrap="square"/>
+                    <a:lstStyle/>
+                    <a:p>
+                      <a:r>
+                        <a:rPr sz="1296" b="1">
+                          <a:solidFill>
+                            <a:srgbClr val="FFFFFF"/>
+                          </a:solidFill>
+                        </a:rPr>
+                        <a:t>A</a:t>
+                      </a:r>
+                    </a:p>
+                  </a:txBody>
+                  <a:tcPr marL="54864" marR="54864" marT="27432" marB="27432" anchor="ctr">
+                    <a:solidFill>
+                      <a:srgbClr val="006D77"/>
+                    </a:solidFill>
+                  </a:tcPr>
+                </a:tc>
+                <a:tc>
+                  <a:txBody>
+                    <a:bodyPr wrap="square"/>
+                    <a:lstStyle/>
+                    <a:p>
+                      <a:r>
+                        <a:rPr sz="1296" b="1">
+                          <a:solidFill>
+                            <a:srgbClr val="FFFFFF"/>
+                          </a:solidFill>
+                        </a:rPr>
+                        <a:t>B</a:t>
+                      </a:r>
+                    </a:p>
+                  </a:txBody>
+                  <a:tcPr marL="54864" marR="54864" marT="27432" marB="27432" anchor="ctr">
+                    <a:solidFill>
+                      <a:srgbClr val="006D77"/>
+                    </a:solidFill>
+                  </a:tcPr>
+                </a:tc>
+                <a:tc>
+                  <a:txBody>
+                    <a:bodyPr wrap="square"/>
+                    <a:lstStyle/>
+                    <a:p>
+                      <a:r>
+                        <a:rPr sz="1296" b="1">
+                          <a:solidFill>
+                            <a:srgbClr val="FFFFFF"/>
+                          </a:solidFill>
+                        </a:rPr>
+                        <a:t>Difference</a:t>
+                      </a:r>
+                    </a:p>
+                  </a:txBody>
+                  <a:tcPr marL="54864" marR="54864" marT="27432" marB="27432" anchor="ctr">
+                    <a:solidFill>
+                      <a:srgbClr val="006D77"/>
+                    </a:solidFill>
+                  </a:tcPr>
+                </a:tc>
+              </a:tr>
+              <a:tr h="351129">
+                <a:tc>
+                  <a:txBody>
+                    <a:bodyPr wrap="square"/>
+                    <a:lstStyle/>
+                    <a:p>
+                      <a:r>
+                        <a:rPr sz="1296" b="0">
+                          <a:solidFill>
+                            <a:srgbClr val="1F2D3A"/>
+                          </a:solidFill>
+                        </a:rPr>
+                        <a:t>Bug</a:t>
+                      </a:r>
+                    </a:p>
+                  </a:txBody>
+                  <a:tcPr marL="54864" marR="54864" marT="27432" marB="27432" anchor="ctr">
+                    <a:solidFill>
+                      <a:srgbClr val="FFFFFF"/>
+                    </a:solidFill>
+                  </a:tcPr>
+                </a:tc>
+                <a:tc>
+                  <a:txBody>
+                    <a:bodyPr wrap="square"/>
+                    <a:lstStyle/>
+                    <a:p>
+                      <a:r>
+                        <a:rPr sz="1296" b="0">
+                          <a:solidFill>
+                            <a:srgbClr val="1F2D3A"/>
+                          </a:solidFill>
+                        </a:rPr>
+                        <a:t>Vulnerability</a:t>
+                      </a:r>
+                    </a:p>
+                  </a:txBody>
+                  <a:tcPr marL="54864" marR="54864" marT="27432" marB="27432" anchor="ctr">
+                    <a:solidFill>
+                      <a:srgbClr val="FFFFFF"/>
+                    </a:solidFill>
+                  </a:tcPr>
+                </a:tc>
+                <a:tc>
+                  <a:txBody>
+                    <a:bodyPr wrap="square"/>
+                    <a:lstStyle/>
+                    <a:p>
+                      <a:r>
+                        <a:rPr sz="1296" b="0">
+                          <a:solidFill>
+                            <a:srgbClr val="1F2D3A"/>
+                          </a:solidFill>
+                        </a:rPr>
+                        <a:t>An exploitable bug</a:t>
+                      </a:r>
+                    </a:p>
+                  </a:txBody>
+                  <a:tcPr marL="54864" marR="54864" marT="27432" marB="27432" anchor="ctr">
+                    <a:solidFill>
+                      <a:srgbClr val="FFFFFF"/>
+                    </a:solidFill>
+                  </a:tcPr>
+                </a:tc>
+              </a:tr>
+              <a:tr h="351129">
+                <a:tc>
+                  <a:txBody>
+                    <a:bodyPr wrap="square"/>
+                    <a:lstStyle/>
+                    <a:p>
+                      <a:r>
+                        <a:rPr sz="1296" b="0">
+                          <a:solidFill>
+                            <a:srgbClr val="1F2D3A"/>
+                          </a:solidFill>
+                        </a:rPr>
+                        <a:t>Black-box</a:t>
+                      </a:r>
+                    </a:p>
+                  </a:txBody>
+                  <a:tcPr marL="54864" marR="54864" marT="27432" marB="27432" anchor="ctr">
+                    <a:solidFill>
+                      <a:srgbClr val="EEF7F8"/>
+                    </a:solidFill>
+                  </a:tcPr>
+                </a:tc>
+                <a:tc>
+                  <a:txBody>
+                    <a:bodyPr wrap="square"/>
+                    <a:lstStyle/>
+                    <a:p>
+                      <a:r>
+                        <a:rPr sz="1296" b="0">
+                          <a:solidFill>
+                            <a:srgbClr val="1F2D3A"/>
+                          </a:solidFill>
+                        </a:rPr>
+                        <a:t>White-box (MATE)</a:t>
+                      </a:r>
+                    </a:p>
+                  </a:txBody>
+                  <a:tcPr marL="54864" marR="54864" marT="27432" marB="27432" anchor="ctr">
+                    <a:solidFill>
+                      <a:srgbClr val="EEF7F8"/>
+                    </a:solidFill>
+                  </a:tcPr>
+                </a:tc>
+                <a:tc>
+                  <a:txBody>
+                    <a:bodyPr wrap="square"/>
+                    <a:lstStyle/>
+                    <a:p>
+                      <a:r>
+                        <a:rPr sz="1296" b="0">
+                          <a:solidFill>
+                            <a:srgbClr val="1F2D3A"/>
+                          </a:solidFill>
+                        </a:rPr>
+                        <a:t>Has the program</a:t>
+                      </a:r>
+                    </a:p>
+                  </a:txBody>
+                  <a:tcPr marL="54864" marR="54864" marT="27432" marB="27432" anchor="ctr">
+                    <a:solidFill>
+                      <a:srgbClr val="EEF7F8"/>
+                    </a:solidFill>
+                  </a:tcPr>
+                </a:tc>
+              </a:tr>
+              <a:tr h="351129">
+                <a:tc>
+                  <a:txBody>
+                    <a:bodyPr wrap="square"/>
+                    <a:lstStyle/>
+                    <a:p>
+                      <a:r>
+                        <a:rPr sz="1296" b="0">
+                          <a:solidFill>
+                            <a:srgbClr val="1F2D3A"/>
+                          </a:solidFill>
+                        </a:rPr>
+                        <a:t>Symmetric</a:t>
+                      </a:r>
+                    </a:p>
+                  </a:txBody>
+                  <a:tcPr marL="54864" marR="54864" marT="27432" marB="27432" anchor="ctr">
+                    <a:solidFill>
+                      <a:srgbClr val="FFFFFF"/>
+                    </a:solidFill>
+                  </a:tcPr>
+                </a:tc>
+                <a:tc>
+                  <a:txBody>
+                    <a:bodyPr wrap="square"/>
+                    <a:lstStyle/>
+                    <a:p>
+                      <a:r>
+                        <a:rPr sz="1296" b="0">
+                          <a:solidFill>
+                            <a:srgbClr val="1F2D3A"/>
+                          </a:solidFill>
+                        </a:rPr>
+                        <a:t>Asymmetric</a:t>
+                      </a:r>
+                    </a:p>
+                  </a:txBody>
+                  <a:tcPr marL="54864" marR="54864" marT="27432" marB="27432" anchor="ctr">
+                    <a:solidFill>
+                      <a:srgbClr val="FFFFFF"/>
+                    </a:solidFill>
+                  </a:tcPr>
+                </a:tc>
+                <a:tc>
+                  <a:txBody>
+                    <a:bodyPr wrap="square"/>
+                    <a:lstStyle/>
+                    <a:p>
+                      <a:r>
+                        <a:rPr sz="1296" b="0">
+                          <a:solidFill>
+                            <a:srgbClr val="1F2D3A"/>
+                          </a:solidFill>
+                        </a:rPr>
+                        <a:t>Single / paired key</a:t>
+                      </a:r>
+                    </a:p>
+                  </a:txBody>
+                  <a:tcPr marL="54864" marR="54864" marT="27432" marB="27432" anchor="ctr">
+                    <a:solidFill>
+                      <a:srgbClr val="FFFFFF"/>
+                    </a:solidFill>
+                  </a:tcPr>
+                </a:tc>
+              </a:tr>
+              <a:tr h="351132">
+                <a:tc>
+                  <a:txBody>
+                    <a:bodyPr wrap="square"/>
+                    <a:lstStyle/>
+                    <a:p>
+                      <a:r>
+                        <a:rPr sz="1296" b="0">
+                          <a:solidFill>
+                            <a:srgbClr val="1F2D3A"/>
+                          </a:solidFill>
+                        </a:rPr>
+                        <a:t>AEAD</a:t>
+                      </a:r>
+                    </a:p>
+                  </a:txBody>
+                  <a:tcPr marL="54864" marR="54864" marT="27432" marB="27432" anchor="ctr">
+                    <a:solidFill>
+                      <a:srgbClr val="EEF7F8"/>
+                    </a:solidFill>
+                  </a:tcPr>
+                </a:tc>
+                <a:tc>
+                  <a:txBody>
+                    <a:bodyPr wrap="square"/>
+                    <a:lstStyle/>
+                    <a:p>
+                      <a:r>
+                        <a:rPr sz="1296" b="0">
+                          <a:solidFill>
+                            <a:srgbClr val="1F2D3A"/>
+                          </a:solidFill>
+                        </a:rPr>
+                        <a:t>Encryption only</a:t>
+                      </a:r>
+                    </a:p>
+                  </a:txBody>
+                  <a:tcPr marL="54864" marR="54864" marT="27432" marB="27432" anchor="ctr">
+                    <a:solidFill>
+                      <a:srgbClr val="EEF7F8"/>
+                    </a:solidFill>
+                  </a:tcPr>
+                </a:tc>
+                <a:tc>
+                  <a:txBody>
+                    <a:bodyPr wrap="square"/>
+                    <a:lstStyle/>
+                    <a:p>
+                      <a:r>
+                        <a:rPr sz="1296" b="0">
+                          <a:solidFill>
+                            <a:srgbClr val="1F2D3A"/>
+                          </a:solidFill>
+                        </a:rPr>
+                        <a:t>+ integrity</a:t>
+                      </a:r>
+                    </a:p>
+                  </a:txBody>
+                  <a:tcPr marL="54864" marR="54864" marT="27432" marB="27432" anchor="ctr">
+                    <a:solidFill>
+                      <a:srgbClr val="EEF7F8"/>
+                    </a:solidFill>
+                  </a:tcPr>
+                </a:tc>
+              </a:tr>
+            </a:tbl>
+          </a:graphicData>
+        </a:graphic>
+      </p:graphicFrame>
+    </p:spTree>
+  </p:cSld>
+  <p:clrMapOvr>
+    <a:masterClrMapping/>
+  </p:clrMapOvr>
+</p:sld>
+</file>
+
+<file path=ppt/slides/slide9.xml><?xml version="1.0" encoding="utf-8"?>
+<p:sld xmlns:a="http://schemas.openxmlformats.org/drawingml/2006/main" xmlns:p="http://schemas.openxmlformats.org/presentationml/2006/main" xmlns:r="http://schemas.openxmlformats.org/officeDocument/2006/relationships">
+  <p:cSld>
+    <p:spTree>
+      <p:nvGrpSpPr>
+        <p:cNvPr id="1" name=""/>
+        <p:cNvGrpSpPr/>
+        <p:nvPr/>
+      </p:nvGrpSpPr>
+      <p:grpSpPr/>
+      <p:pic>
+        <p:nvPicPr>
+          <p:cNvPr id="2" name="Picture 1" descr="rteu_logo_kucuk.jpg"/>
+          <p:cNvPicPr>
+            <a:picLocks noChangeAspect="1"/>
+          </p:cNvPicPr>
+          <p:nvPr/>
+        </p:nvPicPr>
+        <p:blipFill>
+          <a:blip r:embed="rId2"/>
+          <a:stretch>
+            <a:fillRect/>
+          </a:stretch>
+        </p:blipFill>
+        <p:spPr>
+          <a:xfrm>
+            <a:off x="640080" y="164592"/>
+            <a:ext cx="242773" cy="329184"/>
+          </a:xfrm>
+          <a:prstGeom prst="rect">
+            <a:avLst/>
+          </a:prstGeom>
+        </p:spPr>
+      </p:pic>
+      <p:sp>
+        <p:nvSpPr>
+          <p:cNvPr id="3" name="TextBox 2"/>
+          <p:cNvSpPr txBox="1"/>
+          <p:nvPr/>
+        </p:nvSpPr>
+        <p:spPr>
+          <a:xfrm>
+            <a:off x="1051560" y="182880"/>
+            <a:ext cx="7315200" cy="320040"/>
+          </a:xfrm>
+          <a:prstGeom prst="rect">
+            <a:avLst/>
+          </a:prstGeom>
+          <a:noFill/>
+        </p:spPr>
+        <p:txBody>
+          <a:bodyPr wrap="square" lIns="45720" rIns="45720">
+            <a:spAutoFit/>
+          </a:bodyPr>
+          <a:lstStyle/>
+          <a:p>
+            <a:r>
+              <a:rPr sz="1100" b="0">
+                <a:solidFill>
+                  <a:srgbClr val="5B6770"/>
+                </a:solidFill>
+              </a:rPr>
+              <a:t>CEN429 Secure Programming · Week 8</a:t>
+            </a:r>
+          </a:p>
+        </p:txBody>
+      </p:sp>
+      <p:sp>
+        <p:nvSpPr>
+          <p:cNvPr id="4" name="TextBox 3"/>
+          <p:cNvSpPr txBox="1"/>
+          <p:nvPr/>
+        </p:nvSpPr>
+        <p:spPr>
+          <a:xfrm>
+            <a:off x="640080" y="6446520"/>
+            <a:ext cx="7315200" cy="274320"/>
+          </a:xfrm>
+          <a:prstGeom prst="rect">
+            <a:avLst/>
+          </a:prstGeom>
+          <a:noFill/>
+        </p:spPr>
+        <p:txBody>
+          <a:bodyPr wrap="square" lIns="45720" rIns="45720">
+            <a:spAutoFit/>
+          </a:bodyPr>
+          <a:lstStyle/>
+          <a:p>
+            <a:r>
+              <a:rPr sz="1000" b="0">
+                <a:solidFill>
+                  <a:srgbClr val="5B6770"/>
+                </a:solidFill>
+              </a:rPr>
+              <a:t>RTEU Computer Engineering · 2026-2027 Fall</a:t>
+            </a:r>
+          </a:p>
+        </p:txBody>
+      </p:sp>
+      <p:sp>
+        <p:nvSpPr>
+          <p:cNvPr id="5" name="TextBox 4"/>
+          <p:cNvSpPr txBox="1"/>
+          <p:nvPr/>
+        </p:nvSpPr>
+        <p:spPr>
+          <a:xfrm>
+            <a:off x="10637215" y="6446520"/>
+            <a:ext cx="914400" cy="274320"/>
+          </a:xfrm>
+          <a:prstGeom prst="rect">
+            <a:avLst/>
+          </a:prstGeom>
+          <a:noFill/>
+        </p:spPr>
+        <p:txBody>
+          <a:bodyPr wrap="square" lIns="45720" rIns="45720">
+            <a:spAutoFit/>
+          </a:bodyPr>
+          <a:lstStyle/>
+          <a:p>
+            <a:pPr algn="r"/>
+            <a:r>
+              <a:rPr sz="1000" b="0">
+                <a:solidFill>
+                  <a:srgbClr val="5B6770"/>
+                </a:solidFill>
+              </a:rPr>
+              <a:t>9</a:t>
+            </a:r>
+          </a:p>
+        </p:txBody>
+      </p:sp>
+      <p:sp>
+        <p:nvSpPr>
+          <p:cNvPr id="6" name="TextBox 5"/>
+          <p:cNvSpPr txBox="1"/>
+          <p:nvPr/>
+        </p:nvSpPr>
+        <p:spPr>
+          <a:xfrm>
+            <a:off x="640080" y="548640"/>
+            <a:ext cx="10911535" cy="731520"/>
+          </a:xfrm>
+          <a:prstGeom prst="rect">
+            <a:avLst/>
+          </a:prstGeom>
+          <a:noFill/>
+        </p:spPr>
+        <p:txBody>
+          <a:bodyPr wrap="square" lIns="45720" rIns="45720" anchor="ctr">
+            <a:spAutoFit/>
+          </a:bodyPr>
+          <a:lstStyle/>
+          <a:p>
+            <a:r>
+              <a:rPr sz="3000" b="1">
+                <a:solidFill>
+                  <a:srgbClr val="006D77"/>
+                </a:solidFill>
+              </a:rPr>
+              <a:t>Question Types — Diagram</a:t>
+            </a:r>
+          </a:p>
+        </p:txBody>
+      </p:sp>
+      <p:pic>
+        <p:nvPicPr>
+          <p:cNvPr id="7" name="Picture 6" descr="h08-02-soru-tipleri.png"/>
+          <p:cNvPicPr>
+            <a:picLocks noChangeAspect="1"/>
+          </p:cNvPicPr>
+          <p:nvPr/>
+        </p:nvPicPr>
+        <p:blipFill>
+          <a:blip r:embed="rId3"/>
+          <a:stretch>
+            <a:fillRect/>
+          </a:stretch>
+        </p:blipFill>
+        <p:spPr>
+          <a:xfrm>
+            <a:off x="640080" y="1325880"/>
+            <a:ext cx="10911535" cy="2380977"/>
+          </a:xfrm>
+          <a:prstGeom prst="rect">
+            <a:avLst/>
+          </a:prstGeom>
+        </p:spPr>
+      </p:pic>
     </p:spTree>
   </p:cSld>
   <p:clrMapOvr>
